--- a/语义关联技术方案PPT.pptx
+++ b/语义关联技术方案PPT.pptx
@@ -1,20 +1,21 @@
 
 <file path=ppt/presentation.xml><?xml version="1.0" encoding="utf-8"?>
-<p:presentation xmlns:a="http://schemas.openxmlformats.org/drawingml/2006/main" xmlns:r="http://schemas.openxmlformats.org/officeDocument/2006/relationships" xmlns:mc="http://schemas.openxmlformats.org/markup-compatibility/2006" xmlns:mv="urn:schemas-microsoft-com:mac:vml" xmlns:p="http://schemas.openxmlformats.org/presentationml/2006/main" xmlns:c="http://schemas.openxmlformats.org/drawingml/2006/chart" xmlns:dgm="http://schemas.openxmlformats.org/drawingml/2006/diagram" xmlns:o="urn:schemas-microsoft-com:office:office" xmlns:v="urn:schemas-microsoft-com:vml" xmlns:pvml="urn:schemas-microsoft-com:office:powerpoint" xmlns:com="http://schemas.openxmlformats.org/drawingml/2006/compatibility" xmlns:p14="http://schemas.microsoft.com/office/powerpoint/2010/main" xmlns:p15="http://schemas.microsoft.com/office/powerpoint/2012/main" xmlns:ahyp="http://schemas.microsoft.com/office/drawing/2018/hyperlinkcolor" autoCompressPictures="0" strictFirstAndLastChars="0" saveSubsetFonts="1">
+<p:presentation xmlns:a="http://schemas.openxmlformats.org/drawingml/2006/main" xmlns:r="http://schemas.openxmlformats.org/officeDocument/2006/relationships" xmlns:p="http://schemas.openxmlformats.org/presentationml/2006/main" strictFirstAndLastChars="0" autoCompressPictures="0">
   <p:sldMasterIdLst>
-    <p:sldMasterId id="2147483659" r:id="rId4"/>
-    <p:sldMasterId id="2147483660" r:id="rId8"/>
+    <p:sldMasterId id="2147483648" r:id="rId1"/>
+    <p:sldMasterId id="2147483660" r:id="rId3"/>
   </p:sldMasterIdLst>
   <p:notesMasterIdLst>
-    <p:notesMasterId r:id="rId6"/>
+    <p:notesMasterId r:id="rId5"/>
   </p:notesMasterIdLst>
   <p:sldIdLst>
-    <p:sldId id="256" r:id="rId9"/>
+    <p:sldId id="256" r:id="rId4"/>
+    <p:sldId id="257" r:id="rId6"/>
   </p:sldIdLst>
   <p:sldSz cx="12192000" cy="6858000"/>
   <p:notesSz cx="6858000" cy="9144000"/>
   <p:defaultTextStyle>
-    <a:defPPr lvl="0" marR="0" rtl="0" algn="l">
+    <a:defPPr marR="0" lvl="0" algn="l" rtl="0">
       <a:lnSpc>
         <a:spcPct val="100000"/>
       </a:lnSpc>
@@ -25,7 +26,7 @@
         <a:spcPts val="0"/>
       </a:spcAft>
     </a:defPPr>
-    <a:lvl1pPr lvl="0" marR="0" rtl="0" algn="l">
+    <a:lvl1pPr marR="0" lvl="0" algn="l" rtl="0">
       <a:lnSpc>
         <a:spcPct val="100000"/>
       </a:lnSpc>
@@ -38,18 +39,18 @@
       <a:buClr>
         <a:srgbClr val="000000"/>
       </a:buClr>
-      <a:buFont typeface="Arial"/>
-      <a:defRPr b="0" i="0" sz="1400" u="none" cap="none" strike="noStrike">
+      <a:buFont typeface="Arial" panose="020B0604020202020204"/>
+      <a:defRPr sz="1400" b="0" i="0" u="none" strike="noStrike" cap="none">
         <a:solidFill>
           <a:srgbClr val="000000"/>
         </a:solidFill>
-        <a:latin typeface="Arial"/>
-        <a:ea typeface="Arial"/>
-        <a:cs typeface="Arial"/>
-        <a:sym typeface="Arial"/>
+        <a:latin typeface="Arial" panose="020B0604020202020204"/>
+        <a:ea typeface="Arial" panose="020B0604020202020204"/>
+        <a:cs typeface="Arial" panose="020B0604020202020204"/>
+        <a:sym typeface="Arial" panose="020B0604020202020204"/>
       </a:defRPr>
     </a:lvl1pPr>
-    <a:lvl2pPr lvl="1" marR="0" rtl="0" algn="l">
+    <a:lvl2pPr marR="0" lvl="1" algn="l" rtl="0">
       <a:lnSpc>
         <a:spcPct val="100000"/>
       </a:lnSpc>
@@ -62,18 +63,18 @@
       <a:buClr>
         <a:srgbClr val="000000"/>
       </a:buClr>
-      <a:buFont typeface="Arial"/>
-      <a:defRPr b="0" i="0" sz="1400" u="none" cap="none" strike="noStrike">
+      <a:buFont typeface="Arial" panose="020B0604020202020204"/>
+      <a:defRPr sz="1400" b="0" i="0" u="none" strike="noStrike" cap="none">
         <a:solidFill>
           <a:srgbClr val="000000"/>
         </a:solidFill>
-        <a:latin typeface="Arial"/>
-        <a:ea typeface="Arial"/>
-        <a:cs typeface="Arial"/>
-        <a:sym typeface="Arial"/>
+        <a:latin typeface="Arial" panose="020B0604020202020204"/>
+        <a:ea typeface="Arial" panose="020B0604020202020204"/>
+        <a:cs typeface="Arial" panose="020B0604020202020204"/>
+        <a:sym typeface="Arial" panose="020B0604020202020204"/>
       </a:defRPr>
     </a:lvl2pPr>
-    <a:lvl3pPr lvl="2" marR="0" rtl="0" algn="l">
+    <a:lvl3pPr marR="0" lvl="2" algn="l" rtl="0">
       <a:lnSpc>
         <a:spcPct val="100000"/>
       </a:lnSpc>
@@ -86,18 +87,18 @@
       <a:buClr>
         <a:srgbClr val="000000"/>
       </a:buClr>
-      <a:buFont typeface="Arial"/>
-      <a:defRPr b="0" i="0" sz="1400" u="none" cap="none" strike="noStrike">
+      <a:buFont typeface="Arial" panose="020B0604020202020204"/>
+      <a:defRPr sz="1400" b="0" i="0" u="none" strike="noStrike" cap="none">
         <a:solidFill>
           <a:srgbClr val="000000"/>
         </a:solidFill>
-        <a:latin typeface="Arial"/>
-        <a:ea typeface="Arial"/>
-        <a:cs typeface="Arial"/>
-        <a:sym typeface="Arial"/>
+        <a:latin typeface="Arial" panose="020B0604020202020204"/>
+        <a:ea typeface="Arial" panose="020B0604020202020204"/>
+        <a:cs typeface="Arial" panose="020B0604020202020204"/>
+        <a:sym typeface="Arial" panose="020B0604020202020204"/>
       </a:defRPr>
     </a:lvl3pPr>
-    <a:lvl4pPr lvl="3" marR="0" rtl="0" algn="l">
+    <a:lvl4pPr marR="0" lvl="3" algn="l" rtl="0">
       <a:lnSpc>
         <a:spcPct val="100000"/>
       </a:lnSpc>
@@ -110,18 +111,18 @@
       <a:buClr>
         <a:srgbClr val="000000"/>
       </a:buClr>
-      <a:buFont typeface="Arial"/>
-      <a:defRPr b="0" i="0" sz="1400" u="none" cap="none" strike="noStrike">
+      <a:buFont typeface="Arial" panose="020B0604020202020204"/>
+      <a:defRPr sz="1400" b="0" i="0" u="none" strike="noStrike" cap="none">
         <a:solidFill>
           <a:srgbClr val="000000"/>
         </a:solidFill>
-        <a:latin typeface="Arial"/>
-        <a:ea typeface="Arial"/>
-        <a:cs typeface="Arial"/>
-        <a:sym typeface="Arial"/>
+        <a:latin typeface="Arial" panose="020B0604020202020204"/>
+        <a:ea typeface="Arial" panose="020B0604020202020204"/>
+        <a:cs typeface="Arial" panose="020B0604020202020204"/>
+        <a:sym typeface="Arial" panose="020B0604020202020204"/>
       </a:defRPr>
     </a:lvl4pPr>
-    <a:lvl5pPr lvl="4" marR="0" rtl="0" algn="l">
+    <a:lvl5pPr marR="0" lvl="4" algn="l" rtl="0">
       <a:lnSpc>
         <a:spcPct val="100000"/>
       </a:lnSpc>
@@ -134,18 +135,18 @@
       <a:buClr>
         <a:srgbClr val="000000"/>
       </a:buClr>
-      <a:buFont typeface="Arial"/>
-      <a:defRPr b="0" i="0" sz="1400" u="none" cap="none" strike="noStrike">
+      <a:buFont typeface="Arial" panose="020B0604020202020204"/>
+      <a:defRPr sz="1400" b="0" i="0" u="none" strike="noStrike" cap="none">
         <a:solidFill>
           <a:srgbClr val="000000"/>
         </a:solidFill>
-        <a:latin typeface="Arial"/>
-        <a:ea typeface="Arial"/>
-        <a:cs typeface="Arial"/>
-        <a:sym typeface="Arial"/>
+        <a:latin typeface="Arial" panose="020B0604020202020204"/>
+        <a:ea typeface="Arial" panose="020B0604020202020204"/>
+        <a:cs typeface="Arial" panose="020B0604020202020204"/>
+        <a:sym typeface="Arial" panose="020B0604020202020204"/>
       </a:defRPr>
     </a:lvl5pPr>
-    <a:lvl6pPr lvl="5" marR="0" rtl="0" algn="l">
+    <a:lvl6pPr marR="0" lvl="5" algn="l" rtl="0">
       <a:lnSpc>
         <a:spcPct val="100000"/>
       </a:lnSpc>
@@ -158,18 +159,18 @@
       <a:buClr>
         <a:srgbClr val="000000"/>
       </a:buClr>
-      <a:buFont typeface="Arial"/>
-      <a:defRPr b="0" i="0" sz="1400" u="none" cap="none" strike="noStrike">
+      <a:buFont typeface="Arial" panose="020B0604020202020204"/>
+      <a:defRPr sz="1400" b="0" i="0" u="none" strike="noStrike" cap="none">
         <a:solidFill>
           <a:srgbClr val="000000"/>
         </a:solidFill>
-        <a:latin typeface="Arial"/>
-        <a:ea typeface="Arial"/>
-        <a:cs typeface="Arial"/>
-        <a:sym typeface="Arial"/>
+        <a:latin typeface="Arial" panose="020B0604020202020204"/>
+        <a:ea typeface="Arial" panose="020B0604020202020204"/>
+        <a:cs typeface="Arial" panose="020B0604020202020204"/>
+        <a:sym typeface="Arial" panose="020B0604020202020204"/>
       </a:defRPr>
     </a:lvl6pPr>
-    <a:lvl7pPr lvl="6" marR="0" rtl="0" algn="l">
+    <a:lvl7pPr marR="0" lvl="6" algn="l" rtl="0">
       <a:lnSpc>
         <a:spcPct val="100000"/>
       </a:lnSpc>
@@ -182,18 +183,18 @@
       <a:buClr>
         <a:srgbClr val="000000"/>
       </a:buClr>
-      <a:buFont typeface="Arial"/>
-      <a:defRPr b="0" i="0" sz="1400" u="none" cap="none" strike="noStrike">
+      <a:buFont typeface="Arial" panose="020B0604020202020204"/>
+      <a:defRPr sz="1400" b="0" i="0" u="none" strike="noStrike" cap="none">
         <a:solidFill>
           <a:srgbClr val="000000"/>
         </a:solidFill>
-        <a:latin typeface="Arial"/>
-        <a:ea typeface="Arial"/>
-        <a:cs typeface="Arial"/>
-        <a:sym typeface="Arial"/>
+        <a:latin typeface="Arial" panose="020B0604020202020204"/>
+        <a:ea typeface="Arial" panose="020B0604020202020204"/>
+        <a:cs typeface="Arial" panose="020B0604020202020204"/>
+        <a:sym typeface="Arial" panose="020B0604020202020204"/>
       </a:defRPr>
     </a:lvl7pPr>
-    <a:lvl8pPr lvl="7" marR="0" rtl="0" algn="l">
+    <a:lvl8pPr marR="0" lvl="7" algn="l" rtl="0">
       <a:lnSpc>
         <a:spcPct val="100000"/>
       </a:lnSpc>
@@ -206,18 +207,18 @@
       <a:buClr>
         <a:srgbClr val="000000"/>
       </a:buClr>
-      <a:buFont typeface="Arial"/>
-      <a:defRPr b="0" i="0" sz="1400" u="none" cap="none" strike="noStrike">
+      <a:buFont typeface="Arial" panose="020B0604020202020204"/>
+      <a:defRPr sz="1400" b="0" i="0" u="none" strike="noStrike" cap="none">
         <a:solidFill>
           <a:srgbClr val="000000"/>
         </a:solidFill>
-        <a:latin typeface="Arial"/>
-        <a:ea typeface="Arial"/>
-        <a:cs typeface="Arial"/>
-        <a:sym typeface="Arial"/>
+        <a:latin typeface="Arial" panose="020B0604020202020204"/>
+        <a:ea typeface="Arial" panose="020B0604020202020204"/>
+        <a:cs typeface="Arial" panose="020B0604020202020204"/>
+        <a:sym typeface="Arial" panose="020B0604020202020204"/>
       </a:defRPr>
     </a:lvl8pPr>
-    <a:lvl9pPr lvl="8" marR="0" rtl="0" algn="l">
+    <a:lvl9pPr marR="0" lvl="8" algn="l" rtl="0">
       <a:lnSpc>
         <a:spcPct val="100000"/>
       </a:lnSpc>
@@ -230,27 +231,27 @@
       <a:buClr>
         <a:srgbClr val="000000"/>
       </a:buClr>
-      <a:buFont typeface="Arial"/>
-      <a:defRPr b="0" i="0" sz="1400" u="none" cap="none" strike="noStrike">
+      <a:buFont typeface="Arial" panose="020B0604020202020204"/>
+      <a:defRPr sz="1400" b="0" i="0" u="none" strike="noStrike" cap="none">
         <a:solidFill>
           <a:srgbClr val="000000"/>
         </a:solidFill>
-        <a:latin typeface="Arial"/>
-        <a:ea typeface="Arial"/>
-        <a:cs typeface="Arial"/>
-        <a:sym typeface="Arial"/>
+        <a:latin typeface="Arial" panose="020B0604020202020204"/>
+        <a:ea typeface="Arial" panose="020B0604020202020204"/>
+        <a:cs typeface="Arial" panose="020B0604020202020204"/>
+        <a:sym typeface="Arial" panose="020B0604020202020204"/>
       </a:defRPr>
     </a:lvl9pPr>
   </p:defaultTextStyle>
   <p:extLst>
     <p:ext uri="{EFAFB233-063F-42B5-8137-9DF3F51BA10A}">
-      <p15:sldGuideLst>
-        <p15:guide id="1" orient="horz" pos="1620">
+      <p15:sldGuideLst xmlns:p15="http://schemas.microsoft.com/office/powerpoint/2012/main">
+        <p15:guide id="1" orient="horz" pos="1620" userDrawn="1">
           <p15:clr>
             <a:srgbClr val="747775"/>
           </p15:clr>
         </p15:guide>
-        <p15:guide id="2" pos="2880">
+        <p15:guide id="2" pos="2880" userDrawn="1">
           <p15:clr>
             <a:srgbClr val="747775"/>
           </p15:clr>
@@ -343,7 +344,6 @@
           <a:p>
             <a:fld id="{B7268E1E-0E44-426D-905E-8AD9B19D2182}" type="datetimeFigureOut">
               <a:rPr lang="cs-CZ" smtClean="0"/>
-              <a:t>1.7.2013</a:t>
             </a:fld>
             <a:endParaRPr lang="cs-CZ"/>
           </a:p>
@@ -410,6 +410,7 @@
               <a:rPr lang="en-US" smtClean="0"/>
               <a:t>Click to edit Master text styles</a:t>
             </a:r>
+            <a:endParaRPr lang="en-US" smtClean="0"/>
           </a:p>
           <a:p>
             <a:pPr lvl="1"/>
@@ -417,6 +418,7 @@
               <a:rPr lang="en-US" smtClean="0"/>
               <a:t>Second level</a:t>
             </a:r>
+            <a:endParaRPr lang="en-US" smtClean="0"/>
           </a:p>
           <a:p>
             <a:pPr lvl="2"/>
@@ -424,6 +426,7 @@
               <a:rPr lang="en-US" smtClean="0"/>
               <a:t>Third level</a:t>
             </a:r>
+            <a:endParaRPr lang="en-US" smtClean="0"/>
           </a:p>
           <a:p>
             <a:pPr lvl="3"/>
@@ -431,6 +434,7 @@
               <a:rPr lang="en-US" smtClean="0"/>
               <a:t>Fourth level</a:t>
             </a:r>
+            <a:endParaRPr lang="en-US" smtClean="0"/>
           </a:p>
           <a:p>
             <a:pPr lvl="4"/>
@@ -502,18 +506,12 @@
           <a:p>
             <a:fld id="{871B2431-D351-4C6E-A3CF-9DFAC0E3E050}" type="slidenum">
               <a:rPr lang="cs-CZ" smtClean="0"/>
-              <a:t>‹#›</a:t>
             </a:fld>
             <a:endParaRPr lang="cs-CZ"/>
           </a:p>
         </p:txBody>
       </p:sp>
     </p:spTree>
-    <p:extLst>
-      <p:ext uri="{BB962C8B-B14F-4D97-AF65-F5344CB8AC3E}">
-        <p14:creationId xmlns:p14="http://schemas.microsoft.com/office/powerpoint/2010/main" val="1798889115"/>
-      </p:ext>
-    </p:extLst>
   </p:cSld>
   <p:clrMap bg1="lt1" tx1="dk1" bg2="lt2" tx2="dk2" accent1="accent1" accent2="accent2" accent3="accent3" accent4="accent4" accent5="accent5" accent6="accent6" hlink="hlink" folHlink="folHlink"/>
   <p:notesStyle>
@@ -612,9 +610,9 @@
 </file>
 
 <file path=ppt/notesSlides/notesSlide1.xml><?xml version="1.0" encoding="utf-8"?>
-<p:notes xmlns:p="http://schemas.openxmlformats.org/presentationml/2006/main" xmlns:a="http://schemas.openxmlformats.org/drawingml/2006/main">
+<p:notes xmlns:a="http://schemas.openxmlformats.org/drawingml/2006/main" xmlns:r="http://schemas.openxmlformats.org/officeDocument/2006/relationships" xmlns:p="http://schemas.openxmlformats.org/presentationml/2006/main">
   <p:cSld>
-    <p:spTree xmlns:r="http://schemas.openxmlformats.org/officeDocument/2006/relationships">
+    <p:spTree>
       <p:nvGrpSpPr>
         <p:cNvPr id="1" name=""/>
         <p:cNvGrpSpPr/>
@@ -684,10 +682,11 @@
             </a:lvl1pPr>
           </a:lstStyle>
           <a:p>
-            <a:r id="{B7268E1E-0E44-426D-905E-8AD9B19D2182}" type="datetimeFigureOut">
+            <a:r>
               <a:rPr lang="cs-CZ" smtClean="0"/>
               <a:t>1.7.2013</a:t>
             </a:r>
+            <a:endParaRPr lang="cs-CZ" smtClean="0"/>
           </a:p>
         </p:txBody>
       </p:sp>
@@ -745,83 +744,108 @@
           <a:bodyPr vert="horz" lIns="91440" tIns="45720" rIns="91440" bIns="45720" rtlCol="0" anchor="ctr"/>
           <a:lstStyle>
             <a:lvl1pPr algn="l">
-              <a:defRPr sz="1400" b="false" i="false" u="none" strike="noStrike"/>
+              <a:defRPr sz="1400" b="0" i="0" u="none" strike="noStrike"/>
             </a:lvl1pPr>
           </a:lstStyle>
           <a:p>
-            <a:pPr algn="l" indent="0">
+            <a:pPr indent="0" algn="l">
               <a:lnSpc>
                 <a:spcPct val="100000"/>
               </a:lnSpc>
             </a:pPr>
             <a:r>
-              <a:rPr lang="en-US" b="false" i="false" strike="noStrike" u="none" sz="1400">
+              <a:rPr lang="en-US" sz="1400" b="0" i="0" u="none" strike="noStrike">
                 <a:solidFill>
                   <a:srgbClr val="000000"/>
                 </a:solidFill>
               </a:rPr>
               <a:t>各位好，这一页我们来详细介绍我们系统的核心技术方案，它主要由三个关键环节构成：融合相似度检索、语义聚类和VLM精调。</a:t>
             </a:r>
+            <a:endParaRPr lang="en-US" sz="1400" b="0" i="0" u="none" strike="noStrike">
+              <a:solidFill>
+                <a:srgbClr val="000000"/>
+              </a:solidFill>
+            </a:endParaRPr>
           </a:p>
           <a:p>
-            <a:pPr algn="l" indent="0">
+            <a:pPr indent="0" algn="l">
               <a:lnSpc>
                 <a:spcPct val="100000"/>
               </a:lnSpc>
             </a:pPr>
             <a:r>
-              <a:rPr lang="en-US" b="false" i="false" strike="noStrike" u="none" sz="1400">
+              <a:rPr lang="en-US" sz="1400" b="0" i="0" u="none" strike="noStrike">
                 <a:solidFill>
                   <a:srgbClr val="000000"/>
                 </a:solidFill>
               </a:rPr>
               <a:t>首先是“融合相似度检索”，也就是我们的轻量粗召回环节。我们发现传统的关键词检索在语义理解上存在短板，而且效率不高。因此，我们的目标是利用轻量级的双塔模型，将文本和图像转化为语义向量，通过快速的向量相似度计算，在保证速度的同时，显著提升召回结果的相关性，为后续处理提供一个高质量的候选池。</a:t>
             </a:r>
+            <a:endParaRPr lang="en-US" sz="1400" b="0" i="0" u="none" strike="noStrike">
+              <a:solidFill>
+                <a:srgbClr val="000000"/>
+              </a:solidFill>
+            </a:endParaRPr>
           </a:p>
           <a:p>
-            <a:pPr algn="l" indent="0">
+            <a:pPr indent="0" algn="l">
               <a:lnSpc>
                 <a:spcPct val="100000"/>
               </a:lnSpc>
             </a:pPr>
             <a:r>
-              <a:rPr lang="en-US" b="false" i="false" strike="noStrike" u="none" sz="1400">
+              <a:rPr lang="en-US" sz="1400" b="0" i="0" u="none" strike="noStrike">
                 <a:solidFill>
                   <a:srgbClr val="000000"/>
                 </a:solidFill>
               </a:rPr>
               <a:t>接下来是“语义聚类”，作为轻量精召回步骤。粗召回的结果可能存在冗余，直接进入精排会浪费计算资源。我们的目标是通过语义聚类，去除冗余信息，筛选出最具代表性的样本。具体来说，我们会使用优化的聚类算法对召回结果进行分组，只选取每个组的核心样本进入下一步，从而有效提升精排的效率。</a:t>
             </a:r>
+            <a:endParaRPr lang="en-US" sz="1400" b="0" i="0" u="none" strike="noStrike">
+              <a:solidFill>
+                <a:srgbClr val="000000"/>
+              </a:solidFill>
+            </a:endParaRPr>
           </a:p>
           <a:p>
-            <a:pPr algn="l" indent="0">
+            <a:pPr indent="0" algn="l">
               <a:lnSpc>
                 <a:spcPct val="100000"/>
               </a:lnSpc>
             </a:pPr>
             <a:r>
-              <a:rPr lang="en-US" b="false" i="false" strike="noStrike" u="none" sz="1400">
+              <a:rPr lang="en-US" sz="1400" b="0" i="0" u="none" strike="noStrike">
                 <a:solidFill>
                   <a:srgbClr val="000000"/>
                 </a:solidFill>
               </a:rPr>
               <a:t>最后是“VLM精调”，也就是精排环节。通用的VLM模型在我们的特定任务上表现不够理想，而且模型太大，推理速度慢。我们的目标是通过模型蒸馏和任务特定的精调，让模型在保持高精度的同时，变得更加轻量和快速。这样，我们就能在保证排序效果的前提下，满足实时应用的性能要求。</a:t>
             </a:r>
+            <a:endParaRPr lang="en-US" sz="1400" b="0" i="0" u="none" strike="noStrike">
+              <a:solidFill>
+                <a:srgbClr val="000000"/>
+              </a:solidFill>
+            </a:endParaRPr>
           </a:p>
           <a:p>
-            <a:pPr algn="l" indent="0">
+            <a:pPr indent="0" algn="l">
               <a:lnSpc>
                 <a:spcPct val="100000"/>
               </a:lnSpc>
             </a:pPr>
             <a:r>
-              <a:rPr lang="en-US" b="false" i="false" strike="noStrike" u="none" sz="1400">
+              <a:rPr lang="en-US" sz="1400" b="0" i="0" u="none" strike="noStrike">
                 <a:solidFill>
                   <a:srgbClr val="000000"/>
                 </a:solidFill>
               </a:rPr>
               <a:t>通过这三个环节的有机结合，我们构建了一个高效、准确的检索和排序系统，能够为用户提供更精准、更快速的服务。</a:t>
             </a:r>
+            <a:endParaRPr lang="en-US" sz="1400" b="0" i="0" u="none" strike="noStrike">
+              <a:solidFill>
+                <a:srgbClr val="000000"/>
+              </a:solidFill>
+            </a:endParaRPr>
           </a:p>
         </p:txBody>
       </p:sp>
@@ -881,10 +905,11 @@
             </a:lvl1pPr>
           </a:lstStyle>
           <a:p>
-            <a:r id="{871B2431-D351-4C6E-A3CF-9DFAC0E3E050}" type="slidenum">
+            <a:r>
               <a:rPr lang="cs-CZ" smtClean="0"/>
               <a:t>‹#›</a:t>
             </a:r>
+            <a:endParaRPr lang="cs-CZ" smtClean="0"/>
           </a:p>
         </p:txBody>
       </p:sp>
@@ -897,7 +922,7 @@
 </file>
 
 <file path=ppt/slideLayouts/slideLayout1.xml><?xml version="1.0" encoding="utf-8"?>
-<p:sldLayout xmlns:a="http://schemas.openxmlformats.org/drawingml/2006/main" xmlns:r="http://schemas.openxmlformats.org/officeDocument/2006/relationships" xmlns:mc="http://schemas.openxmlformats.org/markup-compatibility/2006" xmlns:mv="urn:schemas-microsoft-com:mac:vml" xmlns:p="http://schemas.openxmlformats.org/presentationml/2006/main" xmlns:c="http://schemas.openxmlformats.org/drawingml/2006/chart" xmlns:dgm="http://schemas.openxmlformats.org/drawingml/2006/diagram" xmlns:o="urn:schemas-microsoft-com:office:office" xmlns:v="urn:schemas-microsoft-com:vml" xmlns:pvml="urn:schemas-microsoft-com:office:powerpoint" xmlns:com="http://schemas.openxmlformats.org/drawingml/2006/compatibility" xmlns:p14="http://schemas.microsoft.com/office/powerpoint/2010/main" xmlns:p15="http://schemas.microsoft.com/office/powerpoint/2012/main" xmlns:ahyp="http://schemas.microsoft.com/office/drawing/2018/hyperlinkcolor" matchingName="标题幻灯片" type="title">
+<p:sldLayout xmlns:a="http://schemas.openxmlformats.org/drawingml/2006/main" xmlns:r="http://schemas.openxmlformats.org/officeDocument/2006/relationships" xmlns:p="http://schemas.openxmlformats.org/presentationml/2006/main" type="title" matchingName="标题幻灯片">
   <p:cSld name="TITLE">
     <p:spTree>
       <p:nvGrpSpPr>
@@ -935,7 +960,7 @@
           </a:ln>
         </p:spPr>
         <p:txBody>
-          <a:bodyPr anchorCtr="0" anchor="b" bIns="34275" lIns="68575" spcFirstLastPara="1" rIns="68575" wrap="square" tIns="34275">
+          <a:bodyPr spcFirstLastPara="1" wrap="square" lIns="68575" tIns="34275" rIns="68575" bIns="34275" anchor="b" anchorCtr="0">
             <a:normAutofit/>
           </a:bodyPr>
           <a:lstStyle>
@@ -953,7 +978,7 @@
                 <a:schemeClr val="dk1"/>
               </a:buClr>
               <a:buSzPts val="4500"/>
-              <a:buFont typeface="Arial"/>
+              <a:buFont typeface="Arial" panose="020B0604020202020204"/>
               <a:buNone/>
               <a:defRPr sz="4500"/>
             </a:lvl1pPr>
@@ -1054,7 +1079,7 @@
           <p:cNvPr id="13" name="Shape 31"/>
           <p:cNvSpPr txBox="1"/>
           <p:nvPr>
-            <p:ph idx="1" type="subTitle"/>
+            <p:ph type="subTitle" idx="1"/>
           </p:nvPr>
         </p:nvSpPr>
         <p:spPr>
@@ -1071,7 +1096,7 @@
           </a:ln>
         </p:spPr>
         <p:txBody>
-          <a:bodyPr anchorCtr="0" anchor="t" bIns="34275" lIns="68575" spcFirstLastPara="1" rIns="68575" wrap="square" tIns="34275">
+          <a:bodyPr spcFirstLastPara="1" wrap="square" lIns="68575" tIns="34275" rIns="68575" bIns="34275" anchor="t" anchorCtr="0">
             <a:normAutofit/>
           </a:bodyPr>
           <a:lstStyle>
@@ -1237,7 +1262,7 @@
           <p:cNvPr id="14" name="Shape 32"/>
           <p:cNvSpPr txBox="1"/>
           <p:nvPr>
-            <p:ph idx="10" type="dt"/>
+            <p:ph type="dt" idx="10"/>
           </p:nvPr>
         </p:nvSpPr>
         <p:spPr>
@@ -1254,7 +1279,7 @@
           </a:ln>
         </p:spPr>
         <p:txBody>
-          <a:bodyPr anchorCtr="0" anchor="ctr" bIns="34275" lIns="68575" spcFirstLastPara="1" rIns="68575" wrap="square" tIns="34275">
+          <a:bodyPr spcFirstLastPara="1" wrap="square" lIns="68575" tIns="34275" rIns="68575" bIns="34275" anchor="ctr" anchorCtr="0">
             <a:noAutofit/>
           </a:bodyPr>
           <a:lstStyle>
@@ -1366,7 +1391,7 @@
           <p:cNvPr id="15" name="Shape 33"/>
           <p:cNvSpPr txBox="1"/>
           <p:nvPr>
-            <p:ph idx="11" type="ftr"/>
+            <p:ph type="ftr" idx="11"/>
           </p:nvPr>
         </p:nvSpPr>
         <p:spPr>
@@ -1383,7 +1408,7 @@
           </a:ln>
         </p:spPr>
         <p:txBody>
-          <a:bodyPr anchorCtr="0" anchor="ctr" bIns="34275" lIns="68575" spcFirstLastPara="1" rIns="68575" wrap="square" tIns="34275">
+          <a:bodyPr spcFirstLastPara="1" wrap="square" lIns="68575" tIns="34275" rIns="68575" bIns="34275" anchor="ctr" anchorCtr="0">
             <a:noAutofit/>
           </a:bodyPr>
           <a:lstStyle>
@@ -1495,7 +1520,7 @@
           <p:cNvPr id="16" name="Shape 34"/>
           <p:cNvSpPr txBox="1"/>
           <p:nvPr>
-            <p:ph idx="12" type="sldNum"/>
+            <p:ph type="sldNum" idx="12"/>
           </p:nvPr>
         </p:nvSpPr>
         <p:spPr>
@@ -1512,67 +1537,67 @@
           </a:ln>
         </p:spPr>
         <p:txBody>
-          <a:bodyPr anchorCtr="0" anchor="ctr" bIns="34275" lIns="68575" spcFirstLastPara="1" rIns="68575" wrap="square" tIns="34275">
+          <a:bodyPr spcFirstLastPara="1" wrap="square" lIns="68575" tIns="34275" rIns="68575" bIns="34275" anchor="ctr" anchorCtr="0">
             <a:noAutofit/>
           </a:bodyPr>
           <a:lstStyle>
-            <a:lvl1pPr indent="0" lvl="0" marL="0" algn="r">
+            <a:lvl1pPr marL="0" lvl="0" indent="0" algn="r">
               <a:spcBef>
                 <a:spcPts val="0"/>
               </a:spcBef>
               <a:buNone/>
               <a:defRPr/>
             </a:lvl1pPr>
-            <a:lvl2pPr indent="0" lvl="1" marL="0" algn="r">
+            <a:lvl2pPr marL="0" lvl="1" indent="0" algn="r">
               <a:spcBef>
                 <a:spcPts val="0"/>
               </a:spcBef>
               <a:buNone/>
               <a:defRPr/>
             </a:lvl2pPr>
-            <a:lvl3pPr indent="0" lvl="2" marL="0" algn="r">
+            <a:lvl3pPr marL="0" lvl="2" indent="0" algn="r">
               <a:spcBef>
                 <a:spcPts val="0"/>
               </a:spcBef>
               <a:buNone/>
               <a:defRPr/>
             </a:lvl3pPr>
-            <a:lvl4pPr indent="0" lvl="3" marL="0" algn="r">
+            <a:lvl4pPr marL="0" lvl="3" indent="0" algn="r">
               <a:spcBef>
                 <a:spcPts val="0"/>
               </a:spcBef>
               <a:buNone/>
               <a:defRPr/>
             </a:lvl4pPr>
-            <a:lvl5pPr indent="0" lvl="4" marL="0" algn="r">
+            <a:lvl5pPr marL="0" lvl="4" indent="0" algn="r">
               <a:spcBef>
                 <a:spcPts val="0"/>
               </a:spcBef>
               <a:buNone/>
               <a:defRPr/>
             </a:lvl5pPr>
-            <a:lvl6pPr indent="0" lvl="5" marL="0" algn="r">
+            <a:lvl6pPr marL="0" lvl="5" indent="0" algn="r">
               <a:spcBef>
                 <a:spcPts val="0"/>
               </a:spcBef>
               <a:buNone/>
               <a:defRPr/>
             </a:lvl6pPr>
-            <a:lvl7pPr indent="0" lvl="6" marL="0" algn="r">
+            <a:lvl7pPr marL="0" lvl="6" indent="0" algn="r">
               <a:spcBef>
                 <a:spcPts val="0"/>
               </a:spcBef>
               <a:buNone/>
               <a:defRPr/>
             </a:lvl7pPr>
-            <a:lvl8pPr indent="0" lvl="7" marL="0" algn="r">
+            <a:lvl8pPr marL="0" lvl="7" indent="0" algn="r">
               <a:spcBef>
                 <a:spcPts val="0"/>
               </a:spcBef>
               <a:buNone/>
               <a:defRPr/>
             </a:lvl8pPr>
-            <a:lvl9pPr indent="0" lvl="8" marL="0" algn="r">
+            <a:lvl9pPr marL="0" lvl="8" indent="0" algn="r">
               <a:spcBef>
                 <a:spcPts val="0"/>
               </a:spcBef>
@@ -1581,7 +1606,7 @@
             </a:lvl9pPr>
           </a:lstStyle>
           <a:p>
-            <a:pPr indent="0" lvl="0" marL="0" rtl="0" algn="r">
+            <a:pPr marL="0" lvl="0" indent="0" algn="r" rtl="0">
               <a:spcBef>
                 <a:spcPts val="0"/>
               </a:spcBef>
@@ -1592,9 +1617,8 @@
             </a:pPr>
             <a:fld id="{00000000-1234-1234-1234-123412341234}" type="slidenum">
               <a:rPr lang="zh-CN"/>
-              <a:t>‹#›</a:t>
             </a:fld>
-            <a:endParaRPr/>
+            <a:endParaRPr lang="zh-CN"/>
           </a:p>
         </p:txBody>
       </p:sp>
@@ -1607,7 +1631,7 @@
 </file>
 
 <file path=ppt/slideLayouts/slideLayout10.xml><?xml version="1.0" encoding="utf-8"?>
-<p:sldLayout xmlns:a="http://schemas.openxmlformats.org/drawingml/2006/main" xmlns:r="http://schemas.openxmlformats.org/officeDocument/2006/relationships" xmlns:mc="http://schemas.openxmlformats.org/markup-compatibility/2006" xmlns:mv="urn:schemas-microsoft-com:mac:vml" xmlns:p="http://schemas.openxmlformats.org/presentationml/2006/main" xmlns:c="http://schemas.openxmlformats.org/drawingml/2006/chart" xmlns:dgm="http://schemas.openxmlformats.org/drawingml/2006/diagram" xmlns:o="urn:schemas-microsoft-com:office:office" xmlns:v="urn:schemas-microsoft-com:vml" xmlns:pvml="urn:schemas-microsoft-com:office:powerpoint" xmlns:com="http://schemas.openxmlformats.org/drawingml/2006/compatibility" xmlns:p14="http://schemas.microsoft.com/office/powerpoint/2010/main" xmlns:p15="http://schemas.microsoft.com/office/powerpoint/2012/main" xmlns:ahyp="http://schemas.microsoft.com/office/drawing/2018/hyperlinkcolor" matchingName="标题和竖排文字" type="vertTx">
+<p:sldLayout xmlns:a="http://schemas.openxmlformats.org/drawingml/2006/main" xmlns:r="http://schemas.openxmlformats.org/officeDocument/2006/relationships" xmlns:p="http://schemas.openxmlformats.org/presentationml/2006/main" type="vertTx" matchingName="标题和竖排文字">
   <p:cSld name="VERTICAL_TEXT">
     <p:spTree>
       <p:nvGrpSpPr>
@@ -1645,7 +1669,7 @@
           </a:ln>
         </p:spPr>
         <p:txBody>
-          <a:bodyPr anchorCtr="0" anchor="ctr" bIns="34275" lIns="68575" spcFirstLastPara="1" rIns="68575" wrap="square" tIns="34275">
+          <a:bodyPr spcFirstLastPara="1" wrap="square" lIns="68575" tIns="34275" rIns="68575" bIns="34275" anchor="ctr" anchorCtr="0">
             <a:normAutofit/>
           </a:bodyPr>
           <a:lstStyle>
@@ -1763,7 +1787,7 @@
           <p:cNvPr id="70" name="Shape 50"/>
           <p:cNvSpPr txBox="1"/>
           <p:nvPr>
-            <p:ph idx="1" type="body"/>
+            <p:ph type="body" idx="1"/>
           </p:nvPr>
         </p:nvSpPr>
         <p:spPr>
@@ -1780,11 +1804,11 @@
           </a:ln>
         </p:spPr>
         <p:txBody>
-          <a:bodyPr anchorCtr="0" anchor="t" bIns="34275" lIns="68575" spcFirstLastPara="1" rIns="68575" wrap="square" tIns="34275">
+          <a:bodyPr spcFirstLastPara="1" wrap="square" lIns="68575" tIns="34275" rIns="68575" bIns="34275" anchor="t" anchorCtr="0">
             <a:normAutofit/>
           </a:bodyPr>
           <a:lstStyle>
-            <a:lvl1pPr indent="-317500" lvl="0" marL="457200" algn="l">
+            <a:lvl1pPr marL="457200" lvl="0" indent="-317500" algn="l">
               <a:lnSpc>
                 <a:spcPct val="90000"/>
               </a:lnSpc>
@@ -1801,7 +1825,7 @@
               <a:buChar char="•"/>
               <a:defRPr/>
             </a:lvl1pPr>
-            <a:lvl2pPr indent="-317500" lvl="1" marL="914400" algn="l">
+            <a:lvl2pPr marL="914400" lvl="1" indent="-317500" algn="l">
               <a:lnSpc>
                 <a:spcPct val="90000"/>
               </a:lnSpc>
@@ -1818,7 +1842,7 @@
               <a:buChar char="•"/>
               <a:defRPr/>
             </a:lvl2pPr>
-            <a:lvl3pPr indent="-317500" lvl="2" marL="1371600" algn="l">
+            <a:lvl3pPr marL="1371600" lvl="2" indent="-317500" algn="l">
               <a:lnSpc>
                 <a:spcPct val="90000"/>
               </a:lnSpc>
@@ -1835,7 +1859,7 @@
               <a:buChar char="•"/>
               <a:defRPr/>
             </a:lvl3pPr>
-            <a:lvl4pPr indent="-317500" lvl="3" marL="1828800" algn="l">
+            <a:lvl4pPr marL="1828800" lvl="3" indent="-317500" algn="l">
               <a:lnSpc>
                 <a:spcPct val="90000"/>
               </a:lnSpc>
@@ -1852,7 +1876,7 @@
               <a:buChar char="•"/>
               <a:defRPr/>
             </a:lvl4pPr>
-            <a:lvl5pPr indent="-317500" lvl="4" marL="2286000" algn="l">
+            <a:lvl5pPr marL="2286000" lvl="4" indent="-317500" algn="l">
               <a:lnSpc>
                 <a:spcPct val="90000"/>
               </a:lnSpc>
@@ -1869,7 +1893,7 @@
               <a:buChar char="•"/>
               <a:defRPr/>
             </a:lvl5pPr>
-            <a:lvl6pPr indent="-317500" lvl="5" marL="2743200" algn="l">
+            <a:lvl6pPr marL="2743200" lvl="5" indent="-317500" algn="l">
               <a:lnSpc>
                 <a:spcPct val="90000"/>
               </a:lnSpc>
@@ -1886,7 +1910,7 @@
               <a:buChar char="•"/>
               <a:defRPr/>
             </a:lvl6pPr>
-            <a:lvl7pPr indent="-317500" lvl="6" marL="3200400" algn="l">
+            <a:lvl7pPr marL="3200400" lvl="6" indent="-317500" algn="l">
               <a:lnSpc>
                 <a:spcPct val="90000"/>
               </a:lnSpc>
@@ -1903,7 +1927,7 @@
               <a:buChar char="•"/>
               <a:defRPr/>
             </a:lvl7pPr>
-            <a:lvl8pPr indent="-317500" lvl="7" marL="3657600" algn="l">
+            <a:lvl8pPr marL="3657600" lvl="7" indent="-317500" algn="l">
               <a:lnSpc>
                 <a:spcPct val="90000"/>
               </a:lnSpc>
@@ -1920,7 +1944,7 @@
               <a:buChar char="•"/>
               <a:defRPr/>
             </a:lvl8pPr>
-            <a:lvl9pPr indent="-317500" lvl="8" marL="4114800" algn="l">
+            <a:lvl9pPr marL="4114800" lvl="8" indent="-317500" algn="l">
               <a:lnSpc>
                 <a:spcPct val="90000"/>
               </a:lnSpc>
@@ -1946,7 +1970,7 @@
           <p:cNvPr id="71" name="Shape 51"/>
           <p:cNvSpPr txBox="1"/>
           <p:nvPr>
-            <p:ph idx="10" type="dt"/>
+            <p:ph type="dt" idx="10"/>
           </p:nvPr>
         </p:nvSpPr>
         <p:spPr>
@@ -1963,7 +1987,7 @@
           </a:ln>
         </p:spPr>
         <p:txBody>
-          <a:bodyPr anchorCtr="0" anchor="ctr" bIns="34275" lIns="68575" spcFirstLastPara="1" rIns="68575" wrap="square" tIns="34275">
+          <a:bodyPr spcFirstLastPara="1" wrap="square" lIns="68575" tIns="34275" rIns="68575" bIns="34275" anchor="ctr" anchorCtr="0">
             <a:noAutofit/>
           </a:bodyPr>
           <a:lstStyle>
@@ -2075,7 +2099,7 @@
           <p:cNvPr id="72" name="Shape 52"/>
           <p:cNvSpPr txBox="1"/>
           <p:nvPr>
-            <p:ph idx="11" type="ftr"/>
+            <p:ph type="ftr" idx="11"/>
           </p:nvPr>
         </p:nvSpPr>
         <p:spPr>
@@ -2092,7 +2116,7 @@
           </a:ln>
         </p:spPr>
         <p:txBody>
-          <a:bodyPr anchorCtr="0" anchor="ctr" bIns="34275" lIns="68575" spcFirstLastPara="1" rIns="68575" wrap="square" tIns="34275">
+          <a:bodyPr spcFirstLastPara="1" wrap="square" lIns="68575" tIns="34275" rIns="68575" bIns="34275" anchor="ctr" anchorCtr="0">
             <a:noAutofit/>
           </a:bodyPr>
           <a:lstStyle>
@@ -2204,7 +2228,7 @@
           <p:cNvPr id="73" name="Shape 53"/>
           <p:cNvSpPr txBox="1"/>
           <p:nvPr>
-            <p:ph idx="12" type="sldNum"/>
+            <p:ph type="sldNum" idx="12"/>
           </p:nvPr>
         </p:nvSpPr>
         <p:spPr>
@@ -2221,67 +2245,67 @@
           </a:ln>
         </p:spPr>
         <p:txBody>
-          <a:bodyPr anchorCtr="0" anchor="ctr" bIns="34275" lIns="68575" spcFirstLastPara="1" rIns="68575" wrap="square" tIns="34275">
+          <a:bodyPr spcFirstLastPara="1" wrap="square" lIns="68575" tIns="34275" rIns="68575" bIns="34275" anchor="ctr" anchorCtr="0">
             <a:noAutofit/>
           </a:bodyPr>
           <a:lstStyle>
-            <a:lvl1pPr indent="0" lvl="0" marL="0" algn="r">
+            <a:lvl1pPr marL="0" lvl="0" indent="0" algn="r">
               <a:spcBef>
                 <a:spcPts val="0"/>
               </a:spcBef>
               <a:buNone/>
               <a:defRPr/>
             </a:lvl1pPr>
-            <a:lvl2pPr indent="0" lvl="1" marL="0" algn="r">
+            <a:lvl2pPr marL="0" lvl="1" indent="0" algn="r">
               <a:spcBef>
                 <a:spcPts val="0"/>
               </a:spcBef>
               <a:buNone/>
               <a:defRPr/>
             </a:lvl2pPr>
-            <a:lvl3pPr indent="0" lvl="2" marL="0" algn="r">
+            <a:lvl3pPr marL="0" lvl="2" indent="0" algn="r">
               <a:spcBef>
                 <a:spcPts val="0"/>
               </a:spcBef>
               <a:buNone/>
               <a:defRPr/>
             </a:lvl3pPr>
-            <a:lvl4pPr indent="0" lvl="3" marL="0" algn="r">
+            <a:lvl4pPr marL="0" lvl="3" indent="0" algn="r">
               <a:spcBef>
                 <a:spcPts val="0"/>
               </a:spcBef>
               <a:buNone/>
               <a:defRPr/>
             </a:lvl4pPr>
-            <a:lvl5pPr indent="0" lvl="4" marL="0" algn="r">
+            <a:lvl5pPr marL="0" lvl="4" indent="0" algn="r">
               <a:spcBef>
                 <a:spcPts val="0"/>
               </a:spcBef>
               <a:buNone/>
               <a:defRPr/>
             </a:lvl5pPr>
-            <a:lvl6pPr indent="0" lvl="5" marL="0" algn="r">
+            <a:lvl6pPr marL="0" lvl="5" indent="0" algn="r">
               <a:spcBef>
                 <a:spcPts val="0"/>
               </a:spcBef>
               <a:buNone/>
               <a:defRPr/>
             </a:lvl6pPr>
-            <a:lvl7pPr indent="0" lvl="6" marL="0" algn="r">
+            <a:lvl7pPr marL="0" lvl="6" indent="0" algn="r">
               <a:spcBef>
                 <a:spcPts val="0"/>
               </a:spcBef>
               <a:buNone/>
               <a:defRPr/>
             </a:lvl7pPr>
-            <a:lvl8pPr indent="0" lvl="7" marL="0" algn="r">
+            <a:lvl8pPr marL="0" lvl="7" indent="0" algn="r">
               <a:spcBef>
                 <a:spcPts val="0"/>
               </a:spcBef>
               <a:buNone/>
               <a:defRPr/>
             </a:lvl8pPr>
-            <a:lvl9pPr indent="0" lvl="8" marL="0" algn="r">
+            <a:lvl9pPr marL="0" lvl="8" indent="0" algn="r">
               <a:spcBef>
                 <a:spcPts val="0"/>
               </a:spcBef>
@@ -2290,7 +2314,7 @@
             </a:lvl9pPr>
           </a:lstStyle>
           <a:p>
-            <a:pPr indent="0" lvl="0" marL="0" rtl="0" algn="r">
+            <a:pPr marL="0" lvl="0" indent="0" algn="r" rtl="0">
               <a:spcBef>
                 <a:spcPts val="0"/>
               </a:spcBef>
@@ -2301,9 +2325,8 @@
             </a:pPr>
             <a:fld id="{00000000-1234-1234-1234-123412341234}" type="slidenum">
               <a:rPr lang="zh-CN"/>
-              <a:t>‹#›</a:t>
             </a:fld>
-            <a:endParaRPr/>
+            <a:endParaRPr lang="zh-CN"/>
           </a:p>
         </p:txBody>
       </p:sp>
@@ -2316,7 +2339,7 @@
 </file>
 
 <file path=ppt/slideLayouts/slideLayout11.xml><?xml version="1.0" encoding="utf-8"?>
-<p:sldLayout xmlns:a="http://schemas.openxmlformats.org/drawingml/2006/main" xmlns:r="http://schemas.openxmlformats.org/officeDocument/2006/relationships" xmlns:mc="http://schemas.openxmlformats.org/markup-compatibility/2006" xmlns:mv="urn:schemas-microsoft-com:mac:vml" xmlns:p="http://schemas.openxmlformats.org/presentationml/2006/main" xmlns:c="http://schemas.openxmlformats.org/drawingml/2006/chart" xmlns:dgm="http://schemas.openxmlformats.org/drawingml/2006/diagram" xmlns:o="urn:schemas-microsoft-com:office:office" xmlns:v="urn:schemas-microsoft-com:vml" xmlns:pvml="urn:schemas-microsoft-com:office:powerpoint" xmlns:com="http://schemas.openxmlformats.org/drawingml/2006/compatibility" xmlns:p14="http://schemas.microsoft.com/office/powerpoint/2010/main" xmlns:p15="http://schemas.microsoft.com/office/powerpoint/2012/main" xmlns:ahyp="http://schemas.microsoft.com/office/drawing/2018/hyperlinkcolor" matchingName="竖排标题与文本" type="vertTitleAndTx">
+<p:sldLayout xmlns:a="http://schemas.openxmlformats.org/drawingml/2006/main" xmlns:r="http://schemas.openxmlformats.org/officeDocument/2006/relationships" xmlns:p="http://schemas.openxmlformats.org/presentationml/2006/main" type="vertTitleAndTx" matchingName="竖排标题与文本">
   <p:cSld name="VERTICAL_TITLE_AND_VERTICAL_TEXT">
     <p:spTree>
       <p:nvGrpSpPr>
@@ -2354,7 +2377,7 @@
           </a:ln>
         </p:spPr>
         <p:txBody>
-          <a:bodyPr anchorCtr="0" anchor="ctr" bIns="34275" lIns="68575" spcFirstLastPara="1" rIns="68575" wrap="square" tIns="34275">
+          <a:bodyPr spcFirstLastPara="1" wrap="square" lIns="68575" tIns="34275" rIns="68575" bIns="34275" anchor="ctr" anchorCtr="0">
             <a:normAutofit/>
           </a:bodyPr>
           <a:lstStyle>
@@ -2472,7 +2495,7 @@
           <p:cNvPr id="76" name="Shape 16"/>
           <p:cNvSpPr txBox="1"/>
           <p:nvPr>
-            <p:ph idx="1" type="body"/>
+            <p:ph type="body" idx="1"/>
           </p:nvPr>
         </p:nvSpPr>
         <p:spPr>
@@ -2489,11 +2512,11 @@
           </a:ln>
         </p:spPr>
         <p:txBody>
-          <a:bodyPr anchorCtr="0" anchor="t" bIns="34275" lIns="68575" spcFirstLastPara="1" rIns="68575" wrap="square" tIns="34275">
+          <a:bodyPr spcFirstLastPara="1" wrap="square" lIns="68575" tIns="34275" rIns="68575" bIns="34275" anchor="t" anchorCtr="0">
             <a:normAutofit/>
           </a:bodyPr>
           <a:lstStyle>
-            <a:lvl1pPr indent="-317500" lvl="0" marL="457200" algn="l">
+            <a:lvl1pPr marL="457200" lvl="0" indent="-317500" algn="l">
               <a:lnSpc>
                 <a:spcPct val="90000"/>
               </a:lnSpc>
@@ -2510,7 +2533,7 @@
               <a:buChar char="•"/>
               <a:defRPr/>
             </a:lvl1pPr>
-            <a:lvl2pPr indent="-317500" lvl="1" marL="914400" algn="l">
+            <a:lvl2pPr marL="914400" lvl="1" indent="-317500" algn="l">
               <a:lnSpc>
                 <a:spcPct val="90000"/>
               </a:lnSpc>
@@ -2527,7 +2550,7 @@
               <a:buChar char="•"/>
               <a:defRPr/>
             </a:lvl2pPr>
-            <a:lvl3pPr indent="-317500" lvl="2" marL="1371600" algn="l">
+            <a:lvl3pPr marL="1371600" lvl="2" indent="-317500" algn="l">
               <a:lnSpc>
                 <a:spcPct val="90000"/>
               </a:lnSpc>
@@ -2544,7 +2567,7 @@
               <a:buChar char="•"/>
               <a:defRPr/>
             </a:lvl3pPr>
-            <a:lvl4pPr indent="-317500" lvl="3" marL="1828800" algn="l">
+            <a:lvl4pPr marL="1828800" lvl="3" indent="-317500" algn="l">
               <a:lnSpc>
                 <a:spcPct val="90000"/>
               </a:lnSpc>
@@ -2561,7 +2584,7 @@
               <a:buChar char="•"/>
               <a:defRPr/>
             </a:lvl4pPr>
-            <a:lvl5pPr indent="-317500" lvl="4" marL="2286000" algn="l">
+            <a:lvl5pPr marL="2286000" lvl="4" indent="-317500" algn="l">
               <a:lnSpc>
                 <a:spcPct val="90000"/>
               </a:lnSpc>
@@ -2578,7 +2601,7 @@
               <a:buChar char="•"/>
               <a:defRPr/>
             </a:lvl5pPr>
-            <a:lvl6pPr indent="-317500" lvl="5" marL="2743200" algn="l">
+            <a:lvl6pPr marL="2743200" lvl="5" indent="-317500" algn="l">
               <a:lnSpc>
                 <a:spcPct val="90000"/>
               </a:lnSpc>
@@ -2595,7 +2618,7 @@
               <a:buChar char="•"/>
               <a:defRPr/>
             </a:lvl6pPr>
-            <a:lvl7pPr indent="-317500" lvl="6" marL="3200400" algn="l">
+            <a:lvl7pPr marL="3200400" lvl="6" indent="-317500" algn="l">
               <a:lnSpc>
                 <a:spcPct val="90000"/>
               </a:lnSpc>
@@ -2612,7 +2635,7 @@
               <a:buChar char="•"/>
               <a:defRPr/>
             </a:lvl7pPr>
-            <a:lvl8pPr indent="-317500" lvl="7" marL="3657600" algn="l">
+            <a:lvl8pPr marL="3657600" lvl="7" indent="-317500" algn="l">
               <a:lnSpc>
                 <a:spcPct val="90000"/>
               </a:lnSpc>
@@ -2629,7 +2652,7 @@
               <a:buChar char="•"/>
               <a:defRPr/>
             </a:lvl8pPr>
-            <a:lvl9pPr indent="-317500" lvl="8" marL="4114800" algn="l">
+            <a:lvl9pPr marL="4114800" lvl="8" indent="-317500" algn="l">
               <a:lnSpc>
                 <a:spcPct val="90000"/>
               </a:lnSpc>
@@ -2655,7 +2678,7 @@
           <p:cNvPr id="77" name="Shape 17"/>
           <p:cNvSpPr txBox="1"/>
           <p:nvPr>
-            <p:ph idx="10" type="dt"/>
+            <p:ph type="dt" idx="10"/>
           </p:nvPr>
         </p:nvSpPr>
         <p:spPr>
@@ -2672,7 +2695,7 @@
           </a:ln>
         </p:spPr>
         <p:txBody>
-          <a:bodyPr anchorCtr="0" anchor="ctr" bIns="34275" lIns="68575" spcFirstLastPara="1" rIns="68575" wrap="square" tIns="34275">
+          <a:bodyPr spcFirstLastPara="1" wrap="square" lIns="68575" tIns="34275" rIns="68575" bIns="34275" anchor="ctr" anchorCtr="0">
             <a:noAutofit/>
           </a:bodyPr>
           <a:lstStyle>
@@ -2784,7 +2807,7 @@
           <p:cNvPr id="78" name="Shape 18"/>
           <p:cNvSpPr txBox="1"/>
           <p:nvPr>
-            <p:ph idx="11" type="ftr"/>
+            <p:ph type="ftr" idx="11"/>
           </p:nvPr>
         </p:nvSpPr>
         <p:spPr>
@@ -2801,7 +2824,7 @@
           </a:ln>
         </p:spPr>
         <p:txBody>
-          <a:bodyPr anchorCtr="0" anchor="ctr" bIns="34275" lIns="68575" spcFirstLastPara="1" rIns="68575" wrap="square" tIns="34275">
+          <a:bodyPr spcFirstLastPara="1" wrap="square" lIns="68575" tIns="34275" rIns="68575" bIns="34275" anchor="ctr" anchorCtr="0">
             <a:noAutofit/>
           </a:bodyPr>
           <a:lstStyle>
@@ -2913,7 +2936,7 @@
           <p:cNvPr id="79" name="Shape 19"/>
           <p:cNvSpPr txBox="1"/>
           <p:nvPr>
-            <p:ph idx="12" type="sldNum"/>
+            <p:ph type="sldNum" idx="12"/>
           </p:nvPr>
         </p:nvSpPr>
         <p:spPr>
@@ -2930,67 +2953,67 @@
           </a:ln>
         </p:spPr>
         <p:txBody>
-          <a:bodyPr anchorCtr="0" anchor="ctr" bIns="34275" lIns="68575" spcFirstLastPara="1" rIns="68575" wrap="square" tIns="34275">
+          <a:bodyPr spcFirstLastPara="1" wrap="square" lIns="68575" tIns="34275" rIns="68575" bIns="34275" anchor="ctr" anchorCtr="0">
             <a:noAutofit/>
           </a:bodyPr>
           <a:lstStyle>
-            <a:lvl1pPr indent="0" lvl="0" marL="0" algn="r">
+            <a:lvl1pPr marL="0" lvl="0" indent="0" algn="r">
               <a:spcBef>
                 <a:spcPts val="0"/>
               </a:spcBef>
               <a:buNone/>
               <a:defRPr/>
             </a:lvl1pPr>
-            <a:lvl2pPr indent="0" lvl="1" marL="0" algn="r">
+            <a:lvl2pPr marL="0" lvl="1" indent="0" algn="r">
               <a:spcBef>
                 <a:spcPts val="0"/>
               </a:spcBef>
               <a:buNone/>
               <a:defRPr/>
             </a:lvl2pPr>
-            <a:lvl3pPr indent="0" lvl="2" marL="0" algn="r">
+            <a:lvl3pPr marL="0" lvl="2" indent="0" algn="r">
               <a:spcBef>
                 <a:spcPts val="0"/>
               </a:spcBef>
               <a:buNone/>
               <a:defRPr/>
             </a:lvl3pPr>
-            <a:lvl4pPr indent="0" lvl="3" marL="0" algn="r">
+            <a:lvl4pPr marL="0" lvl="3" indent="0" algn="r">
               <a:spcBef>
                 <a:spcPts val="0"/>
               </a:spcBef>
               <a:buNone/>
               <a:defRPr/>
             </a:lvl4pPr>
-            <a:lvl5pPr indent="0" lvl="4" marL="0" algn="r">
+            <a:lvl5pPr marL="0" lvl="4" indent="0" algn="r">
               <a:spcBef>
                 <a:spcPts val="0"/>
               </a:spcBef>
               <a:buNone/>
               <a:defRPr/>
             </a:lvl5pPr>
-            <a:lvl6pPr indent="0" lvl="5" marL="0" algn="r">
+            <a:lvl6pPr marL="0" lvl="5" indent="0" algn="r">
               <a:spcBef>
                 <a:spcPts val="0"/>
               </a:spcBef>
               <a:buNone/>
               <a:defRPr/>
             </a:lvl6pPr>
-            <a:lvl7pPr indent="0" lvl="6" marL="0" algn="r">
+            <a:lvl7pPr marL="0" lvl="6" indent="0" algn="r">
               <a:spcBef>
                 <a:spcPts val="0"/>
               </a:spcBef>
               <a:buNone/>
               <a:defRPr/>
             </a:lvl7pPr>
-            <a:lvl8pPr indent="0" lvl="7" marL="0" algn="r">
+            <a:lvl8pPr marL="0" lvl="7" indent="0" algn="r">
               <a:spcBef>
                 <a:spcPts val="0"/>
               </a:spcBef>
               <a:buNone/>
               <a:defRPr/>
             </a:lvl8pPr>
-            <a:lvl9pPr indent="0" lvl="8" marL="0" algn="r">
+            <a:lvl9pPr marL="0" lvl="8" indent="0" algn="r">
               <a:spcBef>
                 <a:spcPts val="0"/>
               </a:spcBef>
@@ -2999,7 +3022,7 @@
             </a:lvl9pPr>
           </a:lstStyle>
           <a:p>
-            <a:pPr indent="0" lvl="0" marL="0" rtl="0" algn="r">
+            <a:pPr marL="0" lvl="0" indent="0" algn="r" rtl="0">
               <a:spcBef>
                 <a:spcPts val="0"/>
               </a:spcBef>
@@ -3010,9 +3033,8 @@
             </a:pPr>
             <a:fld id="{00000000-1234-1234-1234-123412341234}" type="slidenum">
               <a:rPr lang="zh-CN"/>
-              <a:t>‹#›</a:t>
             </a:fld>
-            <a:endParaRPr/>
+            <a:endParaRPr lang="zh-CN"/>
           </a:p>
         </p:txBody>
       </p:sp>
@@ -3026,7 +3048,7 @@
 
 <file path=ppt/slideLayouts/slideLayout12.xml><?xml version="1.0" encoding="utf-8"?>
 <p:sldLayout xmlns:a="http://schemas.openxmlformats.org/drawingml/2006/main" xmlns:r="http://schemas.openxmlformats.org/officeDocument/2006/relationships" xmlns:p="http://schemas.openxmlformats.org/presentationml/2006/main" type="title" preserve="1">
-  <p:cSld name="">
+  <p:cSld>
     <p:spTree>
       <p:nvGrpSpPr>
         <p:cNvPr id="1" name=""/>
@@ -3050,7 +3072,7 @@
 </file>
 
 <file path=ppt/slideLayouts/slideLayout2.xml><?xml version="1.0" encoding="utf-8"?>
-<p:sldLayout xmlns:a="http://schemas.openxmlformats.org/drawingml/2006/main" xmlns:r="http://schemas.openxmlformats.org/officeDocument/2006/relationships" xmlns:mc="http://schemas.openxmlformats.org/markup-compatibility/2006" xmlns:mv="urn:schemas-microsoft-com:mac:vml" xmlns:p="http://schemas.openxmlformats.org/presentationml/2006/main" xmlns:c="http://schemas.openxmlformats.org/drawingml/2006/chart" xmlns:dgm="http://schemas.openxmlformats.org/drawingml/2006/diagram" xmlns:o="urn:schemas-microsoft-com:office:office" xmlns:v="urn:schemas-microsoft-com:vml" xmlns:pvml="urn:schemas-microsoft-com:office:powerpoint" xmlns:com="http://schemas.openxmlformats.org/drawingml/2006/compatibility" xmlns:p14="http://schemas.microsoft.com/office/powerpoint/2010/main" xmlns:p15="http://schemas.microsoft.com/office/powerpoint/2012/main" xmlns:ahyp="http://schemas.microsoft.com/office/drawing/2018/hyperlinkcolor" matchingName="标题和内容" type="obj">
+<p:sldLayout xmlns:a="http://schemas.openxmlformats.org/drawingml/2006/main" xmlns:r="http://schemas.openxmlformats.org/officeDocument/2006/relationships" xmlns:p="http://schemas.openxmlformats.org/presentationml/2006/main" type="obj" matchingName="标题和内容">
   <p:cSld name="OBJECT">
     <p:spTree>
       <p:nvGrpSpPr>
@@ -3088,7 +3110,7 @@
           </a:ln>
         </p:spPr>
         <p:txBody>
-          <a:bodyPr anchorCtr="0" anchor="ctr" bIns="34275" lIns="68575" spcFirstLastPara="1" rIns="68575" wrap="square" tIns="34275">
+          <a:bodyPr spcFirstLastPara="1" wrap="square" lIns="68575" tIns="34275" rIns="68575" bIns="34275" anchor="ctr" anchorCtr="0">
             <a:normAutofit/>
           </a:bodyPr>
           <a:lstStyle>
@@ -3206,7 +3228,7 @@
           <p:cNvPr id="19" name="Shape 55"/>
           <p:cNvSpPr txBox="1"/>
           <p:nvPr>
-            <p:ph idx="1" type="body"/>
+            <p:ph type="body" idx="1"/>
           </p:nvPr>
         </p:nvSpPr>
         <p:spPr>
@@ -3223,11 +3245,11 @@
           </a:ln>
         </p:spPr>
         <p:txBody>
-          <a:bodyPr anchorCtr="0" anchor="t" bIns="34275" lIns="68575" spcFirstLastPara="1" rIns="68575" wrap="square" tIns="34275">
+          <a:bodyPr spcFirstLastPara="1" wrap="square" lIns="68575" tIns="34275" rIns="68575" bIns="34275" anchor="t" anchorCtr="0">
             <a:normAutofit/>
           </a:bodyPr>
           <a:lstStyle>
-            <a:lvl1pPr indent="-317500" lvl="0" marL="457200" algn="l">
+            <a:lvl1pPr marL="457200" lvl="0" indent="-317500" algn="l">
               <a:lnSpc>
                 <a:spcPct val="90000"/>
               </a:lnSpc>
@@ -3244,7 +3266,7 @@
               <a:buChar char="•"/>
               <a:defRPr/>
             </a:lvl1pPr>
-            <a:lvl2pPr indent="-317500" lvl="1" marL="914400" algn="l">
+            <a:lvl2pPr marL="914400" lvl="1" indent="-317500" algn="l">
               <a:lnSpc>
                 <a:spcPct val="90000"/>
               </a:lnSpc>
@@ -3261,7 +3283,7 @@
               <a:buChar char="•"/>
               <a:defRPr/>
             </a:lvl2pPr>
-            <a:lvl3pPr indent="-317500" lvl="2" marL="1371600" algn="l">
+            <a:lvl3pPr marL="1371600" lvl="2" indent="-317500" algn="l">
               <a:lnSpc>
                 <a:spcPct val="90000"/>
               </a:lnSpc>
@@ -3278,7 +3300,7 @@
               <a:buChar char="•"/>
               <a:defRPr/>
             </a:lvl3pPr>
-            <a:lvl4pPr indent="-317500" lvl="3" marL="1828800" algn="l">
+            <a:lvl4pPr marL="1828800" lvl="3" indent="-317500" algn="l">
               <a:lnSpc>
                 <a:spcPct val="90000"/>
               </a:lnSpc>
@@ -3295,7 +3317,7 @@
               <a:buChar char="•"/>
               <a:defRPr/>
             </a:lvl4pPr>
-            <a:lvl5pPr indent="-317500" lvl="4" marL="2286000" algn="l">
+            <a:lvl5pPr marL="2286000" lvl="4" indent="-317500" algn="l">
               <a:lnSpc>
                 <a:spcPct val="90000"/>
               </a:lnSpc>
@@ -3312,7 +3334,7 @@
               <a:buChar char="•"/>
               <a:defRPr/>
             </a:lvl5pPr>
-            <a:lvl6pPr indent="-317500" lvl="5" marL="2743200" algn="l">
+            <a:lvl6pPr marL="2743200" lvl="5" indent="-317500" algn="l">
               <a:lnSpc>
                 <a:spcPct val="90000"/>
               </a:lnSpc>
@@ -3329,7 +3351,7 @@
               <a:buChar char="•"/>
               <a:defRPr/>
             </a:lvl6pPr>
-            <a:lvl7pPr indent="-317500" lvl="6" marL="3200400" algn="l">
+            <a:lvl7pPr marL="3200400" lvl="6" indent="-317500" algn="l">
               <a:lnSpc>
                 <a:spcPct val="90000"/>
               </a:lnSpc>
@@ -3346,7 +3368,7 @@
               <a:buChar char="•"/>
               <a:defRPr/>
             </a:lvl7pPr>
-            <a:lvl8pPr indent="-317500" lvl="7" marL="3657600" algn="l">
+            <a:lvl8pPr marL="3657600" lvl="7" indent="-317500" algn="l">
               <a:lnSpc>
                 <a:spcPct val="90000"/>
               </a:lnSpc>
@@ -3363,7 +3385,7 @@
               <a:buChar char="•"/>
               <a:defRPr/>
             </a:lvl8pPr>
-            <a:lvl9pPr indent="-317500" lvl="8" marL="4114800" algn="l">
+            <a:lvl9pPr marL="4114800" lvl="8" indent="-317500" algn="l">
               <a:lnSpc>
                 <a:spcPct val="90000"/>
               </a:lnSpc>
@@ -3389,7 +3411,7 @@
           <p:cNvPr id="20" name="Shape 56"/>
           <p:cNvSpPr txBox="1"/>
           <p:nvPr>
-            <p:ph idx="10" type="dt"/>
+            <p:ph type="dt" idx="10"/>
           </p:nvPr>
         </p:nvSpPr>
         <p:spPr>
@@ -3406,7 +3428,7 @@
           </a:ln>
         </p:spPr>
         <p:txBody>
-          <a:bodyPr anchorCtr="0" anchor="ctr" bIns="34275" lIns="68575" spcFirstLastPara="1" rIns="68575" wrap="square" tIns="34275">
+          <a:bodyPr spcFirstLastPara="1" wrap="square" lIns="68575" tIns="34275" rIns="68575" bIns="34275" anchor="ctr" anchorCtr="0">
             <a:noAutofit/>
           </a:bodyPr>
           <a:lstStyle>
@@ -3518,7 +3540,7 @@
           <p:cNvPr id="21" name="Shape 57"/>
           <p:cNvSpPr txBox="1"/>
           <p:nvPr>
-            <p:ph idx="11" type="ftr"/>
+            <p:ph type="ftr" idx="11"/>
           </p:nvPr>
         </p:nvSpPr>
         <p:spPr>
@@ -3535,7 +3557,7 @@
           </a:ln>
         </p:spPr>
         <p:txBody>
-          <a:bodyPr anchorCtr="0" anchor="ctr" bIns="34275" lIns="68575" spcFirstLastPara="1" rIns="68575" wrap="square" tIns="34275">
+          <a:bodyPr spcFirstLastPara="1" wrap="square" lIns="68575" tIns="34275" rIns="68575" bIns="34275" anchor="ctr" anchorCtr="0">
             <a:noAutofit/>
           </a:bodyPr>
           <a:lstStyle>
@@ -3647,7 +3669,7 @@
           <p:cNvPr id="22" name="Shape 58"/>
           <p:cNvSpPr txBox="1"/>
           <p:nvPr>
-            <p:ph idx="12" type="sldNum"/>
+            <p:ph type="sldNum" idx="12"/>
           </p:nvPr>
         </p:nvSpPr>
         <p:spPr>
@@ -3664,67 +3686,67 @@
           </a:ln>
         </p:spPr>
         <p:txBody>
-          <a:bodyPr anchorCtr="0" anchor="ctr" bIns="34275" lIns="68575" spcFirstLastPara="1" rIns="68575" wrap="square" tIns="34275">
+          <a:bodyPr spcFirstLastPara="1" wrap="square" lIns="68575" tIns="34275" rIns="68575" bIns="34275" anchor="ctr" anchorCtr="0">
             <a:noAutofit/>
           </a:bodyPr>
           <a:lstStyle>
-            <a:lvl1pPr indent="0" lvl="0" marL="0" algn="r">
+            <a:lvl1pPr marL="0" lvl="0" indent="0" algn="r">
               <a:spcBef>
                 <a:spcPts val="0"/>
               </a:spcBef>
               <a:buNone/>
               <a:defRPr/>
             </a:lvl1pPr>
-            <a:lvl2pPr indent="0" lvl="1" marL="0" algn="r">
+            <a:lvl2pPr marL="0" lvl="1" indent="0" algn="r">
               <a:spcBef>
                 <a:spcPts val="0"/>
               </a:spcBef>
               <a:buNone/>
               <a:defRPr/>
             </a:lvl2pPr>
-            <a:lvl3pPr indent="0" lvl="2" marL="0" algn="r">
+            <a:lvl3pPr marL="0" lvl="2" indent="0" algn="r">
               <a:spcBef>
                 <a:spcPts val="0"/>
               </a:spcBef>
               <a:buNone/>
               <a:defRPr/>
             </a:lvl3pPr>
-            <a:lvl4pPr indent="0" lvl="3" marL="0" algn="r">
+            <a:lvl4pPr marL="0" lvl="3" indent="0" algn="r">
               <a:spcBef>
                 <a:spcPts val="0"/>
               </a:spcBef>
               <a:buNone/>
               <a:defRPr/>
             </a:lvl4pPr>
-            <a:lvl5pPr indent="0" lvl="4" marL="0" algn="r">
+            <a:lvl5pPr marL="0" lvl="4" indent="0" algn="r">
               <a:spcBef>
                 <a:spcPts val="0"/>
               </a:spcBef>
               <a:buNone/>
               <a:defRPr/>
             </a:lvl5pPr>
-            <a:lvl6pPr indent="0" lvl="5" marL="0" algn="r">
+            <a:lvl6pPr marL="0" lvl="5" indent="0" algn="r">
               <a:spcBef>
                 <a:spcPts val="0"/>
               </a:spcBef>
               <a:buNone/>
               <a:defRPr/>
             </a:lvl6pPr>
-            <a:lvl7pPr indent="0" lvl="6" marL="0" algn="r">
+            <a:lvl7pPr marL="0" lvl="6" indent="0" algn="r">
               <a:spcBef>
                 <a:spcPts val="0"/>
               </a:spcBef>
               <a:buNone/>
               <a:defRPr/>
             </a:lvl7pPr>
-            <a:lvl8pPr indent="0" lvl="7" marL="0" algn="r">
+            <a:lvl8pPr marL="0" lvl="7" indent="0" algn="r">
               <a:spcBef>
                 <a:spcPts val="0"/>
               </a:spcBef>
               <a:buNone/>
               <a:defRPr/>
             </a:lvl8pPr>
-            <a:lvl9pPr indent="0" lvl="8" marL="0" algn="r">
+            <a:lvl9pPr marL="0" lvl="8" indent="0" algn="r">
               <a:spcBef>
                 <a:spcPts val="0"/>
               </a:spcBef>
@@ -3733,7 +3755,7 @@
             </a:lvl9pPr>
           </a:lstStyle>
           <a:p>
-            <a:pPr indent="0" lvl="0" marL="0" rtl="0" algn="r">
+            <a:pPr marL="0" lvl="0" indent="0" algn="r" rtl="0">
               <a:spcBef>
                 <a:spcPts val="0"/>
               </a:spcBef>
@@ -3744,9 +3766,8 @@
             </a:pPr>
             <a:fld id="{00000000-1234-1234-1234-123412341234}" type="slidenum">
               <a:rPr lang="zh-CN"/>
-              <a:t>‹#›</a:t>
             </a:fld>
-            <a:endParaRPr/>
+            <a:endParaRPr lang="zh-CN"/>
           </a:p>
         </p:txBody>
       </p:sp>
@@ -3759,7 +3780,7 @@
 </file>
 
 <file path=ppt/slideLayouts/slideLayout3.xml><?xml version="1.0" encoding="utf-8"?>
-<p:sldLayout xmlns:a="http://schemas.openxmlformats.org/drawingml/2006/main" xmlns:r="http://schemas.openxmlformats.org/officeDocument/2006/relationships" xmlns:mc="http://schemas.openxmlformats.org/markup-compatibility/2006" xmlns:mv="urn:schemas-microsoft-com:mac:vml" xmlns:p="http://schemas.openxmlformats.org/presentationml/2006/main" xmlns:c="http://schemas.openxmlformats.org/drawingml/2006/chart" xmlns:dgm="http://schemas.openxmlformats.org/drawingml/2006/diagram" xmlns:o="urn:schemas-microsoft-com:office:office" xmlns:v="urn:schemas-microsoft-com:vml" xmlns:pvml="urn:schemas-microsoft-com:office:powerpoint" xmlns:com="http://schemas.openxmlformats.org/drawingml/2006/compatibility" xmlns:p14="http://schemas.microsoft.com/office/powerpoint/2010/main" xmlns:p15="http://schemas.microsoft.com/office/powerpoint/2012/main" xmlns:ahyp="http://schemas.microsoft.com/office/drawing/2018/hyperlinkcolor" matchingName="节标题" type="secHead">
+<p:sldLayout xmlns:a="http://schemas.openxmlformats.org/drawingml/2006/main" xmlns:r="http://schemas.openxmlformats.org/officeDocument/2006/relationships" xmlns:p="http://schemas.openxmlformats.org/presentationml/2006/main" type="secHead" matchingName="节标题">
   <p:cSld name="SECTION_HEADER">
     <p:spTree>
       <p:nvGrpSpPr>
@@ -3797,7 +3818,7 @@
           </a:ln>
         </p:spPr>
         <p:txBody>
-          <a:bodyPr anchorCtr="0" anchor="b" bIns="34275" lIns="68575" spcFirstLastPara="1" rIns="68575" wrap="square" tIns="34275">
+          <a:bodyPr spcFirstLastPara="1" wrap="square" lIns="68575" tIns="34275" rIns="68575" bIns="34275" anchor="b" anchorCtr="0">
             <a:normAutofit/>
           </a:bodyPr>
           <a:lstStyle>
@@ -3815,7 +3836,7 @@
                 <a:schemeClr val="dk1"/>
               </a:buClr>
               <a:buSzPts val="4500"/>
-              <a:buFont typeface="Arial"/>
+              <a:buFont typeface="Arial" panose="020B0604020202020204"/>
               <a:buNone/>
               <a:defRPr sz="4500"/>
             </a:lvl1pPr>
@@ -3916,7 +3937,7 @@
           <p:cNvPr id="25" name="Shape 60"/>
           <p:cNvSpPr txBox="1"/>
           <p:nvPr>
-            <p:ph idx="1" type="body"/>
+            <p:ph type="body" idx="1"/>
           </p:nvPr>
         </p:nvSpPr>
         <p:spPr>
@@ -3933,11 +3954,11 @@
           </a:ln>
         </p:spPr>
         <p:txBody>
-          <a:bodyPr anchorCtr="0" anchor="t" bIns="34275" lIns="68575" spcFirstLastPara="1" rIns="68575" wrap="square" tIns="34275">
+          <a:bodyPr spcFirstLastPara="1" wrap="square" lIns="68575" tIns="34275" rIns="68575" bIns="34275" anchor="t" anchorCtr="0">
             <a:normAutofit/>
           </a:bodyPr>
           <a:lstStyle>
-            <a:lvl1pPr indent="-228600" lvl="0" marL="457200" algn="l">
+            <a:lvl1pPr marL="457200" lvl="0" indent="-228600" algn="l">
               <a:lnSpc>
                 <a:spcPct val="90000"/>
               </a:lnSpc>
@@ -3958,7 +3979,7 @@
                 </a:solidFill>
               </a:defRPr>
             </a:lvl1pPr>
-            <a:lvl2pPr indent="-228600" lvl="1" marL="914400" algn="l">
+            <a:lvl2pPr marL="914400" lvl="1" indent="-228600" algn="l">
               <a:lnSpc>
                 <a:spcPct val="90000"/>
               </a:lnSpc>
@@ -3979,7 +4000,7 @@
                 </a:solidFill>
               </a:defRPr>
             </a:lvl2pPr>
-            <a:lvl3pPr indent="-228600" lvl="2" marL="1371600" algn="l">
+            <a:lvl3pPr marL="1371600" lvl="2" indent="-228600" algn="l">
               <a:lnSpc>
                 <a:spcPct val="90000"/>
               </a:lnSpc>
@@ -4000,7 +4021,7 @@
                 </a:solidFill>
               </a:defRPr>
             </a:lvl3pPr>
-            <a:lvl4pPr indent="-228600" lvl="3" marL="1828800" algn="l">
+            <a:lvl4pPr marL="1828800" lvl="3" indent="-228600" algn="l">
               <a:lnSpc>
                 <a:spcPct val="90000"/>
               </a:lnSpc>
@@ -4021,7 +4042,7 @@
                 </a:solidFill>
               </a:defRPr>
             </a:lvl4pPr>
-            <a:lvl5pPr indent="-228600" lvl="4" marL="2286000" algn="l">
+            <a:lvl5pPr marL="2286000" lvl="4" indent="-228600" algn="l">
               <a:lnSpc>
                 <a:spcPct val="90000"/>
               </a:lnSpc>
@@ -4042,7 +4063,7 @@
                 </a:solidFill>
               </a:defRPr>
             </a:lvl5pPr>
-            <a:lvl6pPr indent="-228600" lvl="5" marL="2743200" algn="l">
+            <a:lvl6pPr marL="2743200" lvl="5" indent="-228600" algn="l">
               <a:lnSpc>
                 <a:spcPct val="90000"/>
               </a:lnSpc>
@@ -4063,7 +4084,7 @@
                 </a:solidFill>
               </a:defRPr>
             </a:lvl6pPr>
-            <a:lvl7pPr indent="-228600" lvl="6" marL="3200400" algn="l">
+            <a:lvl7pPr marL="3200400" lvl="6" indent="-228600" algn="l">
               <a:lnSpc>
                 <a:spcPct val="90000"/>
               </a:lnSpc>
@@ -4084,7 +4105,7 @@
                 </a:solidFill>
               </a:defRPr>
             </a:lvl7pPr>
-            <a:lvl8pPr indent="-228600" lvl="7" marL="3657600" algn="l">
+            <a:lvl8pPr marL="3657600" lvl="7" indent="-228600" algn="l">
               <a:lnSpc>
                 <a:spcPct val="90000"/>
               </a:lnSpc>
@@ -4105,7 +4126,7 @@
                 </a:solidFill>
               </a:defRPr>
             </a:lvl8pPr>
-            <a:lvl9pPr indent="-228600" lvl="8" marL="4114800" algn="l">
+            <a:lvl9pPr marL="4114800" lvl="8" indent="-228600" algn="l">
               <a:lnSpc>
                 <a:spcPct val="90000"/>
               </a:lnSpc>
@@ -4135,7 +4156,7 @@
           <p:cNvPr id="26" name="Shape 61"/>
           <p:cNvSpPr txBox="1"/>
           <p:nvPr>
-            <p:ph idx="10" type="dt"/>
+            <p:ph type="dt" idx="10"/>
           </p:nvPr>
         </p:nvSpPr>
         <p:spPr>
@@ -4152,7 +4173,7 @@
           </a:ln>
         </p:spPr>
         <p:txBody>
-          <a:bodyPr anchorCtr="0" anchor="ctr" bIns="34275" lIns="68575" spcFirstLastPara="1" rIns="68575" wrap="square" tIns="34275">
+          <a:bodyPr spcFirstLastPara="1" wrap="square" lIns="68575" tIns="34275" rIns="68575" bIns="34275" anchor="ctr" anchorCtr="0">
             <a:noAutofit/>
           </a:bodyPr>
           <a:lstStyle>
@@ -4264,7 +4285,7 @@
           <p:cNvPr id="27" name="Shape 62"/>
           <p:cNvSpPr txBox="1"/>
           <p:nvPr>
-            <p:ph idx="11" type="ftr"/>
+            <p:ph type="ftr" idx="11"/>
           </p:nvPr>
         </p:nvSpPr>
         <p:spPr>
@@ -4281,7 +4302,7 @@
           </a:ln>
         </p:spPr>
         <p:txBody>
-          <a:bodyPr anchorCtr="0" anchor="ctr" bIns="34275" lIns="68575" spcFirstLastPara="1" rIns="68575" wrap="square" tIns="34275">
+          <a:bodyPr spcFirstLastPara="1" wrap="square" lIns="68575" tIns="34275" rIns="68575" bIns="34275" anchor="ctr" anchorCtr="0">
             <a:noAutofit/>
           </a:bodyPr>
           <a:lstStyle>
@@ -4393,7 +4414,7 @@
           <p:cNvPr id="28" name="Shape 63"/>
           <p:cNvSpPr txBox="1"/>
           <p:nvPr>
-            <p:ph idx="12" type="sldNum"/>
+            <p:ph type="sldNum" idx="12"/>
           </p:nvPr>
         </p:nvSpPr>
         <p:spPr>
@@ -4410,67 +4431,67 @@
           </a:ln>
         </p:spPr>
         <p:txBody>
-          <a:bodyPr anchorCtr="0" anchor="ctr" bIns="34275" lIns="68575" spcFirstLastPara="1" rIns="68575" wrap="square" tIns="34275">
+          <a:bodyPr spcFirstLastPara="1" wrap="square" lIns="68575" tIns="34275" rIns="68575" bIns="34275" anchor="ctr" anchorCtr="0">
             <a:noAutofit/>
           </a:bodyPr>
           <a:lstStyle>
-            <a:lvl1pPr indent="0" lvl="0" marL="0" algn="r">
+            <a:lvl1pPr marL="0" lvl="0" indent="0" algn="r">
               <a:spcBef>
                 <a:spcPts val="0"/>
               </a:spcBef>
               <a:buNone/>
               <a:defRPr/>
             </a:lvl1pPr>
-            <a:lvl2pPr indent="0" lvl="1" marL="0" algn="r">
+            <a:lvl2pPr marL="0" lvl="1" indent="0" algn="r">
               <a:spcBef>
                 <a:spcPts val="0"/>
               </a:spcBef>
               <a:buNone/>
               <a:defRPr/>
             </a:lvl2pPr>
-            <a:lvl3pPr indent="0" lvl="2" marL="0" algn="r">
+            <a:lvl3pPr marL="0" lvl="2" indent="0" algn="r">
               <a:spcBef>
                 <a:spcPts val="0"/>
               </a:spcBef>
               <a:buNone/>
               <a:defRPr/>
             </a:lvl3pPr>
-            <a:lvl4pPr indent="0" lvl="3" marL="0" algn="r">
+            <a:lvl4pPr marL="0" lvl="3" indent="0" algn="r">
               <a:spcBef>
                 <a:spcPts val="0"/>
               </a:spcBef>
               <a:buNone/>
               <a:defRPr/>
             </a:lvl4pPr>
-            <a:lvl5pPr indent="0" lvl="4" marL="0" algn="r">
+            <a:lvl5pPr marL="0" lvl="4" indent="0" algn="r">
               <a:spcBef>
                 <a:spcPts val="0"/>
               </a:spcBef>
               <a:buNone/>
               <a:defRPr/>
             </a:lvl5pPr>
-            <a:lvl6pPr indent="0" lvl="5" marL="0" algn="r">
+            <a:lvl6pPr marL="0" lvl="5" indent="0" algn="r">
               <a:spcBef>
                 <a:spcPts val="0"/>
               </a:spcBef>
               <a:buNone/>
               <a:defRPr/>
             </a:lvl6pPr>
-            <a:lvl7pPr indent="0" lvl="6" marL="0" algn="r">
+            <a:lvl7pPr marL="0" lvl="6" indent="0" algn="r">
               <a:spcBef>
                 <a:spcPts val="0"/>
               </a:spcBef>
               <a:buNone/>
               <a:defRPr/>
             </a:lvl7pPr>
-            <a:lvl8pPr indent="0" lvl="7" marL="0" algn="r">
+            <a:lvl8pPr marL="0" lvl="7" indent="0" algn="r">
               <a:spcBef>
                 <a:spcPts val="0"/>
               </a:spcBef>
               <a:buNone/>
               <a:defRPr/>
             </a:lvl8pPr>
-            <a:lvl9pPr indent="0" lvl="8" marL="0" algn="r">
+            <a:lvl9pPr marL="0" lvl="8" indent="0" algn="r">
               <a:spcBef>
                 <a:spcPts val="0"/>
               </a:spcBef>
@@ -4479,7 +4500,7 @@
             </a:lvl9pPr>
           </a:lstStyle>
           <a:p>
-            <a:pPr indent="0" lvl="0" marL="0" rtl="0" algn="r">
+            <a:pPr marL="0" lvl="0" indent="0" algn="r" rtl="0">
               <a:spcBef>
                 <a:spcPts val="0"/>
               </a:spcBef>
@@ -4490,9 +4511,8 @@
             </a:pPr>
             <a:fld id="{00000000-1234-1234-1234-123412341234}" type="slidenum">
               <a:rPr lang="zh-CN"/>
-              <a:t>‹#›</a:t>
             </a:fld>
-            <a:endParaRPr/>
+            <a:endParaRPr lang="zh-CN"/>
           </a:p>
         </p:txBody>
       </p:sp>
@@ -4505,7 +4525,7 @@
 </file>
 
 <file path=ppt/slideLayouts/slideLayout4.xml><?xml version="1.0" encoding="utf-8"?>
-<p:sldLayout xmlns:a="http://schemas.openxmlformats.org/drawingml/2006/main" xmlns:r="http://schemas.openxmlformats.org/officeDocument/2006/relationships" xmlns:mc="http://schemas.openxmlformats.org/markup-compatibility/2006" xmlns:mv="urn:schemas-microsoft-com:mac:vml" xmlns:p="http://schemas.openxmlformats.org/presentationml/2006/main" xmlns:c="http://schemas.openxmlformats.org/drawingml/2006/chart" xmlns:dgm="http://schemas.openxmlformats.org/drawingml/2006/diagram" xmlns:o="urn:schemas-microsoft-com:office:office" xmlns:v="urn:schemas-microsoft-com:vml" xmlns:pvml="urn:schemas-microsoft-com:office:powerpoint" xmlns:com="http://schemas.openxmlformats.org/drawingml/2006/compatibility" xmlns:p14="http://schemas.microsoft.com/office/powerpoint/2010/main" xmlns:p15="http://schemas.microsoft.com/office/powerpoint/2012/main" xmlns:ahyp="http://schemas.microsoft.com/office/drawing/2018/hyperlinkcolor" matchingName="两栏内容" type="twoObj">
+<p:sldLayout xmlns:a="http://schemas.openxmlformats.org/drawingml/2006/main" xmlns:r="http://schemas.openxmlformats.org/officeDocument/2006/relationships" xmlns:p="http://schemas.openxmlformats.org/presentationml/2006/main" type="twoObj" matchingName="两栏内容">
   <p:cSld name="TWO_OBJECTS">
     <p:spTree>
       <p:nvGrpSpPr>
@@ -4543,7 +4563,7 @@
           </a:ln>
         </p:spPr>
         <p:txBody>
-          <a:bodyPr anchorCtr="0" anchor="ctr" bIns="34275" lIns="68575" spcFirstLastPara="1" rIns="68575" wrap="square" tIns="34275">
+          <a:bodyPr spcFirstLastPara="1" wrap="square" lIns="68575" tIns="34275" rIns="68575" bIns="34275" anchor="ctr" anchorCtr="0">
             <a:normAutofit/>
           </a:bodyPr>
           <a:lstStyle>
@@ -4661,7 +4681,7 @@
           <p:cNvPr id="31" name="Shape 10"/>
           <p:cNvSpPr txBox="1"/>
           <p:nvPr>
-            <p:ph idx="1" type="body"/>
+            <p:ph type="body" idx="1"/>
           </p:nvPr>
         </p:nvSpPr>
         <p:spPr>
@@ -4678,11 +4698,11 @@
           </a:ln>
         </p:spPr>
         <p:txBody>
-          <a:bodyPr anchorCtr="0" anchor="t" bIns="34275" lIns="68575" spcFirstLastPara="1" rIns="68575" wrap="square" tIns="34275">
+          <a:bodyPr spcFirstLastPara="1" wrap="square" lIns="68575" tIns="34275" rIns="68575" bIns="34275" anchor="t" anchorCtr="0">
             <a:normAutofit/>
           </a:bodyPr>
           <a:lstStyle>
-            <a:lvl1pPr indent="-317500" lvl="0" marL="457200" algn="l">
+            <a:lvl1pPr marL="457200" lvl="0" indent="-317500" algn="l">
               <a:lnSpc>
                 <a:spcPct val="90000"/>
               </a:lnSpc>
@@ -4699,7 +4719,7 @@
               <a:buChar char="•"/>
               <a:defRPr/>
             </a:lvl1pPr>
-            <a:lvl2pPr indent="-317500" lvl="1" marL="914400" algn="l">
+            <a:lvl2pPr marL="914400" lvl="1" indent="-317500" algn="l">
               <a:lnSpc>
                 <a:spcPct val="90000"/>
               </a:lnSpc>
@@ -4716,7 +4736,7 @@
               <a:buChar char="•"/>
               <a:defRPr/>
             </a:lvl2pPr>
-            <a:lvl3pPr indent="-317500" lvl="2" marL="1371600" algn="l">
+            <a:lvl3pPr marL="1371600" lvl="2" indent="-317500" algn="l">
               <a:lnSpc>
                 <a:spcPct val="90000"/>
               </a:lnSpc>
@@ -4733,7 +4753,7 @@
               <a:buChar char="•"/>
               <a:defRPr/>
             </a:lvl3pPr>
-            <a:lvl4pPr indent="-317500" lvl="3" marL="1828800" algn="l">
+            <a:lvl4pPr marL="1828800" lvl="3" indent="-317500" algn="l">
               <a:lnSpc>
                 <a:spcPct val="90000"/>
               </a:lnSpc>
@@ -4750,7 +4770,7 @@
               <a:buChar char="•"/>
               <a:defRPr/>
             </a:lvl4pPr>
-            <a:lvl5pPr indent="-317500" lvl="4" marL="2286000" algn="l">
+            <a:lvl5pPr marL="2286000" lvl="4" indent="-317500" algn="l">
               <a:lnSpc>
                 <a:spcPct val="90000"/>
               </a:lnSpc>
@@ -4767,7 +4787,7 @@
               <a:buChar char="•"/>
               <a:defRPr/>
             </a:lvl5pPr>
-            <a:lvl6pPr indent="-317500" lvl="5" marL="2743200" algn="l">
+            <a:lvl6pPr marL="2743200" lvl="5" indent="-317500" algn="l">
               <a:lnSpc>
                 <a:spcPct val="90000"/>
               </a:lnSpc>
@@ -4784,7 +4804,7 @@
               <a:buChar char="•"/>
               <a:defRPr/>
             </a:lvl6pPr>
-            <a:lvl7pPr indent="-317500" lvl="6" marL="3200400" algn="l">
+            <a:lvl7pPr marL="3200400" lvl="6" indent="-317500" algn="l">
               <a:lnSpc>
                 <a:spcPct val="90000"/>
               </a:lnSpc>
@@ -4801,7 +4821,7 @@
               <a:buChar char="•"/>
               <a:defRPr/>
             </a:lvl7pPr>
-            <a:lvl8pPr indent="-317500" lvl="7" marL="3657600" algn="l">
+            <a:lvl8pPr marL="3657600" lvl="7" indent="-317500" algn="l">
               <a:lnSpc>
                 <a:spcPct val="90000"/>
               </a:lnSpc>
@@ -4818,7 +4838,7 @@
               <a:buChar char="•"/>
               <a:defRPr/>
             </a:lvl8pPr>
-            <a:lvl9pPr indent="-317500" lvl="8" marL="4114800" algn="l">
+            <a:lvl9pPr marL="4114800" lvl="8" indent="-317500" algn="l">
               <a:lnSpc>
                 <a:spcPct val="90000"/>
               </a:lnSpc>
@@ -4844,7 +4864,7 @@
           <p:cNvPr id="32" name="Shape 11"/>
           <p:cNvSpPr txBox="1"/>
           <p:nvPr>
-            <p:ph idx="2" type="body"/>
+            <p:ph type="body" idx="2"/>
           </p:nvPr>
         </p:nvSpPr>
         <p:spPr>
@@ -4861,11 +4881,11 @@
           </a:ln>
         </p:spPr>
         <p:txBody>
-          <a:bodyPr anchorCtr="0" anchor="t" bIns="34275" lIns="68575" spcFirstLastPara="1" rIns="68575" wrap="square" tIns="34275">
+          <a:bodyPr spcFirstLastPara="1" wrap="square" lIns="68575" tIns="34275" rIns="68575" bIns="34275" anchor="t" anchorCtr="0">
             <a:normAutofit/>
           </a:bodyPr>
           <a:lstStyle>
-            <a:lvl1pPr indent="-317500" lvl="0" marL="457200" algn="l">
+            <a:lvl1pPr marL="457200" lvl="0" indent="-317500" algn="l">
               <a:lnSpc>
                 <a:spcPct val="90000"/>
               </a:lnSpc>
@@ -4882,7 +4902,7 @@
               <a:buChar char="•"/>
               <a:defRPr/>
             </a:lvl1pPr>
-            <a:lvl2pPr indent="-317500" lvl="1" marL="914400" algn="l">
+            <a:lvl2pPr marL="914400" lvl="1" indent="-317500" algn="l">
               <a:lnSpc>
                 <a:spcPct val="90000"/>
               </a:lnSpc>
@@ -4899,7 +4919,7 @@
               <a:buChar char="•"/>
               <a:defRPr/>
             </a:lvl2pPr>
-            <a:lvl3pPr indent="-317500" lvl="2" marL="1371600" algn="l">
+            <a:lvl3pPr marL="1371600" lvl="2" indent="-317500" algn="l">
               <a:lnSpc>
                 <a:spcPct val="90000"/>
               </a:lnSpc>
@@ -4916,7 +4936,7 @@
               <a:buChar char="•"/>
               <a:defRPr/>
             </a:lvl3pPr>
-            <a:lvl4pPr indent="-317500" lvl="3" marL="1828800" algn="l">
+            <a:lvl4pPr marL="1828800" lvl="3" indent="-317500" algn="l">
               <a:lnSpc>
                 <a:spcPct val="90000"/>
               </a:lnSpc>
@@ -4933,7 +4953,7 @@
               <a:buChar char="•"/>
               <a:defRPr/>
             </a:lvl4pPr>
-            <a:lvl5pPr indent="-317500" lvl="4" marL="2286000" algn="l">
+            <a:lvl5pPr marL="2286000" lvl="4" indent="-317500" algn="l">
               <a:lnSpc>
                 <a:spcPct val="90000"/>
               </a:lnSpc>
@@ -4950,7 +4970,7 @@
               <a:buChar char="•"/>
               <a:defRPr/>
             </a:lvl5pPr>
-            <a:lvl6pPr indent="-317500" lvl="5" marL="2743200" algn="l">
+            <a:lvl6pPr marL="2743200" lvl="5" indent="-317500" algn="l">
               <a:lnSpc>
                 <a:spcPct val="90000"/>
               </a:lnSpc>
@@ -4967,7 +4987,7 @@
               <a:buChar char="•"/>
               <a:defRPr/>
             </a:lvl6pPr>
-            <a:lvl7pPr indent="-317500" lvl="6" marL="3200400" algn="l">
+            <a:lvl7pPr marL="3200400" lvl="6" indent="-317500" algn="l">
               <a:lnSpc>
                 <a:spcPct val="90000"/>
               </a:lnSpc>
@@ -4984,7 +5004,7 @@
               <a:buChar char="•"/>
               <a:defRPr/>
             </a:lvl7pPr>
-            <a:lvl8pPr indent="-317500" lvl="7" marL="3657600" algn="l">
+            <a:lvl8pPr marL="3657600" lvl="7" indent="-317500" algn="l">
               <a:lnSpc>
                 <a:spcPct val="90000"/>
               </a:lnSpc>
@@ -5001,7 +5021,7 @@
               <a:buChar char="•"/>
               <a:defRPr/>
             </a:lvl8pPr>
-            <a:lvl9pPr indent="-317500" lvl="8" marL="4114800" algn="l">
+            <a:lvl9pPr marL="4114800" lvl="8" indent="-317500" algn="l">
               <a:lnSpc>
                 <a:spcPct val="90000"/>
               </a:lnSpc>
@@ -5027,7 +5047,7 @@
           <p:cNvPr id="33" name="Shape 12"/>
           <p:cNvSpPr txBox="1"/>
           <p:nvPr>
-            <p:ph idx="10" type="dt"/>
+            <p:ph type="dt" idx="10"/>
           </p:nvPr>
         </p:nvSpPr>
         <p:spPr>
@@ -5044,7 +5064,7 @@
           </a:ln>
         </p:spPr>
         <p:txBody>
-          <a:bodyPr anchorCtr="0" anchor="ctr" bIns="34275" lIns="68575" spcFirstLastPara="1" rIns="68575" wrap="square" tIns="34275">
+          <a:bodyPr spcFirstLastPara="1" wrap="square" lIns="68575" tIns="34275" rIns="68575" bIns="34275" anchor="ctr" anchorCtr="0">
             <a:noAutofit/>
           </a:bodyPr>
           <a:lstStyle>
@@ -5156,7 +5176,7 @@
           <p:cNvPr id="34" name="Shape 13"/>
           <p:cNvSpPr txBox="1"/>
           <p:nvPr>
-            <p:ph idx="11" type="ftr"/>
+            <p:ph type="ftr" idx="11"/>
           </p:nvPr>
         </p:nvSpPr>
         <p:spPr>
@@ -5173,7 +5193,7 @@
           </a:ln>
         </p:spPr>
         <p:txBody>
-          <a:bodyPr anchorCtr="0" anchor="ctr" bIns="34275" lIns="68575" spcFirstLastPara="1" rIns="68575" wrap="square" tIns="34275">
+          <a:bodyPr spcFirstLastPara="1" wrap="square" lIns="68575" tIns="34275" rIns="68575" bIns="34275" anchor="ctr" anchorCtr="0">
             <a:noAutofit/>
           </a:bodyPr>
           <a:lstStyle>
@@ -5285,7 +5305,7 @@
           <p:cNvPr id="35" name="Shape 14"/>
           <p:cNvSpPr txBox="1"/>
           <p:nvPr>
-            <p:ph idx="12" type="sldNum"/>
+            <p:ph type="sldNum" idx="12"/>
           </p:nvPr>
         </p:nvSpPr>
         <p:spPr>
@@ -5302,67 +5322,67 @@
           </a:ln>
         </p:spPr>
         <p:txBody>
-          <a:bodyPr anchorCtr="0" anchor="ctr" bIns="34275" lIns="68575" spcFirstLastPara="1" rIns="68575" wrap="square" tIns="34275">
+          <a:bodyPr spcFirstLastPara="1" wrap="square" lIns="68575" tIns="34275" rIns="68575" bIns="34275" anchor="ctr" anchorCtr="0">
             <a:noAutofit/>
           </a:bodyPr>
           <a:lstStyle>
-            <a:lvl1pPr indent="0" lvl="0" marL="0" algn="r">
+            <a:lvl1pPr marL="0" lvl="0" indent="0" algn="r">
               <a:spcBef>
                 <a:spcPts val="0"/>
               </a:spcBef>
               <a:buNone/>
               <a:defRPr/>
             </a:lvl1pPr>
-            <a:lvl2pPr indent="0" lvl="1" marL="0" algn="r">
+            <a:lvl2pPr marL="0" lvl="1" indent="0" algn="r">
               <a:spcBef>
                 <a:spcPts val="0"/>
               </a:spcBef>
               <a:buNone/>
               <a:defRPr/>
             </a:lvl2pPr>
-            <a:lvl3pPr indent="0" lvl="2" marL="0" algn="r">
+            <a:lvl3pPr marL="0" lvl="2" indent="0" algn="r">
               <a:spcBef>
                 <a:spcPts val="0"/>
               </a:spcBef>
               <a:buNone/>
               <a:defRPr/>
             </a:lvl3pPr>
-            <a:lvl4pPr indent="0" lvl="3" marL="0" algn="r">
+            <a:lvl4pPr marL="0" lvl="3" indent="0" algn="r">
               <a:spcBef>
                 <a:spcPts val="0"/>
               </a:spcBef>
               <a:buNone/>
               <a:defRPr/>
             </a:lvl4pPr>
-            <a:lvl5pPr indent="0" lvl="4" marL="0" algn="r">
+            <a:lvl5pPr marL="0" lvl="4" indent="0" algn="r">
               <a:spcBef>
                 <a:spcPts val="0"/>
               </a:spcBef>
               <a:buNone/>
               <a:defRPr/>
             </a:lvl5pPr>
-            <a:lvl6pPr indent="0" lvl="5" marL="0" algn="r">
+            <a:lvl6pPr marL="0" lvl="5" indent="0" algn="r">
               <a:spcBef>
                 <a:spcPts val="0"/>
               </a:spcBef>
               <a:buNone/>
               <a:defRPr/>
             </a:lvl6pPr>
-            <a:lvl7pPr indent="0" lvl="6" marL="0" algn="r">
+            <a:lvl7pPr marL="0" lvl="6" indent="0" algn="r">
               <a:spcBef>
                 <a:spcPts val="0"/>
               </a:spcBef>
               <a:buNone/>
               <a:defRPr/>
             </a:lvl7pPr>
-            <a:lvl8pPr indent="0" lvl="7" marL="0" algn="r">
+            <a:lvl8pPr marL="0" lvl="7" indent="0" algn="r">
               <a:spcBef>
                 <a:spcPts val="0"/>
               </a:spcBef>
               <a:buNone/>
               <a:defRPr/>
             </a:lvl8pPr>
-            <a:lvl9pPr indent="0" lvl="8" marL="0" algn="r">
+            <a:lvl9pPr marL="0" lvl="8" indent="0" algn="r">
               <a:spcBef>
                 <a:spcPts val="0"/>
               </a:spcBef>
@@ -5371,7 +5391,7 @@
             </a:lvl9pPr>
           </a:lstStyle>
           <a:p>
-            <a:pPr indent="0" lvl="0" marL="0" rtl="0" algn="r">
+            <a:pPr marL="0" lvl="0" indent="0" algn="r" rtl="0">
               <a:spcBef>
                 <a:spcPts val="0"/>
               </a:spcBef>
@@ -5382,9 +5402,8 @@
             </a:pPr>
             <a:fld id="{00000000-1234-1234-1234-123412341234}" type="slidenum">
               <a:rPr lang="zh-CN"/>
-              <a:t>‹#›</a:t>
             </a:fld>
-            <a:endParaRPr/>
+            <a:endParaRPr lang="zh-CN"/>
           </a:p>
         </p:txBody>
       </p:sp>
@@ -5397,7 +5416,7 @@
 </file>
 
 <file path=ppt/slideLayouts/slideLayout5.xml><?xml version="1.0" encoding="utf-8"?>
-<p:sldLayout xmlns:a="http://schemas.openxmlformats.org/drawingml/2006/main" xmlns:r="http://schemas.openxmlformats.org/officeDocument/2006/relationships" xmlns:mc="http://schemas.openxmlformats.org/markup-compatibility/2006" xmlns:mv="urn:schemas-microsoft-com:mac:vml" xmlns:p="http://schemas.openxmlformats.org/presentationml/2006/main" xmlns:c="http://schemas.openxmlformats.org/drawingml/2006/chart" xmlns:dgm="http://schemas.openxmlformats.org/drawingml/2006/diagram" xmlns:o="urn:schemas-microsoft-com:office:office" xmlns:v="urn:schemas-microsoft-com:vml" xmlns:pvml="urn:schemas-microsoft-com:office:powerpoint" xmlns:com="http://schemas.openxmlformats.org/drawingml/2006/compatibility" xmlns:p14="http://schemas.microsoft.com/office/powerpoint/2010/main" xmlns:p15="http://schemas.microsoft.com/office/powerpoint/2012/main" xmlns:ahyp="http://schemas.microsoft.com/office/drawing/2018/hyperlinkcolor" matchingName="比较" type="twoTxTwoObj">
+<p:sldLayout xmlns:a="http://schemas.openxmlformats.org/drawingml/2006/main" xmlns:r="http://schemas.openxmlformats.org/officeDocument/2006/relationships" xmlns:p="http://schemas.openxmlformats.org/presentationml/2006/main" type="twoTxTwoObj" matchingName="比较">
   <p:cSld name="TWO_OBJECTS_WITH_TEXT">
     <p:spTree>
       <p:nvGrpSpPr>
@@ -5435,7 +5454,7 @@
           </a:ln>
         </p:spPr>
         <p:txBody>
-          <a:bodyPr anchorCtr="0" anchor="ctr" bIns="34275" lIns="68575" spcFirstLastPara="1" rIns="68575" wrap="square" tIns="34275">
+          <a:bodyPr spcFirstLastPara="1" wrap="square" lIns="68575" tIns="34275" rIns="68575" bIns="34275" anchor="ctr" anchorCtr="0">
             <a:normAutofit/>
           </a:bodyPr>
           <a:lstStyle>
@@ -5553,7 +5572,7 @@
           <p:cNvPr id="38" name="Shape 36"/>
           <p:cNvSpPr txBox="1"/>
           <p:nvPr>
-            <p:ph idx="1" type="body"/>
+            <p:ph type="body" idx="1"/>
           </p:nvPr>
         </p:nvSpPr>
         <p:spPr>
@@ -5570,11 +5589,11 @@
           </a:ln>
         </p:spPr>
         <p:txBody>
-          <a:bodyPr anchorCtr="0" anchor="b" bIns="34275" lIns="68575" spcFirstLastPara="1" rIns="68575" wrap="square" tIns="34275">
+          <a:bodyPr spcFirstLastPara="1" wrap="square" lIns="68575" tIns="34275" rIns="68575" bIns="34275" anchor="b" anchorCtr="0">
             <a:normAutofit/>
           </a:bodyPr>
           <a:lstStyle>
-            <a:lvl1pPr indent="-228600" lvl="0" marL="457200" algn="l">
+            <a:lvl1pPr marL="457200" lvl="0" indent="-228600" algn="l">
               <a:lnSpc>
                 <a:spcPct val="90000"/>
               </a:lnSpc>
@@ -5589,9 +5608,9 @@
               </a:buClr>
               <a:buSzPts val="1800"/>
               <a:buNone/>
-              <a:defRPr b="1" sz="1800"/>
+              <a:defRPr sz="1800" b="1"/>
             </a:lvl1pPr>
-            <a:lvl2pPr indent="-228600" lvl="1" marL="914400" algn="l">
+            <a:lvl2pPr marL="914400" lvl="1" indent="-228600" algn="l">
               <a:lnSpc>
                 <a:spcPct val="90000"/>
               </a:lnSpc>
@@ -5606,9 +5625,9 @@
               </a:buClr>
               <a:buSzPts val="1500"/>
               <a:buNone/>
-              <a:defRPr b="1" sz="1500"/>
+              <a:defRPr sz="1500" b="1"/>
             </a:lvl2pPr>
-            <a:lvl3pPr indent="-228600" lvl="2" marL="1371600" algn="l">
+            <a:lvl3pPr marL="1371600" lvl="2" indent="-228600" algn="l">
               <a:lnSpc>
                 <a:spcPct val="90000"/>
               </a:lnSpc>
@@ -5623,9 +5642,9 @@
               </a:buClr>
               <a:buSzPts val="1400"/>
               <a:buNone/>
-              <a:defRPr b="1" sz="1400"/>
+              <a:defRPr sz="1400" b="1"/>
             </a:lvl3pPr>
-            <a:lvl4pPr indent="-228600" lvl="3" marL="1828800" algn="l">
+            <a:lvl4pPr marL="1828800" lvl="3" indent="-228600" algn="l">
               <a:lnSpc>
                 <a:spcPct val="90000"/>
               </a:lnSpc>
@@ -5640,9 +5659,9 @@
               </a:buClr>
               <a:buSzPts val="1200"/>
               <a:buNone/>
-              <a:defRPr b="1" sz="1200"/>
+              <a:defRPr sz="1200" b="1"/>
             </a:lvl4pPr>
-            <a:lvl5pPr indent="-228600" lvl="4" marL="2286000" algn="l">
+            <a:lvl5pPr marL="2286000" lvl="4" indent="-228600" algn="l">
               <a:lnSpc>
                 <a:spcPct val="90000"/>
               </a:lnSpc>
@@ -5657,9 +5676,9 @@
               </a:buClr>
               <a:buSzPts val="1200"/>
               <a:buNone/>
-              <a:defRPr b="1" sz="1200"/>
+              <a:defRPr sz="1200" b="1"/>
             </a:lvl5pPr>
-            <a:lvl6pPr indent="-228600" lvl="5" marL="2743200" algn="l">
+            <a:lvl6pPr marL="2743200" lvl="5" indent="-228600" algn="l">
               <a:lnSpc>
                 <a:spcPct val="90000"/>
               </a:lnSpc>
@@ -5674,9 +5693,9 @@
               </a:buClr>
               <a:buSzPts val="1200"/>
               <a:buNone/>
-              <a:defRPr b="1" sz="1200"/>
+              <a:defRPr sz="1200" b="1"/>
             </a:lvl6pPr>
-            <a:lvl7pPr indent="-228600" lvl="6" marL="3200400" algn="l">
+            <a:lvl7pPr marL="3200400" lvl="6" indent="-228600" algn="l">
               <a:lnSpc>
                 <a:spcPct val="90000"/>
               </a:lnSpc>
@@ -5691,9 +5710,9 @@
               </a:buClr>
               <a:buSzPts val="1200"/>
               <a:buNone/>
-              <a:defRPr b="1" sz="1200"/>
+              <a:defRPr sz="1200" b="1"/>
             </a:lvl7pPr>
-            <a:lvl8pPr indent="-228600" lvl="7" marL="3657600" algn="l">
+            <a:lvl8pPr marL="3657600" lvl="7" indent="-228600" algn="l">
               <a:lnSpc>
                 <a:spcPct val="90000"/>
               </a:lnSpc>
@@ -5708,9 +5727,9 @@
               </a:buClr>
               <a:buSzPts val="1200"/>
               <a:buNone/>
-              <a:defRPr b="1" sz="1200"/>
+              <a:defRPr sz="1200" b="1"/>
             </a:lvl8pPr>
-            <a:lvl9pPr indent="-228600" lvl="8" marL="4114800" algn="l">
+            <a:lvl9pPr marL="4114800" lvl="8" indent="-228600" algn="l">
               <a:lnSpc>
                 <a:spcPct val="90000"/>
               </a:lnSpc>
@@ -5725,7 +5744,7 @@
               </a:buClr>
               <a:buSzPts val="1200"/>
               <a:buNone/>
-              <a:defRPr b="1" sz="1200"/>
+              <a:defRPr sz="1200" b="1"/>
             </a:lvl9pPr>
           </a:lstStyle>
           <a:p/>
@@ -5736,7 +5755,7 @@
           <p:cNvPr id="39" name="Shape 37"/>
           <p:cNvSpPr txBox="1"/>
           <p:nvPr>
-            <p:ph idx="2" type="body"/>
+            <p:ph type="body" idx="2"/>
           </p:nvPr>
         </p:nvSpPr>
         <p:spPr>
@@ -5753,11 +5772,11 @@
           </a:ln>
         </p:spPr>
         <p:txBody>
-          <a:bodyPr anchorCtr="0" anchor="t" bIns="34275" lIns="68575" spcFirstLastPara="1" rIns="68575" wrap="square" tIns="34275">
+          <a:bodyPr spcFirstLastPara="1" wrap="square" lIns="68575" tIns="34275" rIns="68575" bIns="34275" anchor="t" anchorCtr="0">
             <a:normAutofit/>
           </a:bodyPr>
           <a:lstStyle>
-            <a:lvl1pPr indent="-317500" lvl="0" marL="457200" algn="l">
+            <a:lvl1pPr marL="457200" lvl="0" indent="-317500" algn="l">
               <a:lnSpc>
                 <a:spcPct val="90000"/>
               </a:lnSpc>
@@ -5774,7 +5793,7 @@
               <a:buChar char="•"/>
               <a:defRPr/>
             </a:lvl1pPr>
-            <a:lvl2pPr indent="-317500" lvl="1" marL="914400" algn="l">
+            <a:lvl2pPr marL="914400" lvl="1" indent="-317500" algn="l">
               <a:lnSpc>
                 <a:spcPct val="90000"/>
               </a:lnSpc>
@@ -5791,7 +5810,7 @@
               <a:buChar char="•"/>
               <a:defRPr/>
             </a:lvl2pPr>
-            <a:lvl3pPr indent="-317500" lvl="2" marL="1371600" algn="l">
+            <a:lvl3pPr marL="1371600" lvl="2" indent="-317500" algn="l">
               <a:lnSpc>
                 <a:spcPct val="90000"/>
               </a:lnSpc>
@@ -5808,7 +5827,7 @@
               <a:buChar char="•"/>
               <a:defRPr/>
             </a:lvl3pPr>
-            <a:lvl4pPr indent="-317500" lvl="3" marL="1828800" algn="l">
+            <a:lvl4pPr marL="1828800" lvl="3" indent="-317500" algn="l">
               <a:lnSpc>
                 <a:spcPct val="90000"/>
               </a:lnSpc>
@@ -5825,7 +5844,7 @@
               <a:buChar char="•"/>
               <a:defRPr/>
             </a:lvl4pPr>
-            <a:lvl5pPr indent="-317500" lvl="4" marL="2286000" algn="l">
+            <a:lvl5pPr marL="2286000" lvl="4" indent="-317500" algn="l">
               <a:lnSpc>
                 <a:spcPct val="90000"/>
               </a:lnSpc>
@@ -5842,7 +5861,7 @@
               <a:buChar char="•"/>
               <a:defRPr/>
             </a:lvl5pPr>
-            <a:lvl6pPr indent="-317500" lvl="5" marL="2743200" algn="l">
+            <a:lvl6pPr marL="2743200" lvl="5" indent="-317500" algn="l">
               <a:lnSpc>
                 <a:spcPct val="90000"/>
               </a:lnSpc>
@@ -5859,7 +5878,7 @@
               <a:buChar char="•"/>
               <a:defRPr/>
             </a:lvl6pPr>
-            <a:lvl7pPr indent="-317500" lvl="6" marL="3200400" algn="l">
+            <a:lvl7pPr marL="3200400" lvl="6" indent="-317500" algn="l">
               <a:lnSpc>
                 <a:spcPct val="90000"/>
               </a:lnSpc>
@@ -5876,7 +5895,7 @@
               <a:buChar char="•"/>
               <a:defRPr/>
             </a:lvl7pPr>
-            <a:lvl8pPr indent="-317500" lvl="7" marL="3657600" algn="l">
+            <a:lvl8pPr marL="3657600" lvl="7" indent="-317500" algn="l">
               <a:lnSpc>
                 <a:spcPct val="90000"/>
               </a:lnSpc>
@@ -5893,7 +5912,7 @@
               <a:buChar char="•"/>
               <a:defRPr/>
             </a:lvl8pPr>
-            <a:lvl9pPr indent="-317500" lvl="8" marL="4114800" algn="l">
+            <a:lvl9pPr marL="4114800" lvl="8" indent="-317500" algn="l">
               <a:lnSpc>
                 <a:spcPct val="90000"/>
               </a:lnSpc>
@@ -5919,7 +5938,7 @@
           <p:cNvPr id="40" name="Shape 38"/>
           <p:cNvSpPr txBox="1"/>
           <p:nvPr>
-            <p:ph idx="3" type="body"/>
+            <p:ph type="body" idx="3"/>
           </p:nvPr>
         </p:nvSpPr>
         <p:spPr>
@@ -5936,11 +5955,11 @@
           </a:ln>
         </p:spPr>
         <p:txBody>
-          <a:bodyPr anchorCtr="0" anchor="b" bIns="34275" lIns="68575" spcFirstLastPara="1" rIns="68575" wrap="square" tIns="34275">
+          <a:bodyPr spcFirstLastPara="1" wrap="square" lIns="68575" tIns="34275" rIns="68575" bIns="34275" anchor="b" anchorCtr="0">
             <a:normAutofit/>
           </a:bodyPr>
           <a:lstStyle>
-            <a:lvl1pPr indent="-228600" lvl="0" marL="457200" algn="l">
+            <a:lvl1pPr marL="457200" lvl="0" indent="-228600" algn="l">
               <a:lnSpc>
                 <a:spcPct val="90000"/>
               </a:lnSpc>
@@ -5955,9 +5974,9 @@
               </a:buClr>
               <a:buSzPts val="1800"/>
               <a:buNone/>
-              <a:defRPr b="1" sz="1800"/>
+              <a:defRPr sz="1800" b="1"/>
             </a:lvl1pPr>
-            <a:lvl2pPr indent="-228600" lvl="1" marL="914400" algn="l">
+            <a:lvl2pPr marL="914400" lvl="1" indent="-228600" algn="l">
               <a:lnSpc>
                 <a:spcPct val="90000"/>
               </a:lnSpc>
@@ -5972,9 +5991,9 @@
               </a:buClr>
               <a:buSzPts val="1500"/>
               <a:buNone/>
-              <a:defRPr b="1" sz="1500"/>
+              <a:defRPr sz="1500" b="1"/>
             </a:lvl2pPr>
-            <a:lvl3pPr indent="-228600" lvl="2" marL="1371600" algn="l">
+            <a:lvl3pPr marL="1371600" lvl="2" indent="-228600" algn="l">
               <a:lnSpc>
                 <a:spcPct val="90000"/>
               </a:lnSpc>
@@ -5989,9 +6008,9 @@
               </a:buClr>
               <a:buSzPts val="1400"/>
               <a:buNone/>
-              <a:defRPr b="1" sz="1400"/>
+              <a:defRPr sz="1400" b="1"/>
             </a:lvl3pPr>
-            <a:lvl4pPr indent="-228600" lvl="3" marL="1828800" algn="l">
+            <a:lvl4pPr marL="1828800" lvl="3" indent="-228600" algn="l">
               <a:lnSpc>
                 <a:spcPct val="90000"/>
               </a:lnSpc>
@@ -6006,9 +6025,9 @@
               </a:buClr>
               <a:buSzPts val="1200"/>
               <a:buNone/>
-              <a:defRPr b="1" sz="1200"/>
+              <a:defRPr sz="1200" b="1"/>
             </a:lvl4pPr>
-            <a:lvl5pPr indent="-228600" lvl="4" marL="2286000" algn="l">
+            <a:lvl5pPr marL="2286000" lvl="4" indent="-228600" algn="l">
               <a:lnSpc>
                 <a:spcPct val="90000"/>
               </a:lnSpc>
@@ -6023,9 +6042,9 @@
               </a:buClr>
               <a:buSzPts val="1200"/>
               <a:buNone/>
-              <a:defRPr b="1" sz="1200"/>
+              <a:defRPr sz="1200" b="1"/>
             </a:lvl5pPr>
-            <a:lvl6pPr indent="-228600" lvl="5" marL="2743200" algn="l">
+            <a:lvl6pPr marL="2743200" lvl="5" indent="-228600" algn="l">
               <a:lnSpc>
                 <a:spcPct val="90000"/>
               </a:lnSpc>
@@ -6040,9 +6059,9 @@
               </a:buClr>
               <a:buSzPts val="1200"/>
               <a:buNone/>
-              <a:defRPr b="1" sz="1200"/>
+              <a:defRPr sz="1200" b="1"/>
             </a:lvl6pPr>
-            <a:lvl7pPr indent="-228600" lvl="6" marL="3200400" algn="l">
+            <a:lvl7pPr marL="3200400" lvl="6" indent="-228600" algn="l">
               <a:lnSpc>
                 <a:spcPct val="90000"/>
               </a:lnSpc>
@@ -6057,9 +6076,9 @@
               </a:buClr>
               <a:buSzPts val="1200"/>
               <a:buNone/>
-              <a:defRPr b="1" sz="1200"/>
+              <a:defRPr sz="1200" b="1"/>
             </a:lvl7pPr>
-            <a:lvl8pPr indent="-228600" lvl="7" marL="3657600" algn="l">
+            <a:lvl8pPr marL="3657600" lvl="7" indent="-228600" algn="l">
               <a:lnSpc>
                 <a:spcPct val="90000"/>
               </a:lnSpc>
@@ -6074,9 +6093,9 @@
               </a:buClr>
               <a:buSzPts val="1200"/>
               <a:buNone/>
-              <a:defRPr b="1" sz="1200"/>
+              <a:defRPr sz="1200" b="1"/>
             </a:lvl8pPr>
-            <a:lvl9pPr indent="-228600" lvl="8" marL="4114800" algn="l">
+            <a:lvl9pPr marL="4114800" lvl="8" indent="-228600" algn="l">
               <a:lnSpc>
                 <a:spcPct val="90000"/>
               </a:lnSpc>
@@ -6091,7 +6110,7 @@
               </a:buClr>
               <a:buSzPts val="1200"/>
               <a:buNone/>
-              <a:defRPr b="1" sz="1200"/>
+              <a:defRPr sz="1200" b="1"/>
             </a:lvl9pPr>
           </a:lstStyle>
           <a:p/>
@@ -6102,7 +6121,7 @@
           <p:cNvPr id="41" name="Shape 39"/>
           <p:cNvSpPr txBox="1"/>
           <p:nvPr>
-            <p:ph idx="4" type="body"/>
+            <p:ph type="body" idx="4"/>
           </p:nvPr>
         </p:nvSpPr>
         <p:spPr>
@@ -6119,11 +6138,11 @@
           </a:ln>
         </p:spPr>
         <p:txBody>
-          <a:bodyPr anchorCtr="0" anchor="t" bIns="34275" lIns="68575" spcFirstLastPara="1" rIns="68575" wrap="square" tIns="34275">
+          <a:bodyPr spcFirstLastPara="1" wrap="square" lIns="68575" tIns="34275" rIns="68575" bIns="34275" anchor="t" anchorCtr="0">
             <a:normAutofit/>
           </a:bodyPr>
           <a:lstStyle>
-            <a:lvl1pPr indent="-317500" lvl="0" marL="457200" algn="l">
+            <a:lvl1pPr marL="457200" lvl="0" indent="-317500" algn="l">
               <a:lnSpc>
                 <a:spcPct val="90000"/>
               </a:lnSpc>
@@ -6140,7 +6159,7 @@
               <a:buChar char="•"/>
               <a:defRPr/>
             </a:lvl1pPr>
-            <a:lvl2pPr indent="-317500" lvl="1" marL="914400" algn="l">
+            <a:lvl2pPr marL="914400" lvl="1" indent="-317500" algn="l">
               <a:lnSpc>
                 <a:spcPct val="90000"/>
               </a:lnSpc>
@@ -6157,7 +6176,7 @@
               <a:buChar char="•"/>
               <a:defRPr/>
             </a:lvl2pPr>
-            <a:lvl3pPr indent="-317500" lvl="2" marL="1371600" algn="l">
+            <a:lvl3pPr marL="1371600" lvl="2" indent="-317500" algn="l">
               <a:lnSpc>
                 <a:spcPct val="90000"/>
               </a:lnSpc>
@@ -6174,7 +6193,7 @@
               <a:buChar char="•"/>
               <a:defRPr/>
             </a:lvl3pPr>
-            <a:lvl4pPr indent="-317500" lvl="3" marL="1828800" algn="l">
+            <a:lvl4pPr marL="1828800" lvl="3" indent="-317500" algn="l">
               <a:lnSpc>
                 <a:spcPct val="90000"/>
               </a:lnSpc>
@@ -6191,7 +6210,7 @@
               <a:buChar char="•"/>
               <a:defRPr/>
             </a:lvl4pPr>
-            <a:lvl5pPr indent="-317500" lvl="4" marL="2286000" algn="l">
+            <a:lvl5pPr marL="2286000" lvl="4" indent="-317500" algn="l">
               <a:lnSpc>
                 <a:spcPct val="90000"/>
               </a:lnSpc>
@@ -6208,7 +6227,7 @@
               <a:buChar char="•"/>
               <a:defRPr/>
             </a:lvl5pPr>
-            <a:lvl6pPr indent="-317500" lvl="5" marL="2743200" algn="l">
+            <a:lvl6pPr marL="2743200" lvl="5" indent="-317500" algn="l">
               <a:lnSpc>
                 <a:spcPct val="90000"/>
               </a:lnSpc>
@@ -6225,7 +6244,7 @@
               <a:buChar char="•"/>
               <a:defRPr/>
             </a:lvl6pPr>
-            <a:lvl7pPr indent="-317500" lvl="6" marL="3200400" algn="l">
+            <a:lvl7pPr marL="3200400" lvl="6" indent="-317500" algn="l">
               <a:lnSpc>
                 <a:spcPct val="90000"/>
               </a:lnSpc>
@@ -6242,7 +6261,7 @@
               <a:buChar char="•"/>
               <a:defRPr/>
             </a:lvl7pPr>
-            <a:lvl8pPr indent="-317500" lvl="7" marL="3657600" algn="l">
+            <a:lvl8pPr marL="3657600" lvl="7" indent="-317500" algn="l">
               <a:lnSpc>
                 <a:spcPct val="90000"/>
               </a:lnSpc>
@@ -6259,7 +6278,7 @@
               <a:buChar char="•"/>
               <a:defRPr/>
             </a:lvl8pPr>
-            <a:lvl9pPr indent="-317500" lvl="8" marL="4114800" algn="l">
+            <a:lvl9pPr marL="4114800" lvl="8" indent="-317500" algn="l">
               <a:lnSpc>
                 <a:spcPct val="90000"/>
               </a:lnSpc>
@@ -6285,7 +6304,7 @@
           <p:cNvPr id="42" name="Shape 40"/>
           <p:cNvSpPr txBox="1"/>
           <p:nvPr>
-            <p:ph idx="10" type="dt"/>
+            <p:ph type="dt" idx="10"/>
           </p:nvPr>
         </p:nvSpPr>
         <p:spPr>
@@ -6302,7 +6321,7 @@
           </a:ln>
         </p:spPr>
         <p:txBody>
-          <a:bodyPr anchorCtr="0" anchor="ctr" bIns="34275" lIns="68575" spcFirstLastPara="1" rIns="68575" wrap="square" tIns="34275">
+          <a:bodyPr spcFirstLastPara="1" wrap="square" lIns="68575" tIns="34275" rIns="68575" bIns="34275" anchor="ctr" anchorCtr="0">
             <a:noAutofit/>
           </a:bodyPr>
           <a:lstStyle>
@@ -6414,7 +6433,7 @@
           <p:cNvPr id="43" name="Shape 41"/>
           <p:cNvSpPr txBox="1"/>
           <p:nvPr>
-            <p:ph idx="11" type="ftr"/>
+            <p:ph type="ftr" idx="11"/>
           </p:nvPr>
         </p:nvSpPr>
         <p:spPr>
@@ -6431,7 +6450,7 @@
           </a:ln>
         </p:spPr>
         <p:txBody>
-          <a:bodyPr anchorCtr="0" anchor="ctr" bIns="34275" lIns="68575" spcFirstLastPara="1" rIns="68575" wrap="square" tIns="34275">
+          <a:bodyPr spcFirstLastPara="1" wrap="square" lIns="68575" tIns="34275" rIns="68575" bIns="34275" anchor="ctr" anchorCtr="0">
             <a:noAutofit/>
           </a:bodyPr>
           <a:lstStyle>
@@ -6543,7 +6562,7 @@
           <p:cNvPr id="44" name="Shape 42"/>
           <p:cNvSpPr txBox="1"/>
           <p:nvPr>
-            <p:ph idx="12" type="sldNum"/>
+            <p:ph type="sldNum" idx="12"/>
           </p:nvPr>
         </p:nvSpPr>
         <p:spPr>
@@ -6560,67 +6579,67 @@
           </a:ln>
         </p:spPr>
         <p:txBody>
-          <a:bodyPr anchorCtr="0" anchor="ctr" bIns="34275" lIns="68575" spcFirstLastPara="1" rIns="68575" wrap="square" tIns="34275">
+          <a:bodyPr spcFirstLastPara="1" wrap="square" lIns="68575" tIns="34275" rIns="68575" bIns="34275" anchor="ctr" anchorCtr="0">
             <a:noAutofit/>
           </a:bodyPr>
           <a:lstStyle>
-            <a:lvl1pPr indent="0" lvl="0" marL="0" algn="r">
+            <a:lvl1pPr marL="0" lvl="0" indent="0" algn="r">
               <a:spcBef>
                 <a:spcPts val="0"/>
               </a:spcBef>
               <a:buNone/>
               <a:defRPr/>
             </a:lvl1pPr>
-            <a:lvl2pPr indent="0" lvl="1" marL="0" algn="r">
+            <a:lvl2pPr marL="0" lvl="1" indent="0" algn="r">
               <a:spcBef>
                 <a:spcPts val="0"/>
               </a:spcBef>
               <a:buNone/>
               <a:defRPr/>
             </a:lvl2pPr>
-            <a:lvl3pPr indent="0" lvl="2" marL="0" algn="r">
+            <a:lvl3pPr marL="0" lvl="2" indent="0" algn="r">
               <a:spcBef>
                 <a:spcPts val="0"/>
               </a:spcBef>
               <a:buNone/>
               <a:defRPr/>
             </a:lvl3pPr>
-            <a:lvl4pPr indent="0" lvl="3" marL="0" algn="r">
+            <a:lvl4pPr marL="0" lvl="3" indent="0" algn="r">
               <a:spcBef>
                 <a:spcPts val="0"/>
               </a:spcBef>
               <a:buNone/>
               <a:defRPr/>
             </a:lvl4pPr>
-            <a:lvl5pPr indent="0" lvl="4" marL="0" algn="r">
+            <a:lvl5pPr marL="0" lvl="4" indent="0" algn="r">
               <a:spcBef>
                 <a:spcPts val="0"/>
               </a:spcBef>
               <a:buNone/>
               <a:defRPr/>
             </a:lvl5pPr>
-            <a:lvl6pPr indent="0" lvl="5" marL="0" algn="r">
+            <a:lvl6pPr marL="0" lvl="5" indent="0" algn="r">
               <a:spcBef>
                 <a:spcPts val="0"/>
               </a:spcBef>
               <a:buNone/>
               <a:defRPr/>
             </a:lvl6pPr>
-            <a:lvl7pPr indent="0" lvl="6" marL="0" algn="r">
+            <a:lvl7pPr marL="0" lvl="6" indent="0" algn="r">
               <a:spcBef>
                 <a:spcPts val="0"/>
               </a:spcBef>
               <a:buNone/>
               <a:defRPr/>
             </a:lvl7pPr>
-            <a:lvl8pPr indent="0" lvl="7" marL="0" algn="r">
+            <a:lvl8pPr marL="0" lvl="7" indent="0" algn="r">
               <a:spcBef>
                 <a:spcPts val="0"/>
               </a:spcBef>
               <a:buNone/>
               <a:defRPr/>
             </a:lvl8pPr>
-            <a:lvl9pPr indent="0" lvl="8" marL="0" algn="r">
+            <a:lvl9pPr marL="0" lvl="8" indent="0" algn="r">
               <a:spcBef>
                 <a:spcPts val="0"/>
               </a:spcBef>
@@ -6629,7 +6648,7 @@
             </a:lvl9pPr>
           </a:lstStyle>
           <a:p>
-            <a:pPr indent="0" lvl="0" marL="0" rtl="0" algn="r">
+            <a:pPr marL="0" lvl="0" indent="0" algn="r" rtl="0">
               <a:spcBef>
                 <a:spcPts val="0"/>
               </a:spcBef>
@@ -6640,9 +6659,8 @@
             </a:pPr>
             <a:fld id="{00000000-1234-1234-1234-123412341234}" type="slidenum">
               <a:rPr lang="zh-CN"/>
-              <a:t>‹#›</a:t>
             </a:fld>
-            <a:endParaRPr/>
+            <a:endParaRPr lang="zh-CN"/>
           </a:p>
         </p:txBody>
       </p:sp>
@@ -6655,7 +6673,7 @@
 </file>
 
 <file path=ppt/slideLayouts/slideLayout6.xml><?xml version="1.0" encoding="utf-8"?>
-<p:sldLayout xmlns:a="http://schemas.openxmlformats.org/drawingml/2006/main" xmlns:r="http://schemas.openxmlformats.org/officeDocument/2006/relationships" xmlns:mc="http://schemas.openxmlformats.org/markup-compatibility/2006" xmlns:mv="urn:schemas-microsoft-com:mac:vml" xmlns:p="http://schemas.openxmlformats.org/presentationml/2006/main" xmlns:c="http://schemas.openxmlformats.org/drawingml/2006/chart" xmlns:dgm="http://schemas.openxmlformats.org/drawingml/2006/diagram" xmlns:o="urn:schemas-microsoft-com:office:office" xmlns:v="urn:schemas-microsoft-com:vml" xmlns:pvml="urn:schemas-microsoft-com:office:powerpoint" xmlns:com="http://schemas.openxmlformats.org/drawingml/2006/compatibility" xmlns:p14="http://schemas.microsoft.com/office/powerpoint/2010/main" xmlns:p15="http://schemas.microsoft.com/office/powerpoint/2012/main" xmlns:ahyp="http://schemas.microsoft.com/office/drawing/2018/hyperlinkcolor" matchingName="仅标题" type="titleOnly">
+<p:sldLayout xmlns:a="http://schemas.openxmlformats.org/drawingml/2006/main" xmlns:r="http://schemas.openxmlformats.org/officeDocument/2006/relationships" xmlns:p="http://schemas.openxmlformats.org/presentationml/2006/main" type="titleOnly" matchingName="仅标题">
   <p:cSld name="TITLE_ONLY">
     <p:spTree>
       <p:nvGrpSpPr>
@@ -6693,7 +6711,7 @@
           </a:ln>
         </p:spPr>
         <p:txBody>
-          <a:bodyPr anchorCtr="0" anchor="ctr" bIns="34275" lIns="68575" spcFirstLastPara="1" rIns="68575" wrap="square" tIns="34275">
+          <a:bodyPr spcFirstLastPara="1" wrap="square" lIns="68575" tIns="34275" rIns="68575" bIns="34275" anchor="ctr" anchorCtr="0">
             <a:normAutofit/>
           </a:bodyPr>
           <a:lstStyle>
@@ -6811,7 +6829,7 @@
           <p:cNvPr id="47" name="Shape 21"/>
           <p:cNvSpPr txBox="1"/>
           <p:nvPr>
-            <p:ph idx="10" type="dt"/>
+            <p:ph type="dt" idx="10"/>
           </p:nvPr>
         </p:nvSpPr>
         <p:spPr>
@@ -6828,7 +6846,7 @@
           </a:ln>
         </p:spPr>
         <p:txBody>
-          <a:bodyPr anchorCtr="0" anchor="ctr" bIns="34275" lIns="68575" spcFirstLastPara="1" rIns="68575" wrap="square" tIns="34275">
+          <a:bodyPr spcFirstLastPara="1" wrap="square" lIns="68575" tIns="34275" rIns="68575" bIns="34275" anchor="ctr" anchorCtr="0">
             <a:noAutofit/>
           </a:bodyPr>
           <a:lstStyle>
@@ -6940,7 +6958,7 @@
           <p:cNvPr id="48" name="Shape 22"/>
           <p:cNvSpPr txBox="1"/>
           <p:nvPr>
-            <p:ph idx="11" type="ftr"/>
+            <p:ph type="ftr" idx="11"/>
           </p:nvPr>
         </p:nvSpPr>
         <p:spPr>
@@ -6957,7 +6975,7 @@
           </a:ln>
         </p:spPr>
         <p:txBody>
-          <a:bodyPr anchorCtr="0" anchor="ctr" bIns="34275" lIns="68575" spcFirstLastPara="1" rIns="68575" wrap="square" tIns="34275">
+          <a:bodyPr spcFirstLastPara="1" wrap="square" lIns="68575" tIns="34275" rIns="68575" bIns="34275" anchor="ctr" anchorCtr="0">
             <a:noAutofit/>
           </a:bodyPr>
           <a:lstStyle>
@@ -7069,7 +7087,7 @@
           <p:cNvPr id="49" name="Shape 23"/>
           <p:cNvSpPr txBox="1"/>
           <p:nvPr>
-            <p:ph idx="12" type="sldNum"/>
+            <p:ph type="sldNum" idx="12"/>
           </p:nvPr>
         </p:nvSpPr>
         <p:spPr>
@@ -7086,67 +7104,67 @@
           </a:ln>
         </p:spPr>
         <p:txBody>
-          <a:bodyPr anchorCtr="0" anchor="ctr" bIns="34275" lIns="68575" spcFirstLastPara="1" rIns="68575" wrap="square" tIns="34275">
+          <a:bodyPr spcFirstLastPara="1" wrap="square" lIns="68575" tIns="34275" rIns="68575" bIns="34275" anchor="ctr" anchorCtr="0">
             <a:noAutofit/>
           </a:bodyPr>
           <a:lstStyle>
-            <a:lvl1pPr indent="0" lvl="0" marL="0" algn="r">
+            <a:lvl1pPr marL="0" lvl="0" indent="0" algn="r">
               <a:spcBef>
                 <a:spcPts val="0"/>
               </a:spcBef>
               <a:buNone/>
               <a:defRPr/>
             </a:lvl1pPr>
-            <a:lvl2pPr indent="0" lvl="1" marL="0" algn="r">
+            <a:lvl2pPr marL="0" lvl="1" indent="0" algn="r">
               <a:spcBef>
                 <a:spcPts val="0"/>
               </a:spcBef>
               <a:buNone/>
               <a:defRPr/>
             </a:lvl2pPr>
-            <a:lvl3pPr indent="0" lvl="2" marL="0" algn="r">
+            <a:lvl3pPr marL="0" lvl="2" indent="0" algn="r">
               <a:spcBef>
                 <a:spcPts val="0"/>
               </a:spcBef>
               <a:buNone/>
               <a:defRPr/>
             </a:lvl3pPr>
-            <a:lvl4pPr indent="0" lvl="3" marL="0" algn="r">
+            <a:lvl4pPr marL="0" lvl="3" indent="0" algn="r">
               <a:spcBef>
                 <a:spcPts val="0"/>
               </a:spcBef>
               <a:buNone/>
               <a:defRPr/>
             </a:lvl4pPr>
-            <a:lvl5pPr indent="0" lvl="4" marL="0" algn="r">
+            <a:lvl5pPr marL="0" lvl="4" indent="0" algn="r">
               <a:spcBef>
                 <a:spcPts val="0"/>
               </a:spcBef>
               <a:buNone/>
               <a:defRPr/>
             </a:lvl5pPr>
-            <a:lvl6pPr indent="0" lvl="5" marL="0" algn="r">
+            <a:lvl6pPr marL="0" lvl="5" indent="0" algn="r">
               <a:spcBef>
                 <a:spcPts val="0"/>
               </a:spcBef>
               <a:buNone/>
               <a:defRPr/>
             </a:lvl6pPr>
-            <a:lvl7pPr indent="0" lvl="6" marL="0" algn="r">
+            <a:lvl7pPr marL="0" lvl="6" indent="0" algn="r">
               <a:spcBef>
                 <a:spcPts val="0"/>
               </a:spcBef>
               <a:buNone/>
               <a:defRPr/>
             </a:lvl7pPr>
-            <a:lvl8pPr indent="0" lvl="7" marL="0" algn="r">
+            <a:lvl8pPr marL="0" lvl="7" indent="0" algn="r">
               <a:spcBef>
                 <a:spcPts val="0"/>
               </a:spcBef>
               <a:buNone/>
               <a:defRPr/>
             </a:lvl8pPr>
-            <a:lvl9pPr indent="0" lvl="8" marL="0" algn="r">
+            <a:lvl9pPr marL="0" lvl="8" indent="0" algn="r">
               <a:spcBef>
                 <a:spcPts val="0"/>
               </a:spcBef>
@@ -7155,7 +7173,7 @@
             </a:lvl9pPr>
           </a:lstStyle>
           <a:p>
-            <a:pPr indent="0" lvl="0" marL="0" rtl="0" algn="r">
+            <a:pPr marL="0" lvl="0" indent="0" algn="r" rtl="0">
               <a:spcBef>
                 <a:spcPts val="0"/>
               </a:spcBef>
@@ -7166,9 +7184,8 @@
             </a:pPr>
             <a:fld id="{00000000-1234-1234-1234-123412341234}" type="slidenum">
               <a:rPr lang="zh-CN"/>
-              <a:t>‹#›</a:t>
             </a:fld>
-            <a:endParaRPr/>
+            <a:endParaRPr lang="zh-CN"/>
           </a:p>
         </p:txBody>
       </p:sp>
@@ -7181,7 +7198,7 @@
 </file>
 
 <file path=ppt/slideLayouts/slideLayout7.xml><?xml version="1.0" encoding="utf-8"?>
-<p:sldLayout xmlns:a="http://schemas.openxmlformats.org/drawingml/2006/main" xmlns:r="http://schemas.openxmlformats.org/officeDocument/2006/relationships" xmlns:mc="http://schemas.openxmlformats.org/markup-compatibility/2006" xmlns:mv="urn:schemas-microsoft-com:mac:vml" xmlns:p="http://schemas.openxmlformats.org/presentationml/2006/main" xmlns:c="http://schemas.openxmlformats.org/drawingml/2006/chart" xmlns:dgm="http://schemas.openxmlformats.org/drawingml/2006/diagram" xmlns:o="urn:schemas-microsoft-com:office:office" xmlns:v="urn:schemas-microsoft-com:vml" xmlns:pvml="urn:schemas-microsoft-com:office:powerpoint" xmlns:com="http://schemas.openxmlformats.org/drawingml/2006/compatibility" xmlns:p14="http://schemas.microsoft.com/office/powerpoint/2010/main" xmlns:p15="http://schemas.microsoft.com/office/powerpoint/2012/main" xmlns:ahyp="http://schemas.microsoft.com/office/drawing/2018/hyperlinkcolor" matchingName="空白" type="blank">
+<p:sldLayout xmlns:a="http://schemas.openxmlformats.org/drawingml/2006/main" xmlns:r="http://schemas.openxmlformats.org/officeDocument/2006/relationships" xmlns:p="http://schemas.openxmlformats.org/presentationml/2006/main" type="blank" matchingName="空白">
   <p:cSld name="BLANK">
     <p:spTree>
       <p:nvGrpSpPr>
@@ -7202,7 +7219,7 @@
           <p:cNvPr id="51" name="Shape 6"/>
           <p:cNvSpPr txBox="1"/>
           <p:nvPr>
-            <p:ph idx="10" type="dt"/>
+            <p:ph type="dt" idx="10"/>
           </p:nvPr>
         </p:nvSpPr>
         <p:spPr>
@@ -7219,7 +7236,7 @@
           </a:ln>
         </p:spPr>
         <p:txBody>
-          <a:bodyPr anchorCtr="0" anchor="ctr" bIns="34275" lIns="68575" spcFirstLastPara="1" rIns="68575" wrap="square" tIns="34275">
+          <a:bodyPr spcFirstLastPara="1" wrap="square" lIns="68575" tIns="34275" rIns="68575" bIns="34275" anchor="ctr" anchorCtr="0">
             <a:noAutofit/>
           </a:bodyPr>
           <a:lstStyle>
@@ -7331,7 +7348,7 @@
           <p:cNvPr id="52" name="Shape 7"/>
           <p:cNvSpPr txBox="1"/>
           <p:nvPr>
-            <p:ph idx="11" type="ftr"/>
+            <p:ph type="ftr" idx="11"/>
           </p:nvPr>
         </p:nvSpPr>
         <p:spPr>
@@ -7348,7 +7365,7 @@
           </a:ln>
         </p:spPr>
         <p:txBody>
-          <a:bodyPr anchorCtr="0" anchor="ctr" bIns="34275" lIns="68575" spcFirstLastPara="1" rIns="68575" wrap="square" tIns="34275">
+          <a:bodyPr spcFirstLastPara="1" wrap="square" lIns="68575" tIns="34275" rIns="68575" bIns="34275" anchor="ctr" anchorCtr="0">
             <a:noAutofit/>
           </a:bodyPr>
           <a:lstStyle>
@@ -7460,7 +7477,7 @@
           <p:cNvPr id="53" name="Shape 8"/>
           <p:cNvSpPr txBox="1"/>
           <p:nvPr>
-            <p:ph idx="12" type="sldNum"/>
+            <p:ph type="sldNum" idx="12"/>
           </p:nvPr>
         </p:nvSpPr>
         <p:spPr>
@@ -7477,67 +7494,67 @@
           </a:ln>
         </p:spPr>
         <p:txBody>
-          <a:bodyPr anchorCtr="0" anchor="ctr" bIns="34275" lIns="68575" spcFirstLastPara="1" rIns="68575" wrap="square" tIns="34275">
+          <a:bodyPr spcFirstLastPara="1" wrap="square" lIns="68575" tIns="34275" rIns="68575" bIns="34275" anchor="ctr" anchorCtr="0">
             <a:noAutofit/>
           </a:bodyPr>
           <a:lstStyle>
-            <a:lvl1pPr indent="0" lvl="0" marL="0" algn="r">
+            <a:lvl1pPr marL="0" lvl="0" indent="0" algn="r">
               <a:spcBef>
                 <a:spcPts val="0"/>
               </a:spcBef>
               <a:buNone/>
               <a:defRPr/>
             </a:lvl1pPr>
-            <a:lvl2pPr indent="0" lvl="1" marL="0" algn="r">
+            <a:lvl2pPr marL="0" lvl="1" indent="0" algn="r">
               <a:spcBef>
                 <a:spcPts val="0"/>
               </a:spcBef>
               <a:buNone/>
               <a:defRPr/>
             </a:lvl2pPr>
-            <a:lvl3pPr indent="0" lvl="2" marL="0" algn="r">
+            <a:lvl3pPr marL="0" lvl="2" indent="0" algn="r">
               <a:spcBef>
                 <a:spcPts val="0"/>
               </a:spcBef>
               <a:buNone/>
               <a:defRPr/>
             </a:lvl3pPr>
-            <a:lvl4pPr indent="0" lvl="3" marL="0" algn="r">
+            <a:lvl4pPr marL="0" lvl="3" indent="0" algn="r">
               <a:spcBef>
                 <a:spcPts val="0"/>
               </a:spcBef>
               <a:buNone/>
               <a:defRPr/>
             </a:lvl4pPr>
-            <a:lvl5pPr indent="0" lvl="4" marL="0" algn="r">
+            <a:lvl5pPr marL="0" lvl="4" indent="0" algn="r">
               <a:spcBef>
                 <a:spcPts val="0"/>
               </a:spcBef>
               <a:buNone/>
               <a:defRPr/>
             </a:lvl5pPr>
-            <a:lvl6pPr indent="0" lvl="5" marL="0" algn="r">
+            <a:lvl6pPr marL="0" lvl="5" indent="0" algn="r">
               <a:spcBef>
                 <a:spcPts val="0"/>
               </a:spcBef>
               <a:buNone/>
               <a:defRPr/>
             </a:lvl6pPr>
-            <a:lvl7pPr indent="0" lvl="6" marL="0" algn="r">
+            <a:lvl7pPr marL="0" lvl="6" indent="0" algn="r">
               <a:spcBef>
                 <a:spcPts val="0"/>
               </a:spcBef>
               <a:buNone/>
               <a:defRPr/>
             </a:lvl7pPr>
-            <a:lvl8pPr indent="0" lvl="7" marL="0" algn="r">
+            <a:lvl8pPr marL="0" lvl="7" indent="0" algn="r">
               <a:spcBef>
                 <a:spcPts val="0"/>
               </a:spcBef>
               <a:buNone/>
               <a:defRPr/>
             </a:lvl8pPr>
-            <a:lvl9pPr indent="0" lvl="8" marL="0" algn="r">
+            <a:lvl9pPr marL="0" lvl="8" indent="0" algn="r">
               <a:spcBef>
                 <a:spcPts val="0"/>
               </a:spcBef>
@@ -7546,7 +7563,7 @@
             </a:lvl9pPr>
           </a:lstStyle>
           <a:p>
-            <a:pPr indent="0" lvl="0" marL="0" rtl="0" algn="r">
+            <a:pPr marL="0" lvl="0" indent="0" algn="r" rtl="0">
               <a:spcBef>
                 <a:spcPts val="0"/>
               </a:spcBef>
@@ -7557,9 +7574,8 @@
             </a:pPr>
             <a:fld id="{00000000-1234-1234-1234-123412341234}" type="slidenum">
               <a:rPr lang="zh-CN"/>
-              <a:t>‹#›</a:t>
             </a:fld>
-            <a:endParaRPr/>
+            <a:endParaRPr lang="zh-CN"/>
           </a:p>
         </p:txBody>
       </p:sp>
@@ -7572,7 +7588,7 @@
 </file>
 
 <file path=ppt/slideLayouts/slideLayout8.xml><?xml version="1.0" encoding="utf-8"?>
-<p:sldLayout xmlns:a="http://schemas.openxmlformats.org/drawingml/2006/main" xmlns:r="http://schemas.openxmlformats.org/officeDocument/2006/relationships" xmlns:mc="http://schemas.openxmlformats.org/markup-compatibility/2006" xmlns:mv="urn:schemas-microsoft-com:mac:vml" xmlns:p="http://schemas.openxmlformats.org/presentationml/2006/main" xmlns:c="http://schemas.openxmlformats.org/drawingml/2006/chart" xmlns:dgm="http://schemas.openxmlformats.org/drawingml/2006/diagram" xmlns:o="urn:schemas-microsoft-com:office:office" xmlns:v="urn:schemas-microsoft-com:vml" xmlns:pvml="urn:schemas-microsoft-com:office:powerpoint" xmlns:com="http://schemas.openxmlformats.org/drawingml/2006/compatibility" xmlns:p14="http://schemas.microsoft.com/office/powerpoint/2010/main" xmlns:p15="http://schemas.microsoft.com/office/powerpoint/2012/main" xmlns:ahyp="http://schemas.microsoft.com/office/drawing/2018/hyperlinkcolor" matchingName="内容与标题" type="objTx">
+<p:sldLayout xmlns:a="http://schemas.openxmlformats.org/drawingml/2006/main" xmlns:r="http://schemas.openxmlformats.org/officeDocument/2006/relationships" xmlns:p="http://schemas.openxmlformats.org/presentationml/2006/main" type="objTx" matchingName="内容与标题">
   <p:cSld name="OBJECT_WITH_CAPTION_TEXT">
     <p:spTree>
       <p:nvGrpSpPr>
@@ -7610,7 +7626,7 @@
           </a:ln>
         </p:spPr>
         <p:txBody>
-          <a:bodyPr anchorCtr="0" anchor="b" bIns="34275" lIns="68575" spcFirstLastPara="1" rIns="68575" wrap="square" tIns="34275">
+          <a:bodyPr spcFirstLastPara="1" wrap="square" lIns="68575" tIns="34275" rIns="68575" bIns="34275" anchor="b" anchorCtr="0">
             <a:normAutofit/>
           </a:bodyPr>
           <a:lstStyle>
@@ -7628,7 +7644,7 @@
                 <a:schemeClr val="dk1"/>
               </a:buClr>
               <a:buSzPts val="2400"/>
-              <a:buFont typeface="Arial"/>
+              <a:buFont typeface="Arial" panose="020B0604020202020204"/>
               <a:buNone/>
               <a:defRPr sz="2400"/>
             </a:lvl1pPr>
@@ -7729,7 +7745,7 @@
           <p:cNvPr id="56" name="Shape 44"/>
           <p:cNvSpPr txBox="1"/>
           <p:nvPr>
-            <p:ph idx="1" type="body"/>
+            <p:ph type="body" idx="1"/>
           </p:nvPr>
         </p:nvSpPr>
         <p:spPr>
@@ -7746,11 +7762,11 @@
           </a:ln>
         </p:spPr>
         <p:txBody>
-          <a:bodyPr anchorCtr="0" anchor="t" bIns="34275" lIns="68575" spcFirstLastPara="1" rIns="68575" wrap="square" tIns="34275">
+          <a:bodyPr spcFirstLastPara="1" wrap="square" lIns="68575" tIns="34275" rIns="68575" bIns="34275" anchor="t" anchorCtr="0">
             <a:normAutofit/>
           </a:bodyPr>
           <a:lstStyle>
-            <a:lvl1pPr indent="-381000" lvl="0" marL="457200" algn="l">
+            <a:lvl1pPr marL="457200" lvl="0" indent="-381000" algn="l">
               <a:lnSpc>
                 <a:spcPct val="90000"/>
               </a:lnSpc>
@@ -7767,7 +7783,7 @@
               <a:buChar char="•"/>
               <a:defRPr sz="2400"/>
             </a:lvl1pPr>
-            <a:lvl2pPr indent="-361950" lvl="1" marL="914400" algn="l">
+            <a:lvl2pPr marL="914400" lvl="1" indent="-361950" algn="l">
               <a:lnSpc>
                 <a:spcPct val="90000"/>
               </a:lnSpc>
@@ -7784,7 +7800,7 @@
               <a:buChar char="•"/>
               <a:defRPr sz="2100"/>
             </a:lvl2pPr>
-            <a:lvl3pPr indent="-342900" lvl="2" marL="1371600" algn="l">
+            <a:lvl3pPr marL="1371600" lvl="2" indent="-342900" algn="l">
               <a:lnSpc>
                 <a:spcPct val="90000"/>
               </a:lnSpc>
@@ -7801,7 +7817,7 @@
               <a:buChar char="•"/>
               <a:defRPr sz="1800"/>
             </a:lvl3pPr>
-            <a:lvl4pPr indent="-323850" lvl="3" marL="1828800" algn="l">
+            <a:lvl4pPr marL="1828800" lvl="3" indent="-323850" algn="l">
               <a:lnSpc>
                 <a:spcPct val="90000"/>
               </a:lnSpc>
@@ -7818,7 +7834,7 @@
               <a:buChar char="•"/>
               <a:defRPr sz="1500"/>
             </a:lvl4pPr>
-            <a:lvl5pPr indent="-323850" lvl="4" marL="2286000" algn="l">
+            <a:lvl5pPr marL="2286000" lvl="4" indent="-323850" algn="l">
               <a:lnSpc>
                 <a:spcPct val="90000"/>
               </a:lnSpc>
@@ -7835,7 +7851,7 @@
               <a:buChar char="•"/>
               <a:defRPr sz="1500"/>
             </a:lvl5pPr>
-            <a:lvl6pPr indent="-323850" lvl="5" marL="2743200" algn="l">
+            <a:lvl6pPr marL="2743200" lvl="5" indent="-323850" algn="l">
               <a:lnSpc>
                 <a:spcPct val="90000"/>
               </a:lnSpc>
@@ -7852,7 +7868,7 @@
               <a:buChar char="•"/>
               <a:defRPr sz="1500"/>
             </a:lvl6pPr>
-            <a:lvl7pPr indent="-323850" lvl="6" marL="3200400" algn="l">
+            <a:lvl7pPr marL="3200400" lvl="6" indent="-323850" algn="l">
               <a:lnSpc>
                 <a:spcPct val="90000"/>
               </a:lnSpc>
@@ -7869,7 +7885,7 @@
               <a:buChar char="•"/>
               <a:defRPr sz="1500"/>
             </a:lvl7pPr>
-            <a:lvl8pPr indent="-323850" lvl="7" marL="3657600" algn="l">
+            <a:lvl8pPr marL="3657600" lvl="7" indent="-323850" algn="l">
               <a:lnSpc>
                 <a:spcPct val="90000"/>
               </a:lnSpc>
@@ -7886,7 +7902,7 @@
               <a:buChar char="•"/>
               <a:defRPr sz="1500"/>
             </a:lvl8pPr>
-            <a:lvl9pPr indent="-323850" lvl="8" marL="4114800" algn="l">
+            <a:lvl9pPr marL="4114800" lvl="8" indent="-323850" algn="l">
               <a:lnSpc>
                 <a:spcPct val="90000"/>
               </a:lnSpc>
@@ -7912,7 +7928,7 @@
           <p:cNvPr id="57" name="Shape 45"/>
           <p:cNvSpPr txBox="1"/>
           <p:nvPr>
-            <p:ph idx="2" type="body"/>
+            <p:ph type="body" idx="2"/>
           </p:nvPr>
         </p:nvSpPr>
         <p:spPr>
@@ -7929,11 +7945,11 @@
           </a:ln>
         </p:spPr>
         <p:txBody>
-          <a:bodyPr anchorCtr="0" anchor="t" bIns="34275" lIns="68575" spcFirstLastPara="1" rIns="68575" wrap="square" tIns="34275">
+          <a:bodyPr spcFirstLastPara="1" wrap="square" lIns="68575" tIns="34275" rIns="68575" bIns="34275" anchor="t" anchorCtr="0">
             <a:normAutofit/>
           </a:bodyPr>
           <a:lstStyle>
-            <a:lvl1pPr indent="-228600" lvl="0" marL="457200" algn="l">
+            <a:lvl1pPr marL="457200" lvl="0" indent="-228600" algn="l">
               <a:lnSpc>
                 <a:spcPct val="90000"/>
               </a:lnSpc>
@@ -7950,7 +7966,7 @@
               <a:buNone/>
               <a:defRPr sz="1200"/>
             </a:lvl1pPr>
-            <a:lvl2pPr indent="-228600" lvl="1" marL="914400" algn="l">
+            <a:lvl2pPr marL="914400" lvl="1" indent="-228600" algn="l">
               <a:lnSpc>
                 <a:spcPct val="90000"/>
               </a:lnSpc>
@@ -7967,7 +7983,7 @@
               <a:buNone/>
               <a:defRPr sz="1100"/>
             </a:lvl2pPr>
-            <a:lvl3pPr indent="-228600" lvl="2" marL="1371600" algn="l">
+            <a:lvl3pPr marL="1371600" lvl="2" indent="-228600" algn="l">
               <a:lnSpc>
                 <a:spcPct val="90000"/>
               </a:lnSpc>
@@ -7984,7 +8000,7 @@
               <a:buNone/>
               <a:defRPr sz="900"/>
             </a:lvl3pPr>
-            <a:lvl4pPr indent="-228600" lvl="3" marL="1828800" algn="l">
+            <a:lvl4pPr marL="1828800" lvl="3" indent="-228600" algn="l">
               <a:lnSpc>
                 <a:spcPct val="90000"/>
               </a:lnSpc>
@@ -8001,7 +8017,7 @@
               <a:buNone/>
               <a:defRPr sz="800"/>
             </a:lvl4pPr>
-            <a:lvl5pPr indent="-228600" lvl="4" marL="2286000" algn="l">
+            <a:lvl5pPr marL="2286000" lvl="4" indent="-228600" algn="l">
               <a:lnSpc>
                 <a:spcPct val="90000"/>
               </a:lnSpc>
@@ -8018,7 +8034,7 @@
               <a:buNone/>
               <a:defRPr sz="800"/>
             </a:lvl5pPr>
-            <a:lvl6pPr indent="-228600" lvl="5" marL="2743200" algn="l">
+            <a:lvl6pPr marL="2743200" lvl="5" indent="-228600" algn="l">
               <a:lnSpc>
                 <a:spcPct val="90000"/>
               </a:lnSpc>
@@ -8035,7 +8051,7 @@
               <a:buNone/>
               <a:defRPr sz="800"/>
             </a:lvl6pPr>
-            <a:lvl7pPr indent="-228600" lvl="6" marL="3200400" algn="l">
+            <a:lvl7pPr marL="3200400" lvl="6" indent="-228600" algn="l">
               <a:lnSpc>
                 <a:spcPct val="90000"/>
               </a:lnSpc>
@@ -8052,7 +8068,7 @@
               <a:buNone/>
               <a:defRPr sz="800"/>
             </a:lvl7pPr>
-            <a:lvl8pPr indent="-228600" lvl="7" marL="3657600" algn="l">
+            <a:lvl8pPr marL="3657600" lvl="7" indent="-228600" algn="l">
               <a:lnSpc>
                 <a:spcPct val="90000"/>
               </a:lnSpc>
@@ -8069,7 +8085,7 @@
               <a:buNone/>
               <a:defRPr sz="800"/>
             </a:lvl8pPr>
-            <a:lvl9pPr indent="-228600" lvl="8" marL="4114800" algn="l">
+            <a:lvl9pPr marL="4114800" lvl="8" indent="-228600" algn="l">
               <a:lnSpc>
                 <a:spcPct val="90000"/>
               </a:lnSpc>
@@ -8095,7 +8111,7 @@
           <p:cNvPr id="58" name="Shape 46"/>
           <p:cNvSpPr txBox="1"/>
           <p:nvPr>
-            <p:ph idx="10" type="dt"/>
+            <p:ph type="dt" idx="10"/>
           </p:nvPr>
         </p:nvSpPr>
         <p:spPr>
@@ -8112,7 +8128,7 @@
           </a:ln>
         </p:spPr>
         <p:txBody>
-          <a:bodyPr anchorCtr="0" anchor="ctr" bIns="34275" lIns="68575" spcFirstLastPara="1" rIns="68575" wrap="square" tIns="34275">
+          <a:bodyPr spcFirstLastPara="1" wrap="square" lIns="68575" tIns="34275" rIns="68575" bIns="34275" anchor="ctr" anchorCtr="0">
             <a:noAutofit/>
           </a:bodyPr>
           <a:lstStyle>
@@ -8224,7 +8240,7 @@
           <p:cNvPr id="59" name="Shape 47"/>
           <p:cNvSpPr txBox="1"/>
           <p:nvPr>
-            <p:ph idx="11" type="ftr"/>
+            <p:ph type="ftr" idx="11"/>
           </p:nvPr>
         </p:nvSpPr>
         <p:spPr>
@@ -8241,7 +8257,7 @@
           </a:ln>
         </p:spPr>
         <p:txBody>
-          <a:bodyPr anchorCtr="0" anchor="ctr" bIns="34275" lIns="68575" spcFirstLastPara="1" rIns="68575" wrap="square" tIns="34275">
+          <a:bodyPr spcFirstLastPara="1" wrap="square" lIns="68575" tIns="34275" rIns="68575" bIns="34275" anchor="ctr" anchorCtr="0">
             <a:noAutofit/>
           </a:bodyPr>
           <a:lstStyle>
@@ -8353,7 +8369,7 @@
           <p:cNvPr id="60" name="Shape 48"/>
           <p:cNvSpPr txBox="1"/>
           <p:nvPr>
-            <p:ph idx="12" type="sldNum"/>
+            <p:ph type="sldNum" idx="12"/>
           </p:nvPr>
         </p:nvSpPr>
         <p:spPr>
@@ -8370,67 +8386,67 @@
           </a:ln>
         </p:spPr>
         <p:txBody>
-          <a:bodyPr anchorCtr="0" anchor="ctr" bIns="34275" lIns="68575" spcFirstLastPara="1" rIns="68575" wrap="square" tIns="34275">
+          <a:bodyPr spcFirstLastPara="1" wrap="square" lIns="68575" tIns="34275" rIns="68575" bIns="34275" anchor="ctr" anchorCtr="0">
             <a:noAutofit/>
           </a:bodyPr>
           <a:lstStyle>
-            <a:lvl1pPr indent="0" lvl="0" marL="0" algn="r">
+            <a:lvl1pPr marL="0" lvl="0" indent="0" algn="r">
               <a:spcBef>
                 <a:spcPts val="0"/>
               </a:spcBef>
               <a:buNone/>
               <a:defRPr/>
             </a:lvl1pPr>
-            <a:lvl2pPr indent="0" lvl="1" marL="0" algn="r">
+            <a:lvl2pPr marL="0" lvl="1" indent="0" algn="r">
               <a:spcBef>
                 <a:spcPts val="0"/>
               </a:spcBef>
               <a:buNone/>
               <a:defRPr/>
             </a:lvl2pPr>
-            <a:lvl3pPr indent="0" lvl="2" marL="0" algn="r">
+            <a:lvl3pPr marL="0" lvl="2" indent="0" algn="r">
               <a:spcBef>
                 <a:spcPts val="0"/>
               </a:spcBef>
               <a:buNone/>
               <a:defRPr/>
             </a:lvl3pPr>
-            <a:lvl4pPr indent="0" lvl="3" marL="0" algn="r">
+            <a:lvl4pPr marL="0" lvl="3" indent="0" algn="r">
               <a:spcBef>
                 <a:spcPts val="0"/>
               </a:spcBef>
               <a:buNone/>
               <a:defRPr/>
             </a:lvl4pPr>
-            <a:lvl5pPr indent="0" lvl="4" marL="0" algn="r">
+            <a:lvl5pPr marL="0" lvl="4" indent="0" algn="r">
               <a:spcBef>
                 <a:spcPts val="0"/>
               </a:spcBef>
               <a:buNone/>
               <a:defRPr/>
             </a:lvl5pPr>
-            <a:lvl6pPr indent="0" lvl="5" marL="0" algn="r">
+            <a:lvl6pPr marL="0" lvl="5" indent="0" algn="r">
               <a:spcBef>
                 <a:spcPts val="0"/>
               </a:spcBef>
               <a:buNone/>
               <a:defRPr/>
             </a:lvl6pPr>
-            <a:lvl7pPr indent="0" lvl="6" marL="0" algn="r">
+            <a:lvl7pPr marL="0" lvl="6" indent="0" algn="r">
               <a:spcBef>
                 <a:spcPts val="0"/>
               </a:spcBef>
               <a:buNone/>
               <a:defRPr/>
             </a:lvl7pPr>
-            <a:lvl8pPr indent="0" lvl="7" marL="0" algn="r">
+            <a:lvl8pPr marL="0" lvl="7" indent="0" algn="r">
               <a:spcBef>
                 <a:spcPts val="0"/>
               </a:spcBef>
               <a:buNone/>
               <a:defRPr/>
             </a:lvl8pPr>
-            <a:lvl9pPr indent="0" lvl="8" marL="0" algn="r">
+            <a:lvl9pPr marL="0" lvl="8" indent="0" algn="r">
               <a:spcBef>
                 <a:spcPts val="0"/>
               </a:spcBef>
@@ -8439,7 +8455,7 @@
             </a:lvl9pPr>
           </a:lstStyle>
           <a:p>
-            <a:pPr indent="0" lvl="0" marL="0" rtl="0" algn="r">
+            <a:pPr marL="0" lvl="0" indent="0" algn="r" rtl="0">
               <a:spcBef>
                 <a:spcPts val="0"/>
               </a:spcBef>
@@ -8450,9 +8466,8 @@
             </a:pPr>
             <a:fld id="{00000000-1234-1234-1234-123412341234}" type="slidenum">
               <a:rPr lang="zh-CN"/>
-              <a:t>‹#›</a:t>
             </a:fld>
-            <a:endParaRPr/>
+            <a:endParaRPr lang="zh-CN"/>
           </a:p>
         </p:txBody>
       </p:sp>
@@ -8465,7 +8480,7 @@
 </file>
 
 <file path=ppt/slideLayouts/slideLayout9.xml><?xml version="1.0" encoding="utf-8"?>
-<p:sldLayout xmlns:a="http://schemas.openxmlformats.org/drawingml/2006/main" xmlns:r="http://schemas.openxmlformats.org/officeDocument/2006/relationships" xmlns:mc="http://schemas.openxmlformats.org/markup-compatibility/2006" xmlns:mv="urn:schemas-microsoft-com:mac:vml" xmlns:p="http://schemas.openxmlformats.org/presentationml/2006/main" xmlns:c="http://schemas.openxmlformats.org/drawingml/2006/chart" xmlns:dgm="http://schemas.openxmlformats.org/drawingml/2006/diagram" xmlns:o="urn:schemas-microsoft-com:office:office" xmlns:v="urn:schemas-microsoft-com:vml" xmlns:pvml="urn:schemas-microsoft-com:office:powerpoint" xmlns:com="http://schemas.openxmlformats.org/drawingml/2006/compatibility" xmlns:p14="http://schemas.microsoft.com/office/powerpoint/2010/main" xmlns:p15="http://schemas.microsoft.com/office/powerpoint/2012/main" xmlns:ahyp="http://schemas.microsoft.com/office/drawing/2018/hyperlinkcolor" matchingName="图片与标题" type="picTx">
+<p:sldLayout xmlns:a="http://schemas.openxmlformats.org/drawingml/2006/main" xmlns:r="http://schemas.openxmlformats.org/officeDocument/2006/relationships" xmlns:p="http://schemas.openxmlformats.org/presentationml/2006/main" type="picTx" matchingName="图片与标题">
   <p:cSld name="PICTURE_WITH_CAPTION_TEXT">
     <p:spTree>
       <p:nvGrpSpPr>
@@ -8503,7 +8518,7 @@
           </a:ln>
         </p:spPr>
         <p:txBody>
-          <a:bodyPr anchorCtr="0" anchor="b" bIns="34275" lIns="68575" spcFirstLastPara="1" rIns="68575" wrap="square" tIns="34275">
+          <a:bodyPr spcFirstLastPara="1" wrap="square" lIns="68575" tIns="34275" rIns="68575" bIns="34275" anchor="b" anchorCtr="0">
             <a:normAutofit/>
           </a:bodyPr>
           <a:lstStyle>
@@ -8521,7 +8536,7 @@
                 <a:schemeClr val="dk1"/>
               </a:buClr>
               <a:buSzPts val="2400"/>
-              <a:buFont typeface="Arial"/>
+              <a:buFont typeface="Arial" panose="020B0604020202020204"/>
               <a:buNone/>
               <a:defRPr sz="2400"/>
             </a:lvl1pPr>
@@ -8622,7 +8637,7 @@
           <p:cNvPr id="63" name="Shape 25"/>
           <p:cNvSpPr/>
           <p:nvPr>
-            <p:ph idx="2" type="pic"/>
+            <p:ph type="pic" idx="2"/>
           </p:nvPr>
         </p:nvSpPr>
         <p:spPr>
@@ -8644,7 +8659,7 @@
           <p:cNvPr id="64" name="Shape 26"/>
           <p:cNvSpPr txBox="1"/>
           <p:nvPr>
-            <p:ph idx="1" type="body"/>
+            <p:ph type="body" idx="1"/>
           </p:nvPr>
         </p:nvSpPr>
         <p:spPr>
@@ -8661,11 +8676,11 @@
           </a:ln>
         </p:spPr>
         <p:txBody>
-          <a:bodyPr anchorCtr="0" anchor="t" bIns="34275" lIns="68575" spcFirstLastPara="1" rIns="68575" wrap="square" tIns="34275">
+          <a:bodyPr spcFirstLastPara="1" wrap="square" lIns="68575" tIns="34275" rIns="68575" bIns="34275" anchor="t" anchorCtr="0">
             <a:normAutofit/>
           </a:bodyPr>
           <a:lstStyle>
-            <a:lvl1pPr indent="-228600" lvl="0" marL="457200" algn="l">
+            <a:lvl1pPr marL="457200" lvl="0" indent="-228600" algn="l">
               <a:lnSpc>
                 <a:spcPct val="90000"/>
               </a:lnSpc>
@@ -8682,7 +8697,7 @@
               <a:buNone/>
               <a:defRPr sz="1200"/>
             </a:lvl1pPr>
-            <a:lvl2pPr indent="-228600" lvl="1" marL="914400" algn="l">
+            <a:lvl2pPr marL="914400" lvl="1" indent="-228600" algn="l">
               <a:lnSpc>
                 <a:spcPct val="90000"/>
               </a:lnSpc>
@@ -8699,7 +8714,7 @@
               <a:buNone/>
               <a:defRPr sz="1100"/>
             </a:lvl2pPr>
-            <a:lvl3pPr indent="-228600" lvl="2" marL="1371600" algn="l">
+            <a:lvl3pPr marL="1371600" lvl="2" indent="-228600" algn="l">
               <a:lnSpc>
                 <a:spcPct val="90000"/>
               </a:lnSpc>
@@ -8716,7 +8731,7 @@
               <a:buNone/>
               <a:defRPr sz="900"/>
             </a:lvl3pPr>
-            <a:lvl4pPr indent="-228600" lvl="3" marL="1828800" algn="l">
+            <a:lvl4pPr marL="1828800" lvl="3" indent="-228600" algn="l">
               <a:lnSpc>
                 <a:spcPct val="90000"/>
               </a:lnSpc>
@@ -8733,7 +8748,7 @@
               <a:buNone/>
               <a:defRPr sz="800"/>
             </a:lvl4pPr>
-            <a:lvl5pPr indent="-228600" lvl="4" marL="2286000" algn="l">
+            <a:lvl5pPr marL="2286000" lvl="4" indent="-228600" algn="l">
               <a:lnSpc>
                 <a:spcPct val="90000"/>
               </a:lnSpc>
@@ -8750,7 +8765,7 @@
               <a:buNone/>
               <a:defRPr sz="800"/>
             </a:lvl5pPr>
-            <a:lvl6pPr indent="-228600" lvl="5" marL="2743200" algn="l">
+            <a:lvl6pPr marL="2743200" lvl="5" indent="-228600" algn="l">
               <a:lnSpc>
                 <a:spcPct val="90000"/>
               </a:lnSpc>
@@ -8767,7 +8782,7 @@
               <a:buNone/>
               <a:defRPr sz="800"/>
             </a:lvl6pPr>
-            <a:lvl7pPr indent="-228600" lvl="6" marL="3200400" algn="l">
+            <a:lvl7pPr marL="3200400" lvl="6" indent="-228600" algn="l">
               <a:lnSpc>
                 <a:spcPct val="90000"/>
               </a:lnSpc>
@@ -8784,7 +8799,7 @@
               <a:buNone/>
               <a:defRPr sz="800"/>
             </a:lvl7pPr>
-            <a:lvl8pPr indent="-228600" lvl="7" marL="3657600" algn="l">
+            <a:lvl8pPr marL="3657600" lvl="7" indent="-228600" algn="l">
               <a:lnSpc>
                 <a:spcPct val="90000"/>
               </a:lnSpc>
@@ -8801,7 +8816,7 @@
               <a:buNone/>
               <a:defRPr sz="800"/>
             </a:lvl8pPr>
-            <a:lvl9pPr indent="-228600" lvl="8" marL="4114800" algn="l">
+            <a:lvl9pPr marL="4114800" lvl="8" indent="-228600" algn="l">
               <a:lnSpc>
                 <a:spcPct val="90000"/>
               </a:lnSpc>
@@ -8827,7 +8842,7 @@
           <p:cNvPr id="65" name="Shape 27"/>
           <p:cNvSpPr txBox="1"/>
           <p:nvPr>
-            <p:ph idx="10" type="dt"/>
+            <p:ph type="dt" idx="10"/>
           </p:nvPr>
         </p:nvSpPr>
         <p:spPr>
@@ -8844,7 +8859,7 @@
           </a:ln>
         </p:spPr>
         <p:txBody>
-          <a:bodyPr anchorCtr="0" anchor="ctr" bIns="34275" lIns="68575" spcFirstLastPara="1" rIns="68575" wrap="square" tIns="34275">
+          <a:bodyPr spcFirstLastPara="1" wrap="square" lIns="68575" tIns="34275" rIns="68575" bIns="34275" anchor="ctr" anchorCtr="0">
             <a:noAutofit/>
           </a:bodyPr>
           <a:lstStyle>
@@ -8956,7 +8971,7 @@
           <p:cNvPr id="66" name="Shape 28"/>
           <p:cNvSpPr txBox="1"/>
           <p:nvPr>
-            <p:ph idx="11" type="ftr"/>
+            <p:ph type="ftr" idx="11"/>
           </p:nvPr>
         </p:nvSpPr>
         <p:spPr>
@@ -8973,7 +8988,7 @@
           </a:ln>
         </p:spPr>
         <p:txBody>
-          <a:bodyPr anchorCtr="0" anchor="ctr" bIns="34275" lIns="68575" spcFirstLastPara="1" rIns="68575" wrap="square" tIns="34275">
+          <a:bodyPr spcFirstLastPara="1" wrap="square" lIns="68575" tIns="34275" rIns="68575" bIns="34275" anchor="ctr" anchorCtr="0">
             <a:noAutofit/>
           </a:bodyPr>
           <a:lstStyle>
@@ -9085,7 +9100,7 @@
           <p:cNvPr id="67" name="Shape 29"/>
           <p:cNvSpPr txBox="1"/>
           <p:nvPr>
-            <p:ph idx="12" type="sldNum"/>
+            <p:ph type="sldNum" idx="12"/>
           </p:nvPr>
         </p:nvSpPr>
         <p:spPr>
@@ -9102,67 +9117,67 @@
           </a:ln>
         </p:spPr>
         <p:txBody>
-          <a:bodyPr anchorCtr="0" anchor="ctr" bIns="34275" lIns="68575" spcFirstLastPara="1" rIns="68575" wrap="square" tIns="34275">
+          <a:bodyPr spcFirstLastPara="1" wrap="square" lIns="68575" tIns="34275" rIns="68575" bIns="34275" anchor="ctr" anchorCtr="0">
             <a:noAutofit/>
           </a:bodyPr>
           <a:lstStyle>
-            <a:lvl1pPr indent="0" lvl="0" marL="0" algn="r">
+            <a:lvl1pPr marL="0" lvl="0" indent="0" algn="r">
               <a:spcBef>
                 <a:spcPts val="0"/>
               </a:spcBef>
               <a:buNone/>
               <a:defRPr/>
             </a:lvl1pPr>
-            <a:lvl2pPr indent="0" lvl="1" marL="0" algn="r">
+            <a:lvl2pPr marL="0" lvl="1" indent="0" algn="r">
               <a:spcBef>
                 <a:spcPts val="0"/>
               </a:spcBef>
               <a:buNone/>
               <a:defRPr/>
             </a:lvl2pPr>
-            <a:lvl3pPr indent="0" lvl="2" marL="0" algn="r">
+            <a:lvl3pPr marL="0" lvl="2" indent="0" algn="r">
               <a:spcBef>
                 <a:spcPts val="0"/>
               </a:spcBef>
               <a:buNone/>
               <a:defRPr/>
             </a:lvl3pPr>
-            <a:lvl4pPr indent="0" lvl="3" marL="0" algn="r">
+            <a:lvl4pPr marL="0" lvl="3" indent="0" algn="r">
               <a:spcBef>
                 <a:spcPts val="0"/>
               </a:spcBef>
               <a:buNone/>
               <a:defRPr/>
             </a:lvl4pPr>
-            <a:lvl5pPr indent="0" lvl="4" marL="0" algn="r">
+            <a:lvl5pPr marL="0" lvl="4" indent="0" algn="r">
               <a:spcBef>
                 <a:spcPts val="0"/>
               </a:spcBef>
               <a:buNone/>
               <a:defRPr/>
             </a:lvl5pPr>
-            <a:lvl6pPr indent="0" lvl="5" marL="0" algn="r">
+            <a:lvl6pPr marL="0" lvl="5" indent="0" algn="r">
               <a:spcBef>
                 <a:spcPts val="0"/>
               </a:spcBef>
               <a:buNone/>
               <a:defRPr/>
             </a:lvl6pPr>
-            <a:lvl7pPr indent="0" lvl="6" marL="0" algn="r">
+            <a:lvl7pPr marL="0" lvl="6" indent="0" algn="r">
               <a:spcBef>
                 <a:spcPts val="0"/>
               </a:spcBef>
               <a:buNone/>
               <a:defRPr/>
             </a:lvl7pPr>
-            <a:lvl8pPr indent="0" lvl="7" marL="0" algn="r">
+            <a:lvl8pPr marL="0" lvl="7" indent="0" algn="r">
               <a:spcBef>
                 <a:spcPts val="0"/>
               </a:spcBef>
               <a:buNone/>
               <a:defRPr/>
             </a:lvl8pPr>
-            <a:lvl9pPr indent="0" lvl="8" marL="0" algn="r">
+            <a:lvl9pPr marL="0" lvl="8" indent="0" algn="r">
               <a:spcBef>
                 <a:spcPts val="0"/>
               </a:spcBef>
@@ -9171,7 +9186,7 @@
             </a:lvl9pPr>
           </a:lstStyle>
           <a:p>
-            <a:pPr indent="0" lvl="0" marL="0" rtl="0" algn="r">
+            <a:pPr marL="0" lvl="0" indent="0" algn="r" rtl="0">
               <a:spcBef>
                 <a:spcPts val="0"/>
               </a:spcBef>
@@ -9182,9 +9197,8 @@
             </a:pPr>
             <a:fld id="{00000000-1234-1234-1234-123412341234}" type="slidenum">
               <a:rPr lang="zh-CN"/>
-              <a:t>‹#›</a:t>
             </a:fld>
-            <a:endParaRPr/>
+            <a:endParaRPr lang="zh-CN"/>
           </a:p>
         </p:txBody>
       </p:sp>
@@ -9197,13 +9211,14 @@
 </file>
 
 <file path=ppt/slideMasters/slideMaster1.xml><?xml version="1.0" encoding="utf-8"?>
-<p:sldMaster xmlns:a="http://schemas.openxmlformats.org/drawingml/2006/main" xmlns:r="http://schemas.openxmlformats.org/officeDocument/2006/relationships" xmlns:mc="http://schemas.openxmlformats.org/markup-compatibility/2006" xmlns:mv="urn:schemas-microsoft-com:mac:vml" xmlns:p="http://schemas.openxmlformats.org/presentationml/2006/main" xmlns:c="http://schemas.openxmlformats.org/drawingml/2006/chart" xmlns:dgm="http://schemas.openxmlformats.org/drawingml/2006/diagram" xmlns:o="urn:schemas-microsoft-com:office:office" xmlns:v="urn:schemas-microsoft-com:vml" xmlns:pvml="urn:schemas-microsoft-com:office:powerpoint" xmlns:com="http://schemas.openxmlformats.org/drawingml/2006/compatibility" xmlns:p14="http://schemas.microsoft.com/office/powerpoint/2010/main" xmlns:p15="http://schemas.microsoft.com/office/powerpoint/2012/main" xmlns:ahyp="http://schemas.microsoft.com/office/drawing/2018/hyperlinkcolor">
+<p:sldMaster xmlns:a="http://schemas.openxmlformats.org/drawingml/2006/main" xmlns:r="http://schemas.openxmlformats.org/officeDocument/2006/relationships" xmlns:p="http://schemas.openxmlformats.org/presentationml/2006/main">
   <p:cSld>
     <p:bg>
       <p:bgPr>
         <a:solidFill>
           <a:schemeClr val="lt1"/>
         </a:solidFill>
+        <a:effectLst/>
       </p:bgPr>
     </p:bg>
     <p:spTree>
@@ -9242,11 +9257,11 @@
           </a:ln>
         </p:spPr>
         <p:txBody>
-          <a:bodyPr anchorCtr="0" anchor="ctr" bIns="34275" lIns="68575" spcFirstLastPara="1" rIns="68575" wrap="square" tIns="34275">
+          <a:bodyPr spcFirstLastPara="1" wrap="square" lIns="68575" tIns="34275" rIns="68575" bIns="34275" anchor="ctr" anchorCtr="0">
             <a:normAutofit/>
           </a:bodyPr>
           <a:lstStyle>
-            <a:lvl1pPr lvl="0" marR="0" rtl="0" algn="l">
+            <a:lvl1pPr marR="0" lvl="0" algn="l" rtl="0">
               <a:lnSpc>
                 <a:spcPct val="90000"/>
               </a:lnSpc>
@@ -9260,16 +9275,16 @@
                 <a:schemeClr val="dk1"/>
               </a:buClr>
               <a:buSzPts val="3300"/>
-              <a:buFont typeface="Arial"/>
-              <a:buNone/>
-              <a:defRPr b="0" i="0" sz="3300" u="none" cap="none" strike="noStrike">
+              <a:buFont typeface="Arial" panose="020B0604020202020204"/>
+              <a:buNone/>
+              <a:defRPr sz="3300" b="0" i="0" u="none" strike="noStrike" cap="none">
                 <a:solidFill>
                   <a:schemeClr val="dk1"/>
                 </a:solidFill>
-                <a:latin typeface="Arial"/>
-                <a:ea typeface="Arial"/>
-                <a:cs typeface="Arial"/>
-                <a:sym typeface="Arial"/>
+                <a:latin typeface="Arial" panose="020B0604020202020204"/>
+                <a:ea typeface="Arial" panose="020B0604020202020204"/>
+                <a:cs typeface="Arial" panose="020B0604020202020204"/>
+                <a:sym typeface="Arial" panose="020B0604020202020204"/>
               </a:defRPr>
             </a:lvl1pPr>
             <a:lvl2pPr lvl="1">
@@ -9369,7 +9384,7 @@
           <p:cNvPr id="7" name="Shape 2"/>
           <p:cNvSpPr txBox="1"/>
           <p:nvPr>
-            <p:ph idx="1" type="body"/>
+            <p:ph type="body" idx="1"/>
           </p:nvPr>
         </p:nvSpPr>
         <p:spPr>
@@ -9386,11 +9401,11 @@
           </a:ln>
         </p:spPr>
         <p:txBody>
-          <a:bodyPr anchorCtr="0" anchor="t" bIns="34275" lIns="68575" spcFirstLastPara="1" rIns="68575" wrap="square" tIns="34275">
+          <a:bodyPr spcFirstLastPara="1" wrap="square" lIns="68575" tIns="34275" rIns="68575" bIns="34275" anchor="t" anchorCtr="0">
             <a:normAutofit/>
           </a:bodyPr>
           <a:lstStyle>
-            <a:lvl1pPr indent="-361950" lvl="0" marL="457200" marR="0" rtl="0" algn="l">
+            <a:lvl1pPr marL="457200" marR="0" lvl="0" indent="-361950" algn="l" rtl="0">
               <a:lnSpc>
                 <a:spcPct val="90000"/>
               </a:lnSpc>
@@ -9404,19 +9419,19 @@
                 <a:schemeClr val="dk1"/>
               </a:buClr>
               <a:buSzPts val="2100"/>
-              <a:buFont typeface="Arial"/>
+              <a:buFont typeface="Arial" panose="020B0604020202020204"/>
               <a:buChar char="•"/>
-              <a:defRPr b="0" i="0" sz="2100" u="none" cap="none" strike="noStrike">
+              <a:defRPr sz="2100" b="0" i="0" u="none" strike="noStrike" cap="none">
                 <a:solidFill>
                   <a:schemeClr val="dk1"/>
                 </a:solidFill>
-                <a:latin typeface="Arial"/>
-                <a:ea typeface="Arial"/>
-                <a:cs typeface="Arial"/>
-                <a:sym typeface="Arial"/>
+                <a:latin typeface="Arial" panose="020B0604020202020204"/>
+                <a:ea typeface="Arial" panose="020B0604020202020204"/>
+                <a:cs typeface="Arial" panose="020B0604020202020204"/>
+                <a:sym typeface="Arial" panose="020B0604020202020204"/>
               </a:defRPr>
             </a:lvl1pPr>
-            <a:lvl2pPr indent="-342900" lvl="1" marL="914400" marR="0" rtl="0" algn="l">
+            <a:lvl2pPr marL="914400" marR="0" lvl="1" indent="-342900" algn="l" rtl="0">
               <a:lnSpc>
                 <a:spcPct val="90000"/>
               </a:lnSpc>
@@ -9430,19 +9445,19 @@
                 <a:schemeClr val="dk1"/>
               </a:buClr>
               <a:buSzPts val="1800"/>
-              <a:buFont typeface="Arial"/>
+              <a:buFont typeface="Arial" panose="020B0604020202020204"/>
               <a:buChar char="•"/>
-              <a:defRPr b="0" i="0" sz="1800" u="none" cap="none" strike="noStrike">
+              <a:defRPr sz="1800" b="0" i="0" u="none" strike="noStrike" cap="none">
                 <a:solidFill>
                   <a:schemeClr val="dk1"/>
                 </a:solidFill>
-                <a:latin typeface="Arial"/>
-                <a:ea typeface="Arial"/>
-                <a:cs typeface="Arial"/>
-                <a:sym typeface="Arial"/>
+                <a:latin typeface="Arial" panose="020B0604020202020204"/>
+                <a:ea typeface="Arial" panose="020B0604020202020204"/>
+                <a:cs typeface="Arial" panose="020B0604020202020204"/>
+                <a:sym typeface="Arial" panose="020B0604020202020204"/>
               </a:defRPr>
             </a:lvl2pPr>
-            <a:lvl3pPr indent="-323850" lvl="2" marL="1371600" marR="0" rtl="0" algn="l">
+            <a:lvl3pPr marL="1371600" marR="0" lvl="2" indent="-323850" algn="l" rtl="0">
               <a:lnSpc>
                 <a:spcPct val="90000"/>
               </a:lnSpc>
@@ -9456,19 +9471,19 @@
                 <a:schemeClr val="dk1"/>
               </a:buClr>
               <a:buSzPts val="1500"/>
-              <a:buFont typeface="Arial"/>
+              <a:buFont typeface="Arial" panose="020B0604020202020204"/>
               <a:buChar char="•"/>
-              <a:defRPr b="0" i="0" sz="1500" u="none" cap="none" strike="noStrike">
+              <a:defRPr sz="1500" b="0" i="0" u="none" strike="noStrike" cap="none">
                 <a:solidFill>
                   <a:schemeClr val="dk1"/>
                 </a:solidFill>
-                <a:latin typeface="Arial"/>
-                <a:ea typeface="Arial"/>
-                <a:cs typeface="Arial"/>
-                <a:sym typeface="Arial"/>
+                <a:latin typeface="Arial" panose="020B0604020202020204"/>
+                <a:ea typeface="Arial" panose="020B0604020202020204"/>
+                <a:cs typeface="Arial" panose="020B0604020202020204"/>
+                <a:sym typeface="Arial" panose="020B0604020202020204"/>
               </a:defRPr>
             </a:lvl3pPr>
-            <a:lvl4pPr indent="-317500" lvl="3" marL="1828800" marR="0" rtl="0" algn="l">
+            <a:lvl4pPr marL="1828800" marR="0" lvl="3" indent="-317500" algn="l" rtl="0">
               <a:lnSpc>
                 <a:spcPct val="90000"/>
               </a:lnSpc>
@@ -9482,19 +9497,19 @@
                 <a:schemeClr val="dk1"/>
               </a:buClr>
               <a:buSzPts val="1400"/>
-              <a:buFont typeface="Arial"/>
+              <a:buFont typeface="Arial" panose="020B0604020202020204"/>
               <a:buChar char="•"/>
-              <a:defRPr b="0" i="0" sz="1400" u="none" cap="none" strike="noStrike">
+              <a:defRPr sz="1400" b="0" i="0" u="none" strike="noStrike" cap="none">
                 <a:solidFill>
                   <a:schemeClr val="dk1"/>
                 </a:solidFill>
-                <a:latin typeface="Arial"/>
-                <a:ea typeface="Arial"/>
-                <a:cs typeface="Arial"/>
-                <a:sym typeface="Arial"/>
+                <a:latin typeface="Arial" panose="020B0604020202020204"/>
+                <a:ea typeface="Arial" panose="020B0604020202020204"/>
+                <a:cs typeface="Arial" panose="020B0604020202020204"/>
+                <a:sym typeface="Arial" panose="020B0604020202020204"/>
               </a:defRPr>
             </a:lvl4pPr>
-            <a:lvl5pPr indent="-317500" lvl="4" marL="2286000" marR="0" rtl="0" algn="l">
+            <a:lvl5pPr marL="2286000" marR="0" lvl="4" indent="-317500" algn="l" rtl="0">
               <a:lnSpc>
                 <a:spcPct val="90000"/>
               </a:lnSpc>
@@ -9508,19 +9523,19 @@
                 <a:schemeClr val="dk1"/>
               </a:buClr>
               <a:buSzPts val="1400"/>
-              <a:buFont typeface="Arial"/>
+              <a:buFont typeface="Arial" panose="020B0604020202020204"/>
               <a:buChar char="•"/>
-              <a:defRPr b="0" i="0" sz="1400" u="none" cap="none" strike="noStrike">
+              <a:defRPr sz="1400" b="0" i="0" u="none" strike="noStrike" cap="none">
                 <a:solidFill>
                   <a:schemeClr val="dk1"/>
                 </a:solidFill>
-                <a:latin typeface="Arial"/>
-                <a:ea typeface="Arial"/>
-                <a:cs typeface="Arial"/>
-                <a:sym typeface="Arial"/>
+                <a:latin typeface="Arial" panose="020B0604020202020204"/>
+                <a:ea typeface="Arial" panose="020B0604020202020204"/>
+                <a:cs typeface="Arial" panose="020B0604020202020204"/>
+                <a:sym typeface="Arial" panose="020B0604020202020204"/>
               </a:defRPr>
             </a:lvl5pPr>
-            <a:lvl6pPr indent="-317500" lvl="5" marL="2743200" marR="0" rtl="0" algn="l">
+            <a:lvl6pPr marL="2743200" marR="0" lvl="5" indent="-317500" algn="l" rtl="0">
               <a:lnSpc>
                 <a:spcPct val="90000"/>
               </a:lnSpc>
@@ -9534,19 +9549,19 @@
                 <a:schemeClr val="dk1"/>
               </a:buClr>
               <a:buSzPts val="1400"/>
-              <a:buFont typeface="Arial"/>
+              <a:buFont typeface="Arial" panose="020B0604020202020204"/>
               <a:buChar char="•"/>
-              <a:defRPr b="0" i="0" sz="1400" u="none" cap="none" strike="noStrike">
+              <a:defRPr sz="1400" b="0" i="0" u="none" strike="noStrike" cap="none">
                 <a:solidFill>
                   <a:schemeClr val="dk1"/>
                 </a:solidFill>
-                <a:latin typeface="Arial"/>
-                <a:ea typeface="Arial"/>
-                <a:cs typeface="Arial"/>
-                <a:sym typeface="Arial"/>
+                <a:latin typeface="Arial" panose="020B0604020202020204"/>
+                <a:ea typeface="Arial" panose="020B0604020202020204"/>
+                <a:cs typeface="Arial" panose="020B0604020202020204"/>
+                <a:sym typeface="Arial" panose="020B0604020202020204"/>
               </a:defRPr>
             </a:lvl6pPr>
-            <a:lvl7pPr indent="-317500" lvl="6" marL="3200400" marR="0" rtl="0" algn="l">
+            <a:lvl7pPr marL="3200400" marR="0" lvl="6" indent="-317500" algn="l" rtl="0">
               <a:lnSpc>
                 <a:spcPct val="90000"/>
               </a:lnSpc>
@@ -9560,19 +9575,19 @@
                 <a:schemeClr val="dk1"/>
               </a:buClr>
               <a:buSzPts val="1400"/>
-              <a:buFont typeface="Arial"/>
+              <a:buFont typeface="Arial" panose="020B0604020202020204"/>
               <a:buChar char="•"/>
-              <a:defRPr b="0" i="0" sz="1400" u="none" cap="none" strike="noStrike">
+              <a:defRPr sz="1400" b="0" i="0" u="none" strike="noStrike" cap="none">
                 <a:solidFill>
                   <a:schemeClr val="dk1"/>
                 </a:solidFill>
-                <a:latin typeface="Arial"/>
-                <a:ea typeface="Arial"/>
-                <a:cs typeface="Arial"/>
-                <a:sym typeface="Arial"/>
+                <a:latin typeface="Arial" panose="020B0604020202020204"/>
+                <a:ea typeface="Arial" panose="020B0604020202020204"/>
+                <a:cs typeface="Arial" panose="020B0604020202020204"/>
+                <a:sym typeface="Arial" panose="020B0604020202020204"/>
               </a:defRPr>
             </a:lvl7pPr>
-            <a:lvl8pPr indent="-317500" lvl="7" marL="3657600" marR="0" rtl="0" algn="l">
+            <a:lvl8pPr marL="3657600" marR="0" lvl="7" indent="-317500" algn="l" rtl="0">
               <a:lnSpc>
                 <a:spcPct val="90000"/>
               </a:lnSpc>
@@ -9586,19 +9601,19 @@
                 <a:schemeClr val="dk1"/>
               </a:buClr>
               <a:buSzPts val="1400"/>
-              <a:buFont typeface="Arial"/>
+              <a:buFont typeface="Arial" panose="020B0604020202020204"/>
               <a:buChar char="•"/>
-              <a:defRPr b="0" i="0" sz="1400" u="none" cap="none" strike="noStrike">
+              <a:defRPr sz="1400" b="0" i="0" u="none" strike="noStrike" cap="none">
                 <a:solidFill>
                   <a:schemeClr val="dk1"/>
                 </a:solidFill>
-                <a:latin typeface="Arial"/>
-                <a:ea typeface="Arial"/>
-                <a:cs typeface="Arial"/>
-                <a:sym typeface="Arial"/>
+                <a:latin typeface="Arial" panose="020B0604020202020204"/>
+                <a:ea typeface="Arial" panose="020B0604020202020204"/>
+                <a:cs typeface="Arial" panose="020B0604020202020204"/>
+                <a:sym typeface="Arial" panose="020B0604020202020204"/>
               </a:defRPr>
             </a:lvl8pPr>
-            <a:lvl9pPr indent="-317500" lvl="8" marL="4114800" marR="0" rtl="0" algn="l">
+            <a:lvl9pPr marL="4114800" marR="0" lvl="8" indent="-317500" algn="l" rtl="0">
               <a:lnSpc>
                 <a:spcPct val="90000"/>
               </a:lnSpc>
@@ -9612,16 +9627,16 @@
                 <a:schemeClr val="dk1"/>
               </a:buClr>
               <a:buSzPts val="1400"/>
-              <a:buFont typeface="Arial"/>
+              <a:buFont typeface="Arial" panose="020B0604020202020204"/>
               <a:buChar char="•"/>
-              <a:defRPr b="0" i="0" sz="1400" u="none" cap="none" strike="noStrike">
+              <a:defRPr sz="1400" b="0" i="0" u="none" strike="noStrike" cap="none">
                 <a:solidFill>
                   <a:schemeClr val="dk1"/>
                 </a:solidFill>
-                <a:latin typeface="Arial"/>
-                <a:ea typeface="Arial"/>
-                <a:cs typeface="Arial"/>
-                <a:sym typeface="Arial"/>
+                <a:latin typeface="Arial" panose="020B0604020202020204"/>
+                <a:ea typeface="Arial" panose="020B0604020202020204"/>
+                <a:cs typeface="Arial" panose="020B0604020202020204"/>
+                <a:sym typeface="Arial" panose="020B0604020202020204"/>
               </a:defRPr>
             </a:lvl9pPr>
           </a:lstStyle>
@@ -9633,7 +9648,7 @@
           <p:cNvPr id="8" name="Shape 3"/>
           <p:cNvSpPr txBox="1"/>
           <p:nvPr>
-            <p:ph idx="10" type="dt"/>
+            <p:ph type="dt" idx="10"/>
           </p:nvPr>
         </p:nvSpPr>
         <p:spPr>
@@ -9650,179 +9665,179 @@
           </a:ln>
         </p:spPr>
         <p:txBody>
-          <a:bodyPr anchorCtr="0" anchor="ctr" bIns="34275" lIns="68575" spcFirstLastPara="1" rIns="68575" wrap="square" tIns="34275">
+          <a:bodyPr spcFirstLastPara="1" wrap="square" lIns="68575" tIns="34275" rIns="68575" bIns="34275" anchor="ctr" anchorCtr="0">
             <a:noAutofit/>
           </a:bodyPr>
           <a:lstStyle>
-            <a:lvl1pPr lvl="0" marR="0" rtl="0" algn="l">
-              <a:spcBef>
-                <a:spcPts val="0"/>
-              </a:spcBef>
-              <a:spcAft>
-                <a:spcPts val="0"/>
-              </a:spcAft>
-              <a:buSzPts val="1100"/>
-              <a:buNone/>
-              <a:defRPr b="0" i="0" sz="900" u="none" cap="none" strike="noStrike">
+            <a:lvl1pPr marR="0" lvl="0" algn="l" rtl="0">
+              <a:spcBef>
+                <a:spcPts val="0"/>
+              </a:spcBef>
+              <a:spcAft>
+                <a:spcPts val="0"/>
+              </a:spcAft>
+              <a:buSzPts val="1100"/>
+              <a:buNone/>
+              <a:defRPr sz="900" b="0" i="0" u="none" strike="noStrike" cap="none">
                 <a:solidFill>
                   <a:srgbClr val="888888"/>
                 </a:solidFill>
-                <a:latin typeface="Arial"/>
-                <a:ea typeface="Arial"/>
-                <a:cs typeface="Arial"/>
-                <a:sym typeface="Arial"/>
+                <a:latin typeface="Arial" panose="020B0604020202020204"/>
+                <a:ea typeface="Arial" panose="020B0604020202020204"/>
+                <a:cs typeface="Arial" panose="020B0604020202020204"/>
+                <a:sym typeface="Arial" panose="020B0604020202020204"/>
               </a:defRPr>
             </a:lvl1pPr>
-            <a:lvl2pPr lvl="1" marR="0" rtl="0" algn="l">
-              <a:spcBef>
-                <a:spcPts val="0"/>
-              </a:spcBef>
-              <a:spcAft>
-                <a:spcPts val="0"/>
-              </a:spcAft>
-              <a:buSzPts val="1100"/>
-              <a:buNone/>
-              <a:defRPr b="0" i="0" sz="1400" u="none" cap="none" strike="noStrike">
+            <a:lvl2pPr marR="0" lvl="1" algn="l" rtl="0">
+              <a:spcBef>
+                <a:spcPts val="0"/>
+              </a:spcBef>
+              <a:spcAft>
+                <a:spcPts val="0"/>
+              </a:spcAft>
+              <a:buSzPts val="1100"/>
+              <a:buNone/>
+              <a:defRPr sz="1400" b="0" i="0" u="none" strike="noStrike" cap="none">
                 <a:solidFill>
                   <a:schemeClr val="dk1"/>
                 </a:solidFill>
-                <a:latin typeface="Arial"/>
-                <a:ea typeface="Arial"/>
-                <a:cs typeface="Arial"/>
-                <a:sym typeface="Arial"/>
+                <a:latin typeface="Arial" panose="020B0604020202020204"/>
+                <a:ea typeface="Arial" panose="020B0604020202020204"/>
+                <a:cs typeface="Arial" panose="020B0604020202020204"/>
+                <a:sym typeface="Arial" panose="020B0604020202020204"/>
               </a:defRPr>
             </a:lvl2pPr>
-            <a:lvl3pPr lvl="2" marR="0" rtl="0" algn="l">
-              <a:spcBef>
-                <a:spcPts val="0"/>
-              </a:spcBef>
-              <a:spcAft>
-                <a:spcPts val="0"/>
-              </a:spcAft>
-              <a:buSzPts val="1100"/>
-              <a:buNone/>
-              <a:defRPr b="0" i="0" sz="1400" u="none" cap="none" strike="noStrike">
+            <a:lvl3pPr marR="0" lvl="2" algn="l" rtl="0">
+              <a:spcBef>
+                <a:spcPts val="0"/>
+              </a:spcBef>
+              <a:spcAft>
+                <a:spcPts val="0"/>
+              </a:spcAft>
+              <a:buSzPts val="1100"/>
+              <a:buNone/>
+              <a:defRPr sz="1400" b="0" i="0" u="none" strike="noStrike" cap="none">
                 <a:solidFill>
                   <a:schemeClr val="dk1"/>
                 </a:solidFill>
-                <a:latin typeface="Arial"/>
-                <a:ea typeface="Arial"/>
-                <a:cs typeface="Arial"/>
-                <a:sym typeface="Arial"/>
+                <a:latin typeface="Arial" panose="020B0604020202020204"/>
+                <a:ea typeface="Arial" panose="020B0604020202020204"/>
+                <a:cs typeface="Arial" panose="020B0604020202020204"/>
+                <a:sym typeface="Arial" panose="020B0604020202020204"/>
               </a:defRPr>
             </a:lvl3pPr>
-            <a:lvl4pPr lvl="3" marR="0" rtl="0" algn="l">
-              <a:spcBef>
-                <a:spcPts val="0"/>
-              </a:spcBef>
-              <a:spcAft>
-                <a:spcPts val="0"/>
-              </a:spcAft>
-              <a:buSzPts val="1100"/>
-              <a:buNone/>
-              <a:defRPr b="0" i="0" sz="1400" u="none" cap="none" strike="noStrike">
+            <a:lvl4pPr marR="0" lvl="3" algn="l" rtl="0">
+              <a:spcBef>
+                <a:spcPts val="0"/>
+              </a:spcBef>
+              <a:spcAft>
+                <a:spcPts val="0"/>
+              </a:spcAft>
+              <a:buSzPts val="1100"/>
+              <a:buNone/>
+              <a:defRPr sz="1400" b="0" i="0" u="none" strike="noStrike" cap="none">
                 <a:solidFill>
                   <a:schemeClr val="dk1"/>
                 </a:solidFill>
-                <a:latin typeface="Arial"/>
-                <a:ea typeface="Arial"/>
-                <a:cs typeface="Arial"/>
-                <a:sym typeface="Arial"/>
+                <a:latin typeface="Arial" panose="020B0604020202020204"/>
+                <a:ea typeface="Arial" panose="020B0604020202020204"/>
+                <a:cs typeface="Arial" panose="020B0604020202020204"/>
+                <a:sym typeface="Arial" panose="020B0604020202020204"/>
               </a:defRPr>
             </a:lvl4pPr>
-            <a:lvl5pPr lvl="4" marR="0" rtl="0" algn="l">
-              <a:spcBef>
-                <a:spcPts val="0"/>
-              </a:spcBef>
-              <a:spcAft>
-                <a:spcPts val="0"/>
-              </a:spcAft>
-              <a:buSzPts val="1100"/>
-              <a:buNone/>
-              <a:defRPr b="0" i="0" sz="1400" u="none" cap="none" strike="noStrike">
+            <a:lvl5pPr marR="0" lvl="4" algn="l" rtl="0">
+              <a:spcBef>
+                <a:spcPts val="0"/>
+              </a:spcBef>
+              <a:spcAft>
+                <a:spcPts val="0"/>
+              </a:spcAft>
+              <a:buSzPts val="1100"/>
+              <a:buNone/>
+              <a:defRPr sz="1400" b="0" i="0" u="none" strike="noStrike" cap="none">
                 <a:solidFill>
                   <a:schemeClr val="dk1"/>
                 </a:solidFill>
-                <a:latin typeface="Arial"/>
-                <a:ea typeface="Arial"/>
-                <a:cs typeface="Arial"/>
-                <a:sym typeface="Arial"/>
+                <a:latin typeface="Arial" panose="020B0604020202020204"/>
+                <a:ea typeface="Arial" panose="020B0604020202020204"/>
+                <a:cs typeface="Arial" panose="020B0604020202020204"/>
+                <a:sym typeface="Arial" panose="020B0604020202020204"/>
               </a:defRPr>
             </a:lvl5pPr>
-            <a:lvl6pPr lvl="5" marR="0" rtl="0" algn="l">
-              <a:spcBef>
-                <a:spcPts val="0"/>
-              </a:spcBef>
-              <a:spcAft>
-                <a:spcPts val="0"/>
-              </a:spcAft>
-              <a:buSzPts val="1100"/>
-              <a:buNone/>
-              <a:defRPr b="0" i="0" sz="1400" u="none" cap="none" strike="noStrike">
+            <a:lvl6pPr marR="0" lvl="5" algn="l" rtl="0">
+              <a:spcBef>
+                <a:spcPts val="0"/>
+              </a:spcBef>
+              <a:spcAft>
+                <a:spcPts val="0"/>
+              </a:spcAft>
+              <a:buSzPts val="1100"/>
+              <a:buNone/>
+              <a:defRPr sz="1400" b="0" i="0" u="none" strike="noStrike" cap="none">
                 <a:solidFill>
                   <a:schemeClr val="dk1"/>
                 </a:solidFill>
-                <a:latin typeface="Arial"/>
-                <a:ea typeface="Arial"/>
-                <a:cs typeface="Arial"/>
-                <a:sym typeface="Arial"/>
+                <a:latin typeface="Arial" panose="020B0604020202020204"/>
+                <a:ea typeface="Arial" panose="020B0604020202020204"/>
+                <a:cs typeface="Arial" panose="020B0604020202020204"/>
+                <a:sym typeface="Arial" panose="020B0604020202020204"/>
               </a:defRPr>
             </a:lvl6pPr>
-            <a:lvl7pPr lvl="6" marR="0" rtl="0" algn="l">
-              <a:spcBef>
-                <a:spcPts val="0"/>
-              </a:spcBef>
-              <a:spcAft>
-                <a:spcPts val="0"/>
-              </a:spcAft>
-              <a:buSzPts val="1100"/>
-              <a:buNone/>
-              <a:defRPr b="0" i="0" sz="1400" u="none" cap="none" strike="noStrike">
+            <a:lvl7pPr marR="0" lvl="6" algn="l" rtl="0">
+              <a:spcBef>
+                <a:spcPts val="0"/>
+              </a:spcBef>
+              <a:spcAft>
+                <a:spcPts val="0"/>
+              </a:spcAft>
+              <a:buSzPts val="1100"/>
+              <a:buNone/>
+              <a:defRPr sz="1400" b="0" i="0" u="none" strike="noStrike" cap="none">
                 <a:solidFill>
                   <a:schemeClr val="dk1"/>
                 </a:solidFill>
-                <a:latin typeface="Arial"/>
-                <a:ea typeface="Arial"/>
-                <a:cs typeface="Arial"/>
-                <a:sym typeface="Arial"/>
+                <a:latin typeface="Arial" panose="020B0604020202020204"/>
+                <a:ea typeface="Arial" panose="020B0604020202020204"/>
+                <a:cs typeface="Arial" panose="020B0604020202020204"/>
+                <a:sym typeface="Arial" panose="020B0604020202020204"/>
               </a:defRPr>
             </a:lvl7pPr>
-            <a:lvl8pPr lvl="7" marR="0" rtl="0" algn="l">
-              <a:spcBef>
-                <a:spcPts val="0"/>
-              </a:spcBef>
-              <a:spcAft>
-                <a:spcPts val="0"/>
-              </a:spcAft>
-              <a:buSzPts val="1100"/>
-              <a:buNone/>
-              <a:defRPr b="0" i="0" sz="1400" u="none" cap="none" strike="noStrike">
+            <a:lvl8pPr marR="0" lvl="7" algn="l" rtl="0">
+              <a:spcBef>
+                <a:spcPts val="0"/>
+              </a:spcBef>
+              <a:spcAft>
+                <a:spcPts val="0"/>
+              </a:spcAft>
+              <a:buSzPts val="1100"/>
+              <a:buNone/>
+              <a:defRPr sz="1400" b="0" i="0" u="none" strike="noStrike" cap="none">
                 <a:solidFill>
                   <a:schemeClr val="dk1"/>
                 </a:solidFill>
-                <a:latin typeface="Arial"/>
-                <a:ea typeface="Arial"/>
-                <a:cs typeface="Arial"/>
-                <a:sym typeface="Arial"/>
+                <a:latin typeface="Arial" panose="020B0604020202020204"/>
+                <a:ea typeface="Arial" panose="020B0604020202020204"/>
+                <a:cs typeface="Arial" panose="020B0604020202020204"/>
+                <a:sym typeface="Arial" panose="020B0604020202020204"/>
               </a:defRPr>
             </a:lvl8pPr>
-            <a:lvl9pPr lvl="8" marR="0" rtl="0" algn="l">
-              <a:spcBef>
-                <a:spcPts val="0"/>
-              </a:spcBef>
-              <a:spcAft>
-                <a:spcPts val="0"/>
-              </a:spcAft>
-              <a:buSzPts val="1100"/>
-              <a:buNone/>
-              <a:defRPr b="0" i="0" sz="1400" u="none" cap="none" strike="noStrike">
+            <a:lvl9pPr marR="0" lvl="8" algn="l" rtl="0">
+              <a:spcBef>
+                <a:spcPts val="0"/>
+              </a:spcBef>
+              <a:spcAft>
+                <a:spcPts val="0"/>
+              </a:spcAft>
+              <a:buSzPts val="1100"/>
+              <a:buNone/>
+              <a:defRPr sz="1400" b="0" i="0" u="none" strike="noStrike" cap="none">
                 <a:solidFill>
                   <a:schemeClr val="dk1"/>
                 </a:solidFill>
-                <a:latin typeface="Arial"/>
-                <a:ea typeface="Arial"/>
-                <a:cs typeface="Arial"/>
-                <a:sym typeface="Arial"/>
+                <a:latin typeface="Arial" panose="020B0604020202020204"/>
+                <a:ea typeface="Arial" panose="020B0604020202020204"/>
+                <a:cs typeface="Arial" panose="020B0604020202020204"/>
+                <a:sym typeface="Arial" panose="020B0604020202020204"/>
               </a:defRPr>
             </a:lvl9pPr>
           </a:lstStyle>
@@ -9834,7 +9849,7 @@
           <p:cNvPr id="9" name="Shape 4"/>
           <p:cNvSpPr txBox="1"/>
           <p:nvPr>
-            <p:ph idx="11" type="ftr"/>
+            <p:ph type="ftr" idx="11"/>
           </p:nvPr>
         </p:nvSpPr>
         <p:spPr>
@@ -9851,179 +9866,179 @@
           </a:ln>
         </p:spPr>
         <p:txBody>
-          <a:bodyPr anchorCtr="0" anchor="ctr" bIns="34275" lIns="68575" spcFirstLastPara="1" rIns="68575" wrap="square" tIns="34275">
+          <a:bodyPr spcFirstLastPara="1" wrap="square" lIns="68575" tIns="34275" rIns="68575" bIns="34275" anchor="ctr" anchorCtr="0">
             <a:noAutofit/>
           </a:bodyPr>
           <a:lstStyle>
-            <a:lvl1pPr lvl="0" marR="0" rtl="0" algn="ctr">
-              <a:spcBef>
-                <a:spcPts val="0"/>
-              </a:spcBef>
-              <a:spcAft>
-                <a:spcPts val="0"/>
-              </a:spcAft>
-              <a:buSzPts val="1100"/>
-              <a:buNone/>
-              <a:defRPr b="0" i="0" sz="900" u="none" cap="none" strike="noStrike">
+            <a:lvl1pPr marR="0" lvl="0" algn="ctr" rtl="0">
+              <a:spcBef>
+                <a:spcPts val="0"/>
+              </a:spcBef>
+              <a:spcAft>
+                <a:spcPts val="0"/>
+              </a:spcAft>
+              <a:buSzPts val="1100"/>
+              <a:buNone/>
+              <a:defRPr sz="900" b="0" i="0" u="none" strike="noStrike" cap="none">
                 <a:solidFill>
                   <a:srgbClr val="888888"/>
                 </a:solidFill>
-                <a:latin typeface="Arial"/>
-                <a:ea typeface="Arial"/>
-                <a:cs typeface="Arial"/>
-                <a:sym typeface="Arial"/>
+                <a:latin typeface="Arial" panose="020B0604020202020204"/>
+                <a:ea typeface="Arial" panose="020B0604020202020204"/>
+                <a:cs typeface="Arial" panose="020B0604020202020204"/>
+                <a:sym typeface="Arial" panose="020B0604020202020204"/>
               </a:defRPr>
             </a:lvl1pPr>
-            <a:lvl2pPr lvl="1" marR="0" rtl="0" algn="l">
-              <a:spcBef>
-                <a:spcPts val="0"/>
-              </a:spcBef>
-              <a:spcAft>
-                <a:spcPts val="0"/>
-              </a:spcAft>
-              <a:buSzPts val="1100"/>
-              <a:buNone/>
-              <a:defRPr b="0" i="0" sz="1400" u="none" cap="none" strike="noStrike">
+            <a:lvl2pPr marR="0" lvl="1" algn="l" rtl="0">
+              <a:spcBef>
+                <a:spcPts val="0"/>
+              </a:spcBef>
+              <a:spcAft>
+                <a:spcPts val="0"/>
+              </a:spcAft>
+              <a:buSzPts val="1100"/>
+              <a:buNone/>
+              <a:defRPr sz="1400" b="0" i="0" u="none" strike="noStrike" cap="none">
                 <a:solidFill>
                   <a:schemeClr val="dk1"/>
                 </a:solidFill>
-                <a:latin typeface="Arial"/>
-                <a:ea typeface="Arial"/>
-                <a:cs typeface="Arial"/>
-                <a:sym typeface="Arial"/>
+                <a:latin typeface="Arial" panose="020B0604020202020204"/>
+                <a:ea typeface="Arial" panose="020B0604020202020204"/>
+                <a:cs typeface="Arial" panose="020B0604020202020204"/>
+                <a:sym typeface="Arial" panose="020B0604020202020204"/>
               </a:defRPr>
             </a:lvl2pPr>
-            <a:lvl3pPr lvl="2" marR="0" rtl="0" algn="l">
-              <a:spcBef>
-                <a:spcPts val="0"/>
-              </a:spcBef>
-              <a:spcAft>
-                <a:spcPts val="0"/>
-              </a:spcAft>
-              <a:buSzPts val="1100"/>
-              <a:buNone/>
-              <a:defRPr b="0" i="0" sz="1400" u="none" cap="none" strike="noStrike">
+            <a:lvl3pPr marR="0" lvl="2" algn="l" rtl="0">
+              <a:spcBef>
+                <a:spcPts val="0"/>
+              </a:spcBef>
+              <a:spcAft>
+                <a:spcPts val="0"/>
+              </a:spcAft>
+              <a:buSzPts val="1100"/>
+              <a:buNone/>
+              <a:defRPr sz="1400" b="0" i="0" u="none" strike="noStrike" cap="none">
                 <a:solidFill>
                   <a:schemeClr val="dk1"/>
                 </a:solidFill>
-                <a:latin typeface="Arial"/>
-                <a:ea typeface="Arial"/>
-                <a:cs typeface="Arial"/>
-                <a:sym typeface="Arial"/>
+                <a:latin typeface="Arial" panose="020B0604020202020204"/>
+                <a:ea typeface="Arial" panose="020B0604020202020204"/>
+                <a:cs typeface="Arial" panose="020B0604020202020204"/>
+                <a:sym typeface="Arial" panose="020B0604020202020204"/>
               </a:defRPr>
             </a:lvl3pPr>
-            <a:lvl4pPr lvl="3" marR="0" rtl="0" algn="l">
-              <a:spcBef>
-                <a:spcPts val="0"/>
-              </a:spcBef>
-              <a:spcAft>
-                <a:spcPts val="0"/>
-              </a:spcAft>
-              <a:buSzPts val="1100"/>
-              <a:buNone/>
-              <a:defRPr b="0" i="0" sz="1400" u="none" cap="none" strike="noStrike">
+            <a:lvl4pPr marR="0" lvl="3" algn="l" rtl="0">
+              <a:spcBef>
+                <a:spcPts val="0"/>
+              </a:spcBef>
+              <a:spcAft>
+                <a:spcPts val="0"/>
+              </a:spcAft>
+              <a:buSzPts val="1100"/>
+              <a:buNone/>
+              <a:defRPr sz="1400" b="0" i="0" u="none" strike="noStrike" cap="none">
                 <a:solidFill>
                   <a:schemeClr val="dk1"/>
                 </a:solidFill>
-                <a:latin typeface="Arial"/>
-                <a:ea typeface="Arial"/>
-                <a:cs typeface="Arial"/>
-                <a:sym typeface="Arial"/>
+                <a:latin typeface="Arial" panose="020B0604020202020204"/>
+                <a:ea typeface="Arial" panose="020B0604020202020204"/>
+                <a:cs typeface="Arial" panose="020B0604020202020204"/>
+                <a:sym typeface="Arial" panose="020B0604020202020204"/>
               </a:defRPr>
             </a:lvl4pPr>
-            <a:lvl5pPr lvl="4" marR="0" rtl="0" algn="l">
-              <a:spcBef>
-                <a:spcPts val="0"/>
-              </a:spcBef>
-              <a:spcAft>
-                <a:spcPts val="0"/>
-              </a:spcAft>
-              <a:buSzPts val="1100"/>
-              <a:buNone/>
-              <a:defRPr b="0" i="0" sz="1400" u="none" cap="none" strike="noStrike">
+            <a:lvl5pPr marR="0" lvl="4" algn="l" rtl="0">
+              <a:spcBef>
+                <a:spcPts val="0"/>
+              </a:spcBef>
+              <a:spcAft>
+                <a:spcPts val="0"/>
+              </a:spcAft>
+              <a:buSzPts val="1100"/>
+              <a:buNone/>
+              <a:defRPr sz="1400" b="0" i="0" u="none" strike="noStrike" cap="none">
                 <a:solidFill>
                   <a:schemeClr val="dk1"/>
                 </a:solidFill>
-                <a:latin typeface="Arial"/>
-                <a:ea typeface="Arial"/>
-                <a:cs typeface="Arial"/>
-                <a:sym typeface="Arial"/>
+                <a:latin typeface="Arial" panose="020B0604020202020204"/>
+                <a:ea typeface="Arial" panose="020B0604020202020204"/>
+                <a:cs typeface="Arial" panose="020B0604020202020204"/>
+                <a:sym typeface="Arial" panose="020B0604020202020204"/>
               </a:defRPr>
             </a:lvl5pPr>
-            <a:lvl6pPr lvl="5" marR="0" rtl="0" algn="l">
-              <a:spcBef>
-                <a:spcPts val="0"/>
-              </a:spcBef>
-              <a:spcAft>
-                <a:spcPts val="0"/>
-              </a:spcAft>
-              <a:buSzPts val="1100"/>
-              <a:buNone/>
-              <a:defRPr b="0" i="0" sz="1400" u="none" cap="none" strike="noStrike">
+            <a:lvl6pPr marR="0" lvl="5" algn="l" rtl="0">
+              <a:spcBef>
+                <a:spcPts val="0"/>
+              </a:spcBef>
+              <a:spcAft>
+                <a:spcPts val="0"/>
+              </a:spcAft>
+              <a:buSzPts val="1100"/>
+              <a:buNone/>
+              <a:defRPr sz="1400" b="0" i="0" u="none" strike="noStrike" cap="none">
                 <a:solidFill>
                   <a:schemeClr val="dk1"/>
                 </a:solidFill>
-                <a:latin typeface="Arial"/>
-                <a:ea typeface="Arial"/>
-                <a:cs typeface="Arial"/>
-                <a:sym typeface="Arial"/>
+                <a:latin typeface="Arial" panose="020B0604020202020204"/>
+                <a:ea typeface="Arial" panose="020B0604020202020204"/>
+                <a:cs typeface="Arial" panose="020B0604020202020204"/>
+                <a:sym typeface="Arial" panose="020B0604020202020204"/>
               </a:defRPr>
             </a:lvl6pPr>
-            <a:lvl7pPr lvl="6" marR="0" rtl="0" algn="l">
-              <a:spcBef>
-                <a:spcPts val="0"/>
-              </a:spcBef>
-              <a:spcAft>
-                <a:spcPts val="0"/>
-              </a:spcAft>
-              <a:buSzPts val="1100"/>
-              <a:buNone/>
-              <a:defRPr b="0" i="0" sz="1400" u="none" cap="none" strike="noStrike">
+            <a:lvl7pPr marR="0" lvl="6" algn="l" rtl="0">
+              <a:spcBef>
+                <a:spcPts val="0"/>
+              </a:spcBef>
+              <a:spcAft>
+                <a:spcPts val="0"/>
+              </a:spcAft>
+              <a:buSzPts val="1100"/>
+              <a:buNone/>
+              <a:defRPr sz="1400" b="0" i="0" u="none" strike="noStrike" cap="none">
                 <a:solidFill>
                   <a:schemeClr val="dk1"/>
                 </a:solidFill>
-                <a:latin typeface="Arial"/>
-                <a:ea typeface="Arial"/>
-                <a:cs typeface="Arial"/>
-                <a:sym typeface="Arial"/>
+                <a:latin typeface="Arial" panose="020B0604020202020204"/>
+                <a:ea typeface="Arial" panose="020B0604020202020204"/>
+                <a:cs typeface="Arial" panose="020B0604020202020204"/>
+                <a:sym typeface="Arial" panose="020B0604020202020204"/>
               </a:defRPr>
             </a:lvl7pPr>
-            <a:lvl8pPr lvl="7" marR="0" rtl="0" algn="l">
-              <a:spcBef>
-                <a:spcPts val="0"/>
-              </a:spcBef>
-              <a:spcAft>
-                <a:spcPts val="0"/>
-              </a:spcAft>
-              <a:buSzPts val="1100"/>
-              <a:buNone/>
-              <a:defRPr b="0" i="0" sz="1400" u="none" cap="none" strike="noStrike">
+            <a:lvl8pPr marR="0" lvl="7" algn="l" rtl="0">
+              <a:spcBef>
+                <a:spcPts val="0"/>
+              </a:spcBef>
+              <a:spcAft>
+                <a:spcPts val="0"/>
+              </a:spcAft>
+              <a:buSzPts val="1100"/>
+              <a:buNone/>
+              <a:defRPr sz="1400" b="0" i="0" u="none" strike="noStrike" cap="none">
                 <a:solidFill>
                   <a:schemeClr val="dk1"/>
                 </a:solidFill>
-                <a:latin typeface="Arial"/>
-                <a:ea typeface="Arial"/>
-                <a:cs typeface="Arial"/>
-                <a:sym typeface="Arial"/>
+                <a:latin typeface="Arial" panose="020B0604020202020204"/>
+                <a:ea typeface="Arial" panose="020B0604020202020204"/>
+                <a:cs typeface="Arial" panose="020B0604020202020204"/>
+                <a:sym typeface="Arial" panose="020B0604020202020204"/>
               </a:defRPr>
             </a:lvl8pPr>
-            <a:lvl9pPr lvl="8" marR="0" rtl="0" algn="l">
-              <a:spcBef>
-                <a:spcPts val="0"/>
-              </a:spcBef>
-              <a:spcAft>
-                <a:spcPts val="0"/>
-              </a:spcAft>
-              <a:buSzPts val="1100"/>
-              <a:buNone/>
-              <a:defRPr b="0" i="0" sz="1400" u="none" cap="none" strike="noStrike">
+            <a:lvl9pPr marR="0" lvl="8" algn="l" rtl="0">
+              <a:spcBef>
+                <a:spcPts val="0"/>
+              </a:spcBef>
+              <a:spcAft>
+                <a:spcPts val="0"/>
+              </a:spcAft>
+              <a:buSzPts val="1100"/>
+              <a:buNone/>
+              <a:defRPr sz="1400" b="0" i="0" u="none" strike="noStrike" cap="none">
                 <a:solidFill>
                   <a:schemeClr val="dk1"/>
                 </a:solidFill>
-                <a:latin typeface="Arial"/>
-                <a:ea typeface="Arial"/>
-                <a:cs typeface="Arial"/>
-                <a:sym typeface="Arial"/>
+                <a:latin typeface="Arial" panose="020B0604020202020204"/>
+                <a:ea typeface="Arial" panose="020B0604020202020204"/>
+                <a:cs typeface="Arial" panose="020B0604020202020204"/>
+                <a:sym typeface="Arial" panose="020B0604020202020204"/>
               </a:defRPr>
             </a:lvl9pPr>
           </a:lstStyle>
@@ -10035,7 +10050,7 @@
           <p:cNvPr id="10" name="Shape 5"/>
           <p:cNvSpPr txBox="1"/>
           <p:nvPr>
-            <p:ph idx="12" type="sldNum"/>
+            <p:ph type="sldNum" idx="12"/>
           </p:nvPr>
         </p:nvSpPr>
         <p:spPr>
@@ -10052,148 +10067,148 @@
           </a:ln>
         </p:spPr>
         <p:txBody>
-          <a:bodyPr anchorCtr="0" anchor="ctr" bIns="34275" lIns="68575" spcFirstLastPara="1" rIns="68575" wrap="square" tIns="34275">
+          <a:bodyPr spcFirstLastPara="1" wrap="square" lIns="68575" tIns="34275" rIns="68575" bIns="34275" anchor="ctr" anchorCtr="0">
             <a:noAutofit/>
           </a:bodyPr>
           <a:lstStyle>
-            <a:lvl1pPr indent="0" lvl="0" marL="0" marR="0" rtl="0" algn="r">
-              <a:spcBef>
-                <a:spcPts val="0"/>
-              </a:spcBef>
-              <a:buNone/>
-              <a:defRPr b="0" i="0" sz="900" u="none" cap="none" strike="noStrike">
+            <a:lvl1pPr marL="0" marR="0" lvl="0" indent="0" algn="r" rtl="0">
+              <a:spcBef>
+                <a:spcPts val="0"/>
+              </a:spcBef>
+              <a:buNone/>
+              <a:defRPr sz="900" b="0" i="0" u="none" strike="noStrike" cap="none">
                 <a:solidFill>
                   <a:srgbClr val="888888"/>
                 </a:solidFill>
-                <a:latin typeface="Arial"/>
-                <a:ea typeface="Arial"/>
-                <a:cs typeface="Arial"/>
-                <a:sym typeface="Arial"/>
+                <a:latin typeface="Arial" panose="020B0604020202020204"/>
+                <a:ea typeface="Arial" panose="020B0604020202020204"/>
+                <a:cs typeface="Arial" panose="020B0604020202020204"/>
+                <a:sym typeface="Arial" panose="020B0604020202020204"/>
               </a:defRPr>
             </a:lvl1pPr>
-            <a:lvl2pPr indent="0" lvl="1" marL="0" marR="0" rtl="0" algn="r">
-              <a:spcBef>
-                <a:spcPts val="0"/>
-              </a:spcBef>
-              <a:buNone/>
-              <a:defRPr b="0" i="0" sz="900" u="none" cap="none" strike="noStrike">
+            <a:lvl2pPr marL="0" marR="0" lvl="1" indent="0" algn="r" rtl="0">
+              <a:spcBef>
+                <a:spcPts val="0"/>
+              </a:spcBef>
+              <a:buNone/>
+              <a:defRPr sz="900" b="0" i="0" u="none" strike="noStrike" cap="none">
                 <a:solidFill>
                   <a:srgbClr val="888888"/>
                 </a:solidFill>
-                <a:latin typeface="Arial"/>
-                <a:ea typeface="Arial"/>
-                <a:cs typeface="Arial"/>
-                <a:sym typeface="Arial"/>
+                <a:latin typeface="Arial" panose="020B0604020202020204"/>
+                <a:ea typeface="Arial" panose="020B0604020202020204"/>
+                <a:cs typeface="Arial" panose="020B0604020202020204"/>
+                <a:sym typeface="Arial" panose="020B0604020202020204"/>
               </a:defRPr>
             </a:lvl2pPr>
-            <a:lvl3pPr indent="0" lvl="2" marL="0" marR="0" rtl="0" algn="r">
-              <a:spcBef>
-                <a:spcPts val="0"/>
-              </a:spcBef>
-              <a:buNone/>
-              <a:defRPr b="0" i="0" sz="900" u="none" cap="none" strike="noStrike">
+            <a:lvl3pPr marL="0" marR="0" lvl="2" indent="0" algn="r" rtl="0">
+              <a:spcBef>
+                <a:spcPts val="0"/>
+              </a:spcBef>
+              <a:buNone/>
+              <a:defRPr sz="900" b="0" i="0" u="none" strike="noStrike" cap="none">
                 <a:solidFill>
                   <a:srgbClr val="888888"/>
                 </a:solidFill>
-                <a:latin typeface="Arial"/>
-                <a:ea typeface="Arial"/>
-                <a:cs typeface="Arial"/>
-                <a:sym typeface="Arial"/>
+                <a:latin typeface="Arial" panose="020B0604020202020204"/>
+                <a:ea typeface="Arial" panose="020B0604020202020204"/>
+                <a:cs typeface="Arial" panose="020B0604020202020204"/>
+                <a:sym typeface="Arial" panose="020B0604020202020204"/>
               </a:defRPr>
             </a:lvl3pPr>
-            <a:lvl4pPr indent="0" lvl="3" marL="0" marR="0" rtl="0" algn="r">
-              <a:spcBef>
-                <a:spcPts val="0"/>
-              </a:spcBef>
-              <a:buNone/>
-              <a:defRPr b="0" i="0" sz="900" u="none" cap="none" strike="noStrike">
+            <a:lvl4pPr marL="0" marR="0" lvl="3" indent="0" algn="r" rtl="0">
+              <a:spcBef>
+                <a:spcPts val="0"/>
+              </a:spcBef>
+              <a:buNone/>
+              <a:defRPr sz="900" b="0" i="0" u="none" strike="noStrike" cap="none">
                 <a:solidFill>
                   <a:srgbClr val="888888"/>
                 </a:solidFill>
-                <a:latin typeface="Arial"/>
-                <a:ea typeface="Arial"/>
-                <a:cs typeface="Arial"/>
-                <a:sym typeface="Arial"/>
+                <a:latin typeface="Arial" panose="020B0604020202020204"/>
+                <a:ea typeface="Arial" panose="020B0604020202020204"/>
+                <a:cs typeface="Arial" panose="020B0604020202020204"/>
+                <a:sym typeface="Arial" panose="020B0604020202020204"/>
               </a:defRPr>
             </a:lvl4pPr>
-            <a:lvl5pPr indent="0" lvl="4" marL="0" marR="0" rtl="0" algn="r">
-              <a:spcBef>
-                <a:spcPts val="0"/>
-              </a:spcBef>
-              <a:buNone/>
-              <a:defRPr b="0" i="0" sz="900" u="none" cap="none" strike="noStrike">
+            <a:lvl5pPr marL="0" marR="0" lvl="4" indent="0" algn="r" rtl="0">
+              <a:spcBef>
+                <a:spcPts val="0"/>
+              </a:spcBef>
+              <a:buNone/>
+              <a:defRPr sz="900" b="0" i="0" u="none" strike="noStrike" cap="none">
                 <a:solidFill>
                   <a:srgbClr val="888888"/>
                 </a:solidFill>
-                <a:latin typeface="Arial"/>
-                <a:ea typeface="Arial"/>
-                <a:cs typeface="Arial"/>
-                <a:sym typeface="Arial"/>
+                <a:latin typeface="Arial" panose="020B0604020202020204"/>
+                <a:ea typeface="Arial" panose="020B0604020202020204"/>
+                <a:cs typeface="Arial" panose="020B0604020202020204"/>
+                <a:sym typeface="Arial" panose="020B0604020202020204"/>
               </a:defRPr>
             </a:lvl5pPr>
-            <a:lvl6pPr indent="0" lvl="5" marL="0" marR="0" rtl="0" algn="r">
-              <a:spcBef>
-                <a:spcPts val="0"/>
-              </a:spcBef>
-              <a:buNone/>
-              <a:defRPr b="0" i="0" sz="900" u="none" cap="none" strike="noStrike">
+            <a:lvl6pPr marL="0" marR="0" lvl="5" indent="0" algn="r" rtl="0">
+              <a:spcBef>
+                <a:spcPts val="0"/>
+              </a:spcBef>
+              <a:buNone/>
+              <a:defRPr sz="900" b="0" i="0" u="none" strike="noStrike" cap="none">
                 <a:solidFill>
                   <a:srgbClr val="888888"/>
                 </a:solidFill>
-                <a:latin typeface="Arial"/>
-                <a:ea typeface="Arial"/>
-                <a:cs typeface="Arial"/>
-                <a:sym typeface="Arial"/>
+                <a:latin typeface="Arial" panose="020B0604020202020204"/>
+                <a:ea typeface="Arial" panose="020B0604020202020204"/>
+                <a:cs typeface="Arial" panose="020B0604020202020204"/>
+                <a:sym typeface="Arial" panose="020B0604020202020204"/>
               </a:defRPr>
             </a:lvl6pPr>
-            <a:lvl7pPr indent="0" lvl="6" marL="0" marR="0" rtl="0" algn="r">
-              <a:spcBef>
-                <a:spcPts val="0"/>
-              </a:spcBef>
-              <a:buNone/>
-              <a:defRPr b="0" i="0" sz="900" u="none" cap="none" strike="noStrike">
+            <a:lvl7pPr marL="0" marR="0" lvl="6" indent="0" algn="r" rtl="0">
+              <a:spcBef>
+                <a:spcPts val="0"/>
+              </a:spcBef>
+              <a:buNone/>
+              <a:defRPr sz="900" b="0" i="0" u="none" strike="noStrike" cap="none">
                 <a:solidFill>
                   <a:srgbClr val="888888"/>
                 </a:solidFill>
-                <a:latin typeface="Arial"/>
-                <a:ea typeface="Arial"/>
-                <a:cs typeface="Arial"/>
-                <a:sym typeface="Arial"/>
+                <a:latin typeface="Arial" panose="020B0604020202020204"/>
+                <a:ea typeface="Arial" panose="020B0604020202020204"/>
+                <a:cs typeface="Arial" panose="020B0604020202020204"/>
+                <a:sym typeface="Arial" panose="020B0604020202020204"/>
               </a:defRPr>
             </a:lvl7pPr>
-            <a:lvl8pPr indent="0" lvl="7" marL="0" marR="0" rtl="0" algn="r">
-              <a:spcBef>
-                <a:spcPts val="0"/>
-              </a:spcBef>
-              <a:buNone/>
-              <a:defRPr b="0" i="0" sz="900" u="none" cap="none" strike="noStrike">
+            <a:lvl8pPr marL="0" marR="0" lvl="7" indent="0" algn="r" rtl="0">
+              <a:spcBef>
+                <a:spcPts val="0"/>
+              </a:spcBef>
+              <a:buNone/>
+              <a:defRPr sz="900" b="0" i="0" u="none" strike="noStrike" cap="none">
                 <a:solidFill>
                   <a:srgbClr val="888888"/>
                 </a:solidFill>
-                <a:latin typeface="Arial"/>
-                <a:ea typeface="Arial"/>
-                <a:cs typeface="Arial"/>
-                <a:sym typeface="Arial"/>
+                <a:latin typeface="Arial" panose="020B0604020202020204"/>
+                <a:ea typeface="Arial" panose="020B0604020202020204"/>
+                <a:cs typeface="Arial" panose="020B0604020202020204"/>
+                <a:sym typeface="Arial" panose="020B0604020202020204"/>
               </a:defRPr>
             </a:lvl8pPr>
-            <a:lvl9pPr indent="0" lvl="8" marL="0" marR="0" rtl="0" algn="r">
-              <a:spcBef>
-                <a:spcPts val="0"/>
-              </a:spcBef>
-              <a:buNone/>
-              <a:defRPr b="0" i="0" sz="900" u="none" cap="none" strike="noStrike">
+            <a:lvl9pPr marL="0" marR="0" lvl="8" indent="0" algn="r" rtl="0">
+              <a:spcBef>
+                <a:spcPts val="0"/>
+              </a:spcBef>
+              <a:buNone/>
+              <a:defRPr sz="900" b="0" i="0" u="none" strike="noStrike" cap="none">
                 <a:solidFill>
                   <a:srgbClr val="888888"/>
                 </a:solidFill>
-                <a:latin typeface="Arial"/>
-                <a:ea typeface="Arial"/>
-                <a:cs typeface="Arial"/>
-                <a:sym typeface="Arial"/>
+                <a:latin typeface="Arial" panose="020B0604020202020204"/>
+                <a:ea typeface="Arial" panose="020B0604020202020204"/>
+                <a:cs typeface="Arial" panose="020B0604020202020204"/>
+                <a:sym typeface="Arial" panose="020B0604020202020204"/>
               </a:defRPr>
             </a:lvl9pPr>
           </a:lstStyle>
           <a:p>
-            <a:pPr indent="0" lvl="0" marL="0" rtl="0" algn="r">
+            <a:pPr marL="0" lvl="0" indent="0" algn="r" rtl="0">
               <a:spcBef>
                 <a:spcPts val="0"/>
               </a:spcBef>
@@ -10204,32 +10219,31 @@
             </a:pPr>
             <a:fld id="{00000000-1234-1234-1234-123412341234}" type="slidenum">
               <a:rPr lang="zh-CN"/>
-              <a:t>‹#›</a:t>
             </a:fld>
-            <a:endParaRPr/>
+            <a:endParaRPr lang="zh-CN"/>
           </a:p>
         </p:txBody>
       </p:sp>
     </p:spTree>
   </p:cSld>
-  <p:clrMap accent1="accent1" accent2="accent2" accent3="accent3" accent4="accent4" accent5="accent5" accent6="accent6" bg1="lt1" bg2="dk2" tx1="dk1" tx2="lt2" folHlink="folHlink" hlink="hlink"/>
+  <p:clrMap bg1="lt1" tx1="dk1" bg2="dk2" tx2="lt2" accent1="accent1" accent2="accent2" accent3="accent3" accent4="accent4" accent5="accent5" accent6="accent6" hlink="hlink" folHlink="folHlink"/>
   <p:sldLayoutIdLst>
-    <p:sldLayoutId id="2147483648" r:id="rId1"/>
-    <p:sldLayoutId id="2147483649" r:id="rId2"/>
-    <p:sldLayoutId id="2147483650" r:id="rId3"/>
-    <p:sldLayoutId id="2147483651" r:id="rId4"/>
-    <p:sldLayoutId id="2147483652" r:id="rId5"/>
-    <p:sldLayoutId id="2147483653" r:id="rId6"/>
-    <p:sldLayoutId id="2147483654" r:id="rId7"/>
-    <p:sldLayoutId id="2147483655" r:id="rId8"/>
-    <p:sldLayoutId id="2147483656" r:id="rId9"/>
-    <p:sldLayoutId id="2147483657" r:id="rId10"/>
-    <p:sldLayoutId id="2147483658" r:id="rId11"/>
+    <p:sldLayoutId id="2147483649" r:id="rId1"/>
+    <p:sldLayoutId id="2147483650" r:id="rId2"/>
+    <p:sldLayoutId id="2147483651" r:id="rId3"/>
+    <p:sldLayoutId id="2147483652" r:id="rId4"/>
+    <p:sldLayoutId id="2147483653" r:id="rId5"/>
+    <p:sldLayoutId id="2147483654" r:id="rId6"/>
+    <p:sldLayoutId id="2147483655" r:id="rId7"/>
+    <p:sldLayoutId id="2147483656" r:id="rId8"/>
+    <p:sldLayoutId id="2147483657" r:id="rId9"/>
+    <p:sldLayoutId id="2147483658" r:id="rId10"/>
+    <p:sldLayoutId id="2147483659" r:id="rId11"/>
   </p:sldLayoutIdLst>
-  <p:hf dt="0" ftr="0" hdr="0" sldNum="0"/>
+  <p:hf sldNum="0" hdr="0" ftr="0" dt="0"/>
   <p:txStyles>
     <p:titleStyle>
-      <a:defPPr lvl="0" marR="0" rtl="0" algn="l">
+      <a:defPPr marR="0" lvl="0" algn="l" rtl="0">
         <a:lnSpc>
           <a:spcPct val="100000"/>
         </a:lnSpc>
@@ -10240,7 +10254,7 @@
           <a:spcPts val="0"/>
         </a:spcAft>
       </a:defPPr>
-      <a:lvl1pPr lvl="0" marR="0" rtl="0" algn="l">
+      <a:lvl1pPr marR="0" lvl="0" algn="l" rtl="0">
         <a:lnSpc>
           <a:spcPct val="100000"/>
         </a:lnSpc>
@@ -10253,18 +10267,18 @@
         <a:buClr>
           <a:srgbClr val="000000"/>
         </a:buClr>
-        <a:buFont typeface="Arial"/>
-        <a:defRPr b="0" i="0" sz="1400" u="none" cap="none" strike="noStrike">
+        <a:buFont typeface="Arial" panose="020B0604020202020204"/>
+        <a:defRPr sz="1400" b="0" i="0" u="none" strike="noStrike" cap="none">
           <a:solidFill>
             <a:srgbClr val="000000"/>
           </a:solidFill>
-          <a:latin typeface="Arial"/>
-          <a:ea typeface="Arial"/>
-          <a:cs typeface="Arial"/>
-          <a:sym typeface="Arial"/>
+          <a:latin typeface="Arial" panose="020B0604020202020204"/>
+          <a:ea typeface="Arial" panose="020B0604020202020204"/>
+          <a:cs typeface="Arial" panose="020B0604020202020204"/>
+          <a:sym typeface="Arial" panose="020B0604020202020204"/>
         </a:defRPr>
       </a:lvl1pPr>
-      <a:lvl2pPr lvl="1" marR="0" rtl="0" algn="l">
+      <a:lvl2pPr marR="0" lvl="1" algn="l" rtl="0">
         <a:lnSpc>
           <a:spcPct val="100000"/>
         </a:lnSpc>
@@ -10277,18 +10291,18 @@
         <a:buClr>
           <a:srgbClr val="000000"/>
         </a:buClr>
-        <a:buFont typeface="Arial"/>
-        <a:defRPr b="0" i="0" sz="1400" u="none" cap="none" strike="noStrike">
+        <a:buFont typeface="Arial" panose="020B0604020202020204"/>
+        <a:defRPr sz="1400" b="0" i="0" u="none" strike="noStrike" cap="none">
           <a:solidFill>
             <a:srgbClr val="000000"/>
           </a:solidFill>
-          <a:latin typeface="Arial"/>
-          <a:ea typeface="Arial"/>
-          <a:cs typeface="Arial"/>
-          <a:sym typeface="Arial"/>
+          <a:latin typeface="Arial" panose="020B0604020202020204"/>
+          <a:ea typeface="Arial" panose="020B0604020202020204"/>
+          <a:cs typeface="Arial" panose="020B0604020202020204"/>
+          <a:sym typeface="Arial" panose="020B0604020202020204"/>
         </a:defRPr>
       </a:lvl2pPr>
-      <a:lvl3pPr lvl="2" marR="0" rtl="0" algn="l">
+      <a:lvl3pPr marR="0" lvl="2" algn="l" rtl="0">
         <a:lnSpc>
           <a:spcPct val="100000"/>
         </a:lnSpc>
@@ -10301,18 +10315,18 @@
         <a:buClr>
           <a:srgbClr val="000000"/>
         </a:buClr>
-        <a:buFont typeface="Arial"/>
-        <a:defRPr b="0" i="0" sz="1400" u="none" cap="none" strike="noStrike">
+        <a:buFont typeface="Arial" panose="020B0604020202020204"/>
+        <a:defRPr sz="1400" b="0" i="0" u="none" strike="noStrike" cap="none">
           <a:solidFill>
             <a:srgbClr val="000000"/>
           </a:solidFill>
-          <a:latin typeface="Arial"/>
-          <a:ea typeface="Arial"/>
-          <a:cs typeface="Arial"/>
-          <a:sym typeface="Arial"/>
+          <a:latin typeface="Arial" panose="020B0604020202020204"/>
+          <a:ea typeface="Arial" panose="020B0604020202020204"/>
+          <a:cs typeface="Arial" panose="020B0604020202020204"/>
+          <a:sym typeface="Arial" panose="020B0604020202020204"/>
         </a:defRPr>
       </a:lvl3pPr>
-      <a:lvl4pPr lvl="3" marR="0" rtl="0" algn="l">
+      <a:lvl4pPr marR="0" lvl="3" algn="l" rtl="0">
         <a:lnSpc>
           <a:spcPct val="100000"/>
         </a:lnSpc>
@@ -10325,18 +10339,18 @@
         <a:buClr>
           <a:srgbClr val="000000"/>
         </a:buClr>
-        <a:buFont typeface="Arial"/>
-        <a:defRPr b="0" i="0" sz="1400" u="none" cap="none" strike="noStrike">
+        <a:buFont typeface="Arial" panose="020B0604020202020204"/>
+        <a:defRPr sz="1400" b="0" i="0" u="none" strike="noStrike" cap="none">
           <a:solidFill>
             <a:srgbClr val="000000"/>
           </a:solidFill>
-          <a:latin typeface="Arial"/>
-          <a:ea typeface="Arial"/>
-          <a:cs typeface="Arial"/>
-          <a:sym typeface="Arial"/>
+          <a:latin typeface="Arial" panose="020B0604020202020204"/>
+          <a:ea typeface="Arial" panose="020B0604020202020204"/>
+          <a:cs typeface="Arial" panose="020B0604020202020204"/>
+          <a:sym typeface="Arial" panose="020B0604020202020204"/>
         </a:defRPr>
       </a:lvl4pPr>
-      <a:lvl5pPr lvl="4" marR="0" rtl="0" algn="l">
+      <a:lvl5pPr marR="0" lvl="4" algn="l" rtl="0">
         <a:lnSpc>
           <a:spcPct val="100000"/>
         </a:lnSpc>
@@ -10349,18 +10363,18 @@
         <a:buClr>
           <a:srgbClr val="000000"/>
         </a:buClr>
-        <a:buFont typeface="Arial"/>
-        <a:defRPr b="0" i="0" sz="1400" u="none" cap="none" strike="noStrike">
+        <a:buFont typeface="Arial" panose="020B0604020202020204"/>
+        <a:defRPr sz="1400" b="0" i="0" u="none" strike="noStrike" cap="none">
           <a:solidFill>
             <a:srgbClr val="000000"/>
           </a:solidFill>
-          <a:latin typeface="Arial"/>
-          <a:ea typeface="Arial"/>
-          <a:cs typeface="Arial"/>
-          <a:sym typeface="Arial"/>
+          <a:latin typeface="Arial" panose="020B0604020202020204"/>
+          <a:ea typeface="Arial" panose="020B0604020202020204"/>
+          <a:cs typeface="Arial" panose="020B0604020202020204"/>
+          <a:sym typeface="Arial" panose="020B0604020202020204"/>
         </a:defRPr>
       </a:lvl5pPr>
-      <a:lvl6pPr lvl="5" marR="0" rtl="0" algn="l">
+      <a:lvl6pPr marR="0" lvl="5" algn="l" rtl="0">
         <a:lnSpc>
           <a:spcPct val="100000"/>
         </a:lnSpc>
@@ -10373,18 +10387,18 @@
         <a:buClr>
           <a:srgbClr val="000000"/>
         </a:buClr>
-        <a:buFont typeface="Arial"/>
-        <a:defRPr b="0" i="0" sz="1400" u="none" cap="none" strike="noStrike">
+        <a:buFont typeface="Arial" panose="020B0604020202020204"/>
+        <a:defRPr sz="1400" b="0" i="0" u="none" strike="noStrike" cap="none">
           <a:solidFill>
             <a:srgbClr val="000000"/>
           </a:solidFill>
-          <a:latin typeface="Arial"/>
-          <a:ea typeface="Arial"/>
-          <a:cs typeface="Arial"/>
-          <a:sym typeface="Arial"/>
+          <a:latin typeface="Arial" panose="020B0604020202020204"/>
+          <a:ea typeface="Arial" panose="020B0604020202020204"/>
+          <a:cs typeface="Arial" panose="020B0604020202020204"/>
+          <a:sym typeface="Arial" panose="020B0604020202020204"/>
         </a:defRPr>
       </a:lvl6pPr>
-      <a:lvl7pPr lvl="6" marR="0" rtl="0" algn="l">
+      <a:lvl7pPr marR="0" lvl="6" algn="l" rtl="0">
         <a:lnSpc>
           <a:spcPct val="100000"/>
         </a:lnSpc>
@@ -10397,18 +10411,18 @@
         <a:buClr>
           <a:srgbClr val="000000"/>
         </a:buClr>
-        <a:buFont typeface="Arial"/>
-        <a:defRPr b="0" i="0" sz="1400" u="none" cap="none" strike="noStrike">
+        <a:buFont typeface="Arial" panose="020B0604020202020204"/>
+        <a:defRPr sz="1400" b="0" i="0" u="none" strike="noStrike" cap="none">
           <a:solidFill>
             <a:srgbClr val="000000"/>
           </a:solidFill>
-          <a:latin typeface="Arial"/>
-          <a:ea typeface="Arial"/>
-          <a:cs typeface="Arial"/>
-          <a:sym typeface="Arial"/>
+          <a:latin typeface="Arial" panose="020B0604020202020204"/>
+          <a:ea typeface="Arial" panose="020B0604020202020204"/>
+          <a:cs typeface="Arial" panose="020B0604020202020204"/>
+          <a:sym typeface="Arial" panose="020B0604020202020204"/>
         </a:defRPr>
       </a:lvl7pPr>
-      <a:lvl8pPr lvl="7" marR="0" rtl="0" algn="l">
+      <a:lvl8pPr marR="0" lvl="7" algn="l" rtl="0">
         <a:lnSpc>
           <a:spcPct val="100000"/>
         </a:lnSpc>
@@ -10421,18 +10435,18 @@
         <a:buClr>
           <a:srgbClr val="000000"/>
         </a:buClr>
-        <a:buFont typeface="Arial"/>
-        <a:defRPr b="0" i="0" sz="1400" u="none" cap="none" strike="noStrike">
+        <a:buFont typeface="Arial" panose="020B0604020202020204"/>
+        <a:defRPr sz="1400" b="0" i="0" u="none" strike="noStrike" cap="none">
           <a:solidFill>
             <a:srgbClr val="000000"/>
           </a:solidFill>
-          <a:latin typeface="Arial"/>
-          <a:ea typeface="Arial"/>
-          <a:cs typeface="Arial"/>
-          <a:sym typeface="Arial"/>
+          <a:latin typeface="Arial" panose="020B0604020202020204"/>
+          <a:ea typeface="Arial" panose="020B0604020202020204"/>
+          <a:cs typeface="Arial" panose="020B0604020202020204"/>
+          <a:sym typeface="Arial" panose="020B0604020202020204"/>
         </a:defRPr>
       </a:lvl8pPr>
-      <a:lvl9pPr lvl="8" marR="0" rtl="0" algn="l">
+      <a:lvl9pPr marR="0" lvl="8" algn="l" rtl="0">
         <a:lnSpc>
           <a:spcPct val="100000"/>
         </a:lnSpc>
@@ -10445,20 +10459,20 @@
         <a:buClr>
           <a:srgbClr val="000000"/>
         </a:buClr>
-        <a:buFont typeface="Arial"/>
-        <a:defRPr b="0" i="0" sz="1400" u="none" cap="none" strike="noStrike">
+        <a:buFont typeface="Arial" panose="020B0604020202020204"/>
+        <a:defRPr sz="1400" b="0" i="0" u="none" strike="noStrike" cap="none">
           <a:solidFill>
             <a:srgbClr val="000000"/>
           </a:solidFill>
-          <a:latin typeface="Arial"/>
-          <a:ea typeface="Arial"/>
-          <a:cs typeface="Arial"/>
-          <a:sym typeface="Arial"/>
+          <a:latin typeface="Arial" panose="020B0604020202020204"/>
+          <a:ea typeface="Arial" panose="020B0604020202020204"/>
+          <a:cs typeface="Arial" panose="020B0604020202020204"/>
+          <a:sym typeface="Arial" panose="020B0604020202020204"/>
         </a:defRPr>
       </a:lvl9pPr>
     </p:titleStyle>
     <p:bodyStyle>
-      <a:defPPr lvl="0" marR="0" rtl="0" algn="l">
+      <a:defPPr marR="0" lvl="0" algn="l" rtl="0">
         <a:lnSpc>
           <a:spcPct val="100000"/>
         </a:lnSpc>
@@ -10469,7 +10483,7 @@
           <a:spcPts val="0"/>
         </a:spcAft>
       </a:defPPr>
-      <a:lvl1pPr lvl="0" marR="0" rtl="0" algn="l">
+      <a:lvl1pPr marR="0" lvl="0" algn="l" rtl="0">
         <a:lnSpc>
           <a:spcPct val="100000"/>
         </a:lnSpc>
@@ -10482,18 +10496,18 @@
         <a:buClr>
           <a:srgbClr val="000000"/>
         </a:buClr>
-        <a:buFont typeface="Arial"/>
-        <a:defRPr b="0" i="0" sz="1400" u="none" cap="none" strike="noStrike">
+        <a:buFont typeface="Arial" panose="020B0604020202020204"/>
+        <a:defRPr sz="1400" b="0" i="0" u="none" strike="noStrike" cap="none">
           <a:solidFill>
             <a:srgbClr val="000000"/>
           </a:solidFill>
-          <a:latin typeface="Arial"/>
-          <a:ea typeface="Arial"/>
-          <a:cs typeface="Arial"/>
-          <a:sym typeface="Arial"/>
+          <a:latin typeface="Arial" panose="020B0604020202020204"/>
+          <a:ea typeface="Arial" panose="020B0604020202020204"/>
+          <a:cs typeface="Arial" panose="020B0604020202020204"/>
+          <a:sym typeface="Arial" panose="020B0604020202020204"/>
         </a:defRPr>
       </a:lvl1pPr>
-      <a:lvl2pPr lvl="1" marR="0" rtl="0" algn="l">
+      <a:lvl2pPr marR="0" lvl="1" algn="l" rtl="0">
         <a:lnSpc>
           <a:spcPct val="100000"/>
         </a:lnSpc>
@@ -10506,18 +10520,18 @@
         <a:buClr>
           <a:srgbClr val="000000"/>
         </a:buClr>
-        <a:buFont typeface="Arial"/>
-        <a:defRPr b="0" i="0" sz="1400" u="none" cap="none" strike="noStrike">
+        <a:buFont typeface="Arial" panose="020B0604020202020204"/>
+        <a:defRPr sz="1400" b="0" i="0" u="none" strike="noStrike" cap="none">
           <a:solidFill>
             <a:srgbClr val="000000"/>
           </a:solidFill>
-          <a:latin typeface="Arial"/>
-          <a:ea typeface="Arial"/>
-          <a:cs typeface="Arial"/>
-          <a:sym typeface="Arial"/>
+          <a:latin typeface="Arial" panose="020B0604020202020204"/>
+          <a:ea typeface="Arial" panose="020B0604020202020204"/>
+          <a:cs typeface="Arial" panose="020B0604020202020204"/>
+          <a:sym typeface="Arial" panose="020B0604020202020204"/>
         </a:defRPr>
       </a:lvl2pPr>
-      <a:lvl3pPr lvl="2" marR="0" rtl="0" algn="l">
+      <a:lvl3pPr marR="0" lvl="2" algn="l" rtl="0">
         <a:lnSpc>
           <a:spcPct val="100000"/>
         </a:lnSpc>
@@ -10530,18 +10544,18 @@
         <a:buClr>
           <a:srgbClr val="000000"/>
         </a:buClr>
-        <a:buFont typeface="Arial"/>
-        <a:defRPr b="0" i="0" sz="1400" u="none" cap="none" strike="noStrike">
+        <a:buFont typeface="Arial" panose="020B0604020202020204"/>
+        <a:defRPr sz="1400" b="0" i="0" u="none" strike="noStrike" cap="none">
           <a:solidFill>
             <a:srgbClr val="000000"/>
           </a:solidFill>
-          <a:latin typeface="Arial"/>
-          <a:ea typeface="Arial"/>
-          <a:cs typeface="Arial"/>
-          <a:sym typeface="Arial"/>
+          <a:latin typeface="Arial" panose="020B0604020202020204"/>
+          <a:ea typeface="Arial" panose="020B0604020202020204"/>
+          <a:cs typeface="Arial" panose="020B0604020202020204"/>
+          <a:sym typeface="Arial" panose="020B0604020202020204"/>
         </a:defRPr>
       </a:lvl3pPr>
-      <a:lvl4pPr lvl="3" marR="0" rtl="0" algn="l">
+      <a:lvl4pPr marR="0" lvl="3" algn="l" rtl="0">
         <a:lnSpc>
           <a:spcPct val="100000"/>
         </a:lnSpc>
@@ -10554,18 +10568,18 @@
         <a:buClr>
           <a:srgbClr val="000000"/>
         </a:buClr>
-        <a:buFont typeface="Arial"/>
-        <a:defRPr b="0" i="0" sz="1400" u="none" cap="none" strike="noStrike">
+        <a:buFont typeface="Arial" panose="020B0604020202020204"/>
+        <a:defRPr sz="1400" b="0" i="0" u="none" strike="noStrike" cap="none">
           <a:solidFill>
             <a:srgbClr val="000000"/>
           </a:solidFill>
-          <a:latin typeface="Arial"/>
-          <a:ea typeface="Arial"/>
-          <a:cs typeface="Arial"/>
-          <a:sym typeface="Arial"/>
+          <a:latin typeface="Arial" panose="020B0604020202020204"/>
+          <a:ea typeface="Arial" panose="020B0604020202020204"/>
+          <a:cs typeface="Arial" panose="020B0604020202020204"/>
+          <a:sym typeface="Arial" panose="020B0604020202020204"/>
         </a:defRPr>
       </a:lvl4pPr>
-      <a:lvl5pPr lvl="4" marR="0" rtl="0" algn="l">
+      <a:lvl5pPr marR="0" lvl="4" algn="l" rtl="0">
         <a:lnSpc>
           <a:spcPct val="100000"/>
         </a:lnSpc>
@@ -10578,18 +10592,18 @@
         <a:buClr>
           <a:srgbClr val="000000"/>
         </a:buClr>
-        <a:buFont typeface="Arial"/>
-        <a:defRPr b="0" i="0" sz="1400" u="none" cap="none" strike="noStrike">
+        <a:buFont typeface="Arial" panose="020B0604020202020204"/>
+        <a:defRPr sz="1400" b="0" i="0" u="none" strike="noStrike" cap="none">
           <a:solidFill>
             <a:srgbClr val="000000"/>
           </a:solidFill>
-          <a:latin typeface="Arial"/>
-          <a:ea typeface="Arial"/>
-          <a:cs typeface="Arial"/>
-          <a:sym typeface="Arial"/>
+          <a:latin typeface="Arial" panose="020B0604020202020204"/>
+          <a:ea typeface="Arial" panose="020B0604020202020204"/>
+          <a:cs typeface="Arial" panose="020B0604020202020204"/>
+          <a:sym typeface="Arial" panose="020B0604020202020204"/>
         </a:defRPr>
       </a:lvl5pPr>
-      <a:lvl6pPr lvl="5" marR="0" rtl="0" algn="l">
+      <a:lvl6pPr marR="0" lvl="5" algn="l" rtl="0">
         <a:lnSpc>
           <a:spcPct val="100000"/>
         </a:lnSpc>
@@ -10602,18 +10616,18 @@
         <a:buClr>
           <a:srgbClr val="000000"/>
         </a:buClr>
-        <a:buFont typeface="Arial"/>
-        <a:defRPr b="0" i="0" sz="1400" u="none" cap="none" strike="noStrike">
+        <a:buFont typeface="Arial" panose="020B0604020202020204"/>
+        <a:defRPr sz="1400" b="0" i="0" u="none" strike="noStrike" cap="none">
           <a:solidFill>
             <a:srgbClr val="000000"/>
           </a:solidFill>
-          <a:latin typeface="Arial"/>
-          <a:ea typeface="Arial"/>
-          <a:cs typeface="Arial"/>
-          <a:sym typeface="Arial"/>
+          <a:latin typeface="Arial" panose="020B0604020202020204"/>
+          <a:ea typeface="Arial" panose="020B0604020202020204"/>
+          <a:cs typeface="Arial" panose="020B0604020202020204"/>
+          <a:sym typeface="Arial" panose="020B0604020202020204"/>
         </a:defRPr>
       </a:lvl6pPr>
-      <a:lvl7pPr lvl="6" marR="0" rtl="0" algn="l">
+      <a:lvl7pPr marR="0" lvl="6" algn="l" rtl="0">
         <a:lnSpc>
           <a:spcPct val="100000"/>
         </a:lnSpc>
@@ -10626,18 +10640,18 @@
         <a:buClr>
           <a:srgbClr val="000000"/>
         </a:buClr>
-        <a:buFont typeface="Arial"/>
-        <a:defRPr b="0" i="0" sz="1400" u="none" cap="none" strike="noStrike">
+        <a:buFont typeface="Arial" panose="020B0604020202020204"/>
+        <a:defRPr sz="1400" b="0" i="0" u="none" strike="noStrike" cap="none">
           <a:solidFill>
             <a:srgbClr val="000000"/>
           </a:solidFill>
-          <a:latin typeface="Arial"/>
-          <a:ea typeface="Arial"/>
-          <a:cs typeface="Arial"/>
-          <a:sym typeface="Arial"/>
+          <a:latin typeface="Arial" panose="020B0604020202020204"/>
+          <a:ea typeface="Arial" panose="020B0604020202020204"/>
+          <a:cs typeface="Arial" panose="020B0604020202020204"/>
+          <a:sym typeface="Arial" panose="020B0604020202020204"/>
         </a:defRPr>
       </a:lvl7pPr>
-      <a:lvl8pPr lvl="7" marR="0" rtl="0" algn="l">
+      <a:lvl8pPr marR="0" lvl="7" algn="l" rtl="0">
         <a:lnSpc>
           <a:spcPct val="100000"/>
         </a:lnSpc>
@@ -10650,18 +10664,18 @@
         <a:buClr>
           <a:srgbClr val="000000"/>
         </a:buClr>
-        <a:buFont typeface="Arial"/>
-        <a:defRPr b="0" i="0" sz="1400" u="none" cap="none" strike="noStrike">
+        <a:buFont typeface="Arial" panose="020B0604020202020204"/>
+        <a:defRPr sz="1400" b="0" i="0" u="none" strike="noStrike" cap="none">
           <a:solidFill>
             <a:srgbClr val="000000"/>
           </a:solidFill>
-          <a:latin typeface="Arial"/>
-          <a:ea typeface="Arial"/>
-          <a:cs typeface="Arial"/>
-          <a:sym typeface="Arial"/>
+          <a:latin typeface="Arial" panose="020B0604020202020204"/>
+          <a:ea typeface="Arial" panose="020B0604020202020204"/>
+          <a:cs typeface="Arial" panose="020B0604020202020204"/>
+          <a:sym typeface="Arial" panose="020B0604020202020204"/>
         </a:defRPr>
       </a:lvl8pPr>
-      <a:lvl9pPr lvl="8" marR="0" rtl="0" algn="l">
+      <a:lvl9pPr marR="0" lvl="8" algn="l" rtl="0">
         <a:lnSpc>
           <a:spcPct val="100000"/>
         </a:lnSpc>
@@ -10674,20 +10688,20 @@
         <a:buClr>
           <a:srgbClr val="000000"/>
         </a:buClr>
-        <a:buFont typeface="Arial"/>
-        <a:defRPr b="0" i="0" sz="1400" u="none" cap="none" strike="noStrike">
+        <a:buFont typeface="Arial" panose="020B0604020202020204"/>
+        <a:defRPr sz="1400" b="0" i="0" u="none" strike="noStrike" cap="none">
           <a:solidFill>
             <a:srgbClr val="000000"/>
           </a:solidFill>
-          <a:latin typeface="Arial"/>
-          <a:ea typeface="Arial"/>
-          <a:cs typeface="Arial"/>
-          <a:sym typeface="Arial"/>
+          <a:latin typeface="Arial" panose="020B0604020202020204"/>
+          <a:ea typeface="Arial" panose="020B0604020202020204"/>
+          <a:cs typeface="Arial" panose="020B0604020202020204"/>
+          <a:sym typeface="Arial" panose="020B0604020202020204"/>
         </a:defRPr>
       </a:lvl9pPr>
     </p:bodyStyle>
     <p:otherStyle>
-      <a:defPPr lvl="0" marR="0" rtl="0" algn="l">
+      <a:defPPr marR="0" lvl="0" algn="l" rtl="0">
         <a:lnSpc>
           <a:spcPct val="100000"/>
         </a:lnSpc>
@@ -10698,7 +10712,7 @@
           <a:spcPts val="0"/>
         </a:spcAft>
       </a:defPPr>
-      <a:lvl1pPr lvl="0" marR="0" rtl="0" algn="l">
+      <a:lvl1pPr marR="0" lvl="0" algn="l" rtl="0">
         <a:lnSpc>
           <a:spcPct val="100000"/>
         </a:lnSpc>
@@ -10711,18 +10725,18 @@
         <a:buClr>
           <a:srgbClr val="000000"/>
         </a:buClr>
-        <a:buFont typeface="Arial"/>
-        <a:defRPr b="0" i="0" sz="1400" u="none" cap="none" strike="noStrike">
+        <a:buFont typeface="Arial" panose="020B0604020202020204"/>
+        <a:defRPr sz="1400" b="0" i="0" u="none" strike="noStrike" cap="none">
           <a:solidFill>
             <a:srgbClr val="000000"/>
           </a:solidFill>
-          <a:latin typeface="Arial"/>
-          <a:ea typeface="Arial"/>
-          <a:cs typeface="Arial"/>
-          <a:sym typeface="Arial"/>
+          <a:latin typeface="Arial" panose="020B0604020202020204"/>
+          <a:ea typeface="Arial" panose="020B0604020202020204"/>
+          <a:cs typeface="Arial" panose="020B0604020202020204"/>
+          <a:sym typeface="Arial" panose="020B0604020202020204"/>
         </a:defRPr>
       </a:lvl1pPr>
-      <a:lvl2pPr lvl="1" marR="0" rtl="0" algn="l">
+      <a:lvl2pPr marR="0" lvl="1" algn="l" rtl="0">
         <a:lnSpc>
           <a:spcPct val="100000"/>
         </a:lnSpc>
@@ -10735,18 +10749,18 @@
         <a:buClr>
           <a:srgbClr val="000000"/>
         </a:buClr>
-        <a:buFont typeface="Arial"/>
-        <a:defRPr b="0" i="0" sz="1400" u="none" cap="none" strike="noStrike">
+        <a:buFont typeface="Arial" panose="020B0604020202020204"/>
+        <a:defRPr sz="1400" b="0" i="0" u="none" strike="noStrike" cap="none">
           <a:solidFill>
             <a:srgbClr val="000000"/>
           </a:solidFill>
-          <a:latin typeface="Arial"/>
-          <a:ea typeface="Arial"/>
-          <a:cs typeface="Arial"/>
-          <a:sym typeface="Arial"/>
+          <a:latin typeface="Arial" panose="020B0604020202020204"/>
+          <a:ea typeface="Arial" panose="020B0604020202020204"/>
+          <a:cs typeface="Arial" panose="020B0604020202020204"/>
+          <a:sym typeface="Arial" panose="020B0604020202020204"/>
         </a:defRPr>
       </a:lvl2pPr>
-      <a:lvl3pPr lvl="2" marR="0" rtl="0" algn="l">
+      <a:lvl3pPr marR="0" lvl="2" algn="l" rtl="0">
         <a:lnSpc>
           <a:spcPct val="100000"/>
         </a:lnSpc>
@@ -10759,18 +10773,18 @@
         <a:buClr>
           <a:srgbClr val="000000"/>
         </a:buClr>
-        <a:buFont typeface="Arial"/>
-        <a:defRPr b="0" i="0" sz="1400" u="none" cap="none" strike="noStrike">
+        <a:buFont typeface="Arial" panose="020B0604020202020204"/>
+        <a:defRPr sz="1400" b="0" i="0" u="none" strike="noStrike" cap="none">
           <a:solidFill>
             <a:srgbClr val="000000"/>
           </a:solidFill>
-          <a:latin typeface="Arial"/>
-          <a:ea typeface="Arial"/>
-          <a:cs typeface="Arial"/>
-          <a:sym typeface="Arial"/>
+          <a:latin typeface="Arial" panose="020B0604020202020204"/>
+          <a:ea typeface="Arial" panose="020B0604020202020204"/>
+          <a:cs typeface="Arial" panose="020B0604020202020204"/>
+          <a:sym typeface="Arial" panose="020B0604020202020204"/>
         </a:defRPr>
       </a:lvl3pPr>
-      <a:lvl4pPr lvl="3" marR="0" rtl="0" algn="l">
+      <a:lvl4pPr marR="0" lvl="3" algn="l" rtl="0">
         <a:lnSpc>
           <a:spcPct val="100000"/>
         </a:lnSpc>
@@ -10783,18 +10797,18 @@
         <a:buClr>
           <a:srgbClr val="000000"/>
         </a:buClr>
-        <a:buFont typeface="Arial"/>
-        <a:defRPr b="0" i="0" sz="1400" u="none" cap="none" strike="noStrike">
+        <a:buFont typeface="Arial" panose="020B0604020202020204"/>
+        <a:defRPr sz="1400" b="0" i="0" u="none" strike="noStrike" cap="none">
           <a:solidFill>
             <a:srgbClr val="000000"/>
           </a:solidFill>
-          <a:latin typeface="Arial"/>
-          <a:ea typeface="Arial"/>
-          <a:cs typeface="Arial"/>
-          <a:sym typeface="Arial"/>
+          <a:latin typeface="Arial" panose="020B0604020202020204"/>
+          <a:ea typeface="Arial" panose="020B0604020202020204"/>
+          <a:cs typeface="Arial" panose="020B0604020202020204"/>
+          <a:sym typeface="Arial" panose="020B0604020202020204"/>
         </a:defRPr>
       </a:lvl4pPr>
-      <a:lvl5pPr lvl="4" marR="0" rtl="0" algn="l">
+      <a:lvl5pPr marR="0" lvl="4" algn="l" rtl="0">
         <a:lnSpc>
           <a:spcPct val="100000"/>
         </a:lnSpc>
@@ -10807,18 +10821,18 @@
         <a:buClr>
           <a:srgbClr val="000000"/>
         </a:buClr>
-        <a:buFont typeface="Arial"/>
-        <a:defRPr b="0" i="0" sz="1400" u="none" cap="none" strike="noStrike">
+        <a:buFont typeface="Arial" panose="020B0604020202020204"/>
+        <a:defRPr sz="1400" b="0" i="0" u="none" strike="noStrike" cap="none">
           <a:solidFill>
             <a:srgbClr val="000000"/>
           </a:solidFill>
-          <a:latin typeface="Arial"/>
-          <a:ea typeface="Arial"/>
-          <a:cs typeface="Arial"/>
-          <a:sym typeface="Arial"/>
+          <a:latin typeface="Arial" panose="020B0604020202020204"/>
+          <a:ea typeface="Arial" panose="020B0604020202020204"/>
+          <a:cs typeface="Arial" panose="020B0604020202020204"/>
+          <a:sym typeface="Arial" panose="020B0604020202020204"/>
         </a:defRPr>
       </a:lvl5pPr>
-      <a:lvl6pPr lvl="5" marR="0" rtl="0" algn="l">
+      <a:lvl6pPr marR="0" lvl="5" algn="l" rtl="0">
         <a:lnSpc>
           <a:spcPct val="100000"/>
         </a:lnSpc>
@@ -10831,18 +10845,18 @@
         <a:buClr>
           <a:srgbClr val="000000"/>
         </a:buClr>
-        <a:buFont typeface="Arial"/>
-        <a:defRPr b="0" i="0" sz="1400" u="none" cap="none" strike="noStrike">
+        <a:buFont typeface="Arial" panose="020B0604020202020204"/>
+        <a:defRPr sz="1400" b="0" i="0" u="none" strike="noStrike" cap="none">
           <a:solidFill>
             <a:srgbClr val="000000"/>
           </a:solidFill>
-          <a:latin typeface="Arial"/>
-          <a:ea typeface="Arial"/>
-          <a:cs typeface="Arial"/>
-          <a:sym typeface="Arial"/>
+          <a:latin typeface="Arial" panose="020B0604020202020204"/>
+          <a:ea typeface="Arial" panose="020B0604020202020204"/>
+          <a:cs typeface="Arial" panose="020B0604020202020204"/>
+          <a:sym typeface="Arial" panose="020B0604020202020204"/>
         </a:defRPr>
       </a:lvl6pPr>
-      <a:lvl7pPr lvl="6" marR="0" rtl="0" algn="l">
+      <a:lvl7pPr marR="0" lvl="6" algn="l" rtl="0">
         <a:lnSpc>
           <a:spcPct val="100000"/>
         </a:lnSpc>
@@ -10855,18 +10869,18 @@
         <a:buClr>
           <a:srgbClr val="000000"/>
         </a:buClr>
-        <a:buFont typeface="Arial"/>
-        <a:defRPr b="0" i="0" sz="1400" u="none" cap="none" strike="noStrike">
+        <a:buFont typeface="Arial" panose="020B0604020202020204"/>
+        <a:defRPr sz="1400" b="0" i="0" u="none" strike="noStrike" cap="none">
           <a:solidFill>
             <a:srgbClr val="000000"/>
           </a:solidFill>
-          <a:latin typeface="Arial"/>
-          <a:ea typeface="Arial"/>
-          <a:cs typeface="Arial"/>
-          <a:sym typeface="Arial"/>
+          <a:latin typeface="Arial" panose="020B0604020202020204"/>
+          <a:ea typeface="Arial" panose="020B0604020202020204"/>
+          <a:cs typeface="Arial" panose="020B0604020202020204"/>
+          <a:sym typeface="Arial" panose="020B0604020202020204"/>
         </a:defRPr>
       </a:lvl7pPr>
-      <a:lvl8pPr lvl="7" marR="0" rtl="0" algn="l">
+      <a:lvl8pPr marR="0" lvl="7" algn="l" rtl="0">
         <a:lnSpc>
           <a:spcPct val="100000"/>
         </a:lnSpc>
@@ -10879,18 +10893,18 @@
         <a:buClr>
           <a:srgbClr val="000000"/>
         </a:buClr>
-        <a:buFont typeface="Arial"/>
-        <a:defRPr b="0" i="0" sz="1400" u="none" cap="none" strike="noStrike">
+        <a:buFont typeface="Arial" panose="020B0604020202020204"/>
+        <a:defRPr sz="1400" b="0" i="0" u="none" strike="noStrike" cap="none">
           <a:solidFill>
             <a:srgbClr val="000000"/>
           </a:solidFill>
-          <a:latin typeface="Arial"/>
-          <a:ea typeface="Arial"/>
-          <a:cs typeface="Arial"/>
-          <a:sym typeface="Arial"/>
+          <a:latin typeface="Arial" panose="020B0604020202020204"/>
+          <a:ea typeface="Arial" panose="020B0604020202020204"/>
+          <a:cs typeface="Arial" panose="020B0604020202020204"/>
+          <a:sym typeface="Arial" panose="020B0604020202020204"/>
         </a:defRPr>
       </a:lvl8pPr>
-      <a:lvl9pPr lvl="8" marR="0" rtl="0" algn="l">
+      <a:lvl9pPr marR="0" lvl="8" algn="l" rtl="0">
         <a:lnSpc>
           <a:spcPct val="100000"/>
         </a:lnSpc>
@@ -10903,15 +10917,15 @@
         <a:buClr>
           <a:srgbClr val="000000"/>
         </a:buClr>
-        <a:buFont typeface="Arial"/>
-        <a:defRPr b="0" i="0" sz="1400" u="none" cap="none" strike="noStrike">
+        <a:buFont typeface="Arial" panose="020B0604020202020204"/>
+        <a:defRPr sz="1400" b="0" i="0" u="none" strike="noStrike" cap="none">
           <a:solidFill>
             <a:srgbClr val="000000"/>
           </a:solidFill>
-          <a:latin typeface="Arial"/>
-          <a:ea typeface="Arial"/>
-          <a:cs typeface="Arial"/>
-          <a:sym typeface="Arial"/>
+          <a:latin typeface="Arial" panose="020B0604020202020204"/>
+          <a:ea typeface="Arial" panose="020B0604020202020204"/>
+          <a:cs typeface="Arial" panose="020B0604020202020204"/>
+          <a:sym typeface="Arial" panose="020B0604020202020204"/>
         </a:defRPr>
       </a:lvl9pPr>
     </p:otherStyle>
@@ -10920,8 +10934,8 @@
 </file>
 
 <file path=ppt/slideMasters/slideMaster2.xml><?xml version="1.0" encoding="utf-8"?>
-<p:sldMaster xmlns:a="http://schemas.openxmlformats.org/drawingml/2006/main" xmlns:r="http://schemas.openxmlformats.org/officeDocument/2006/relationships" xmlns:mc="http://schemas.openxmlformats.org/markup-compatibility/2006" xmlns:mv="urn:schemas-microsoft-com:mac:vml" xmlns:p="http://schemas.openxmlformats.org/presentationml/2006/main" xmlns:c="http://schemas.openxmlformats.org/drawingml/2006/chart" xmlns:dgm="http://schemas.openxmlformats.org/drawingml/2006/diagram" xmlns:o="urn:schemas-microsoft-com:office:office" xmlns:v="urn:schemas-microsoft-com:vml" xmlns:pvml="urn:schemas-microsoft-com:office:powerpoint" xmlns:com="http://schemas.openxmlformats.org/drawingml/2006/compatibility" xmlns:p14="http://schemas.microsoft.com/office/powerpoint/2010/main" xmlns:p15="http://schemas.microsoft.com/office/powerpoint/2012/main" xmlns:ahyp="http://schemas.microsoft.com/office/drawing/2018/hyperlinkcolor">
-  <p:cSld name="默认主题">
+<p:sldMaster xmlns:a="http://schemas.openxmlformats.org/drawingml/2006/main" xmlns:r="http://schemas.openxmlformats.org/officeDocument/2006/relationships" xmlns:p="http://schemas.openxmlformats.org/presentationml/2006/main">
+  <p:cSld>
     <p:bg>
       <p:bgPr>
         <a:solidFill>
@@ -10929,6 +10943,7 @@
             <a:alpha val="100000"/>
           </a:srgbClr>
         </a:solidFill>
+        <a:effectLst/>
       </p:bgPr>
     </p:bg>
     <p:spTree>
@@ -10947,14 +10962,14 @@
       </p:grpSpPr>
     </p:spTree>
   </p:cSld>
-  <p:clrMap accent1="accent1" accent2="accent2" accent3="accent3" accent4="accent4" accent5="accent5" accent6="accent6" bg1="lt1" bg2="dk2" tx1="dk1" tx2="lt2" folHlink="folHlink" hlink="hlink"/>
+  <p:clrMap bg1="lt1" tx1="dk1" bg2="dk2" tx2="lt2" accent1="accent1" accent2="accent2" accent3="accent3" accent4="accent4" accent5="accent5" accent6="accent6" hlink="hlink" folHlink="folHlink"/>
   <p:sldLayoutIdLst>
-    <p:sldLayoutId id="2157483699" r:id="rId2"/>
+    <p:sldLayoutId id="2147483661" r:id="rId1"/>
   </p:sldLayoutIdLst>
-  <p:hf dt="0" ftr="0" hdr="0" sldNum="0"/>
+  <p:hf sldNum="0" hdr="0" ftr="0" dt="0"/>
   <p:txStyles>
     <p:titleStyle>
-      <a:defPPr lvl="0" marR="0" rtl="0" algn="l">
+      <a:defPPr marR="0" lvl="0" algn="l" rtl="0">
         <a:lnSpc>
           <a:spcPct val="100000"/>
         </a:lnSpc>
@@ -10965,7 +10980,7 @@
           <a:spcPts val="0"/>
         </a:spcAft>
       </a:defPPr>
-      <a:lvl1pPr lvl="0" marR="0" rtl="0" algn="l">
+      <a:lvl1pPr marR="0" lvl="0" algn="l" rtl="0">
         <a:lnSpc>
           <a:spcPct val="100000"/>
         </a:lnSpc>
@@ -10978,18 +10993,18 @@
         <a:buClr>
           <a:srgbClr val="000000"/>
         </a:buClr>
-        <a:buFont typeface="Arial"/>
-        <a:defRPr b="0" i="0" sz="1400" u="none" cap="none" strike="noStrike">
+        <a:buFont typeface="Arial" panose="020B0604020202020204"/>
+        <a:defRPr sz="1400" b="0" i="0" u="none" strike="noStrike" cap="none">
           <a:solidFill>
             <a:srgbClr val="000000"/>
           </a:solidFill>
-          <a:latin typeface="Arial"/>
-          <a:ea typeface="Arial"/>
-          <a:cs typeface="Arial"/>
-          <a:sym typeface="Arial"/>
+          <a:latin typeface="Arial" panose="020B0604020202020204"/>
+          <a:ea typeface="Arial" panose="020B0604020202020204"/>
+          <a:cs typeface="Arial" panose="020B0604020202020204"/>
+          <a:sym typeface="Arial" panose="020B0604020202020204"/>
         </a:defRPr>
       </a:lvl1pPr>
-      <a:lvl2pPr lvl="1" marR="0" rtl="0" algn="l">
+      <a:lvl2pPr marR="0" lvl="1" algn="l" rtl="0">
         <a:lnSpc>
           <a:spcPct val="100000"/>
         </a:lnSpc>
@@ -11002,18 +11017,18 @@
         <a:buClr>
           <a:srgbClr val="000000"/>
         </a:buClr>
-        <a:buFont typeface="Arial"/>
-        <a:defRPr b="0" i="0" sz="1400" u="none" cap="none" strike="noStrike">
+        <a:buFont typeface="Arial" panose="020B0604020202020204"/>
+        <a:defRPr sz="1400" b="0" i="0" u="none" strike="noStrike" cap="none">
           <a:solidFill>
             <a:srgbClr val="000000"/>
           </a:solidFill>
-          <a:latin typeface="Arial"/>
-          <a:ea typeface="Arial"/>
-          <a:cs typeface="Arial"/>
-          <a:sym typeface="Arial"/>
+          <a:latin typeface="Arial" panose="020B0604020202020204"/>
+          <a:ea typeface="Arial" panose="020B0604020202020204"/>
+          <a:cs typeface="Arial" panose="020B0604020202020204"/>
+          <a:sym typeface="Arial" panose="020B0604020202020204"/>
         </a:defRPr>
       </a:lvl2pPr>
-      <a:lvl3pPr lvl="2" marR="0" rtl="0" algn="l">
+      <a:lvl3pPr marR="0" lvl="2" algn="l" rtl="0">
         <a:lnSpc>
           <a:spcPct val="100000"/>
         </a:lnSpc>
@@ -11026,18 +11041,18 @@
         <a:buClr>
           <a:srgbClr val="000000"/>
         </a:buClr>
-        <a:buFont typeface="Arial"/>
-        <a:defRPr b="0" i="0" sz="1400" u="none" cap="none" strike="noStrike">
+        <a:buFont typeface="Arial" panose="020B0604020202020204"/>
+        <a:defRPr sz="1400" b="0" i="0" u="none" strike="noStrike" cap="none">
           <a:solidFill>
             <a:srgbClr val="000000"/>
           </a:solidFill>
-          <a:latin typeface="Arial"/>
-          <a:ea typeface="Arial"/>
-          <a:cs typeface="Arial"/>
-          <a:sym typeface="Arial"/>
+          <a:latin typeface="Arial" panose="020B0604020202020204"/>
+          <a:ea typeface="Arial" panose="020B0604020202020204"/>
+          <a:cs typeface="Arial" panose="020B0604020202020204"/>
+          <a:sym typeface="Arial" panose="020B0604020202020204"/>
         </a:defRPr>
       </a:lvl3pPr>
-      <a:lvl4pPr lvl="3" marR="0" rtl="0" algn="l">
+      <a:lvl4pPr marR="0" lvl="3" algn="l" rtl="0">
         <a:lnSpc>
           <a:spcPct val="100000"/>
         </a:lnSpc>
@@ -11050,18 +11065,18 @@
         <a:buClr>
           <a:srgbClr val="000000"/>
         </a:buClr>
-        <a:buFont typeface="Arial"/>
-        <a:defRPr b="0" i="0" sz="1400" u="none" cap="none" strike="noStrike">
+        <a:buFont typeface="Arial" panose="020B0604020202020204"/>
+        <a:defRPr sz="1400" b="0" i="0" u="none" strike="noStrike" cap="none">
           <a:solidFill>
             <a:srgbClr val="000000"/>
           </a:solidFill>
-          <a:latin typeface="Arial"/>
-          <a:ea typeface="Arial"/>
-          <a:cs typeface="Arial"/>
-          <a:sym typeface="Arial"/>
+          <a:latin typeface="Arial" panose="020B0604020202020204"/>
+          <a:ea typeface="Arial" panose="020B0604020202020204"/>
+          <a:cs typeface="Arial" panose="020B0604020202020204"/>
+          <a:sym typeface="Arial" panose="020B0604020202020204"/>
         </a:defRPr>
       </a:lvl4pPr>
-      <a:lvl5pPr lvl="4" marR="0" rtl="0" algn="l">
+      <a:lvl5pPr marR="0" lvl="4" algn="l" rtl="0">
         <a:lnSpc>
           <a:spcPct val="100000"/>
         </a:lnSpc>
@@ -11074,18 +11089,18 @@
         <a:buClr>
           <a:srgbClr val="000000"/>
         </a:buClr>
-        <a:buFont typeface="Arial"/>
-        <a:defRPr b="0" i="0" sz="1400" u="none" cap="none" strike="noStrike">
+        <a:buFont typeface="Arial" panose="020B0604020202020204"/>
+        <a:defRPr sz="1400" b="0" i="0" u="none" strike="noStrike" cap="none">
           <a:solidFill>
             <a:srgbClr val="000000"/>
           </a:solidFill>
-          <a:latin typeface="Arial"/>
-          <a:ea typeface="Arial"/>
-          <a:cs typeface="Arial"/>
-          <a:sym typeface="Arial"/>
+          <a:latin typeface="Arial" panose="020B0604020202020204"/>
+          <a:ea typeface="Arial" panose="020B0604020202020204"/>
+          <a:cs typeface="Arial" panose="020B0604020202020204"/>
+          <a:sym typeface="Arial" panose="020B0604020202020204"/>
         </a:defRPr>
       </a:lvl5pPr>
-      <a:lvl6pPr lvl="5" marR="0" rtl="0" algn="l">
+      <a:lvl6pPr marR="0" lvl="5" algn="l" rtl="0">
         <a:lnSpc>
           <a:spcPct val="100000"/>
         </a:lnSpc>
@@ -11098,18 +11113,18 @@
         <a:buClr>
           <a:srgbClr val="000000"/>
         </a:buClr>
-        <a:buFont typeface="Arial"/>
-        <a:defRPr b="0" i="0" sz="1400" u="none" cap="none" strike="noStrike">
+        <a:buFont typeface="Arial" panose="020B0604020202020204"/>
+        <a:defRPr sz="1400" b="0" i="0" u="none" strike="noStrike" cap="none">
           <a:solidFill>
             <a:srgbClr val="000000"/>
           </a:solidFill>
-          <a:latin typeface="Arial"/>
-          <a:ea typeface="Arial"/>
-          <a:cs typeface="Arial"/>
-          <a:sym typeface="Arial"/>
+          <a:latin typeface="Arial" panose="020B0604020202020204"/>
+          <a:ea typeface="Arial" panose="020B0604020202020204"/>
+          <a:cs typeface="Arial" panose="020B0604020202020204"/>
+          <a:sym typeface="Arial" panose="020B0604020202020204"/>
         </a:defRPr>
       </a:lvl6pPr>
-      <a:lvl7pPr lvl="6" marR="0" rtl="0" algn="l">
+      <a:lvl7pPr marR="0" lvl="6" algn="l" rtl="0">
         <a:lnSpc>
           <a:spcPct val="100000"/>
         </a:lnSpc>
@@ -11122,18 +11137,18 @@
         <a:buClr>
           <a:srgbClr val="000000"/>
         </a:buClr>
-        <a:buFont typeface="Arial"/>
-        <a:defRPr b="0" i="0" sz="1400" u="none" cap="none" strike="noStrike">
+        <a:buFont typeface="Arial" panose="020B0604020202020204"/>
+        <a:defRPr sz="1400" b="0" i="0" u="none" strike="noStrike" cap="none">
           <a:solidFill>
             <a:srgbClr val="000000"/>
           </a:solidFill>
-          <a:latin typeface="Arial"/>
-          <a:ea typeface="Arial"/>
-          <a:cs typeface="Arial"/>
-          <a:sym typeface="Arial"/>
+          <a:latin typeface="Arial" panose="020B0604020202020204"/>
+          <a:ea typeface="Arial" panose="020B0604020202020204"/>
+          <a:cs typeface="Arial" panose="020B0604020202020204"/>
+          <a:sym typeface="Arial" panose="020B0604020202020204"/>
         </a:defRPr>
       </a:lvl7pPr>
-      <a:lvl8pPr lvl="7" marR="0" rtl="0" algn="l">
+      <a:lvl8pPr marR="0" lvl="7" algn="l" rtl="0">
         <a:lnSpc>
           <a:spcPct val="100000"/>
         </a:lnSpc>
@@ -11146,18 +11161,18 @@
         <a:buClr>
           <a:srgbClr val="000000"/>
         </a:buClr>
-        <a:buFont typeface="Arial"/>
-        <a:defRPr b="0" i="0" sz="1400" u="none" cap="none" strike="noStrike">
+        <a:buFont typeface="Arial" panose="020B0604020202020204"/>
+        <a:defRPr sz="1400" b="0" i="0" u="none" strike="noStrike" cap="none">
           <a:solidFill>
             <a:srgbClr val="000000"/>
           </a:solidFill>
-          <a:latin typeface="Arial"/>
-          <a:ea typeface="Arial"/>
-          <a:cs typeface="Arial"/>
-          <a:sym typeface="Arial"/>
+          <a:latin typeface="Arial" panose="020B0604020202020204"/>
+          <a:ea typeface="Arial" panose="020B0604020202020204"/>
+          <a:cs typeface="Arial" panose="020B0604020202020204"/>
+          <a:sym typeface="Arial" panose="020B0604020202020204"/>
         </a:defRPr>
       </a:lvl8pPr>
-      <a:lvl9pPr lvl="8" marR="0" rtl="0" algn="l">
+      <a:lvl9pPr marR="0" lvl="8" algn="l" rtl="0">
         <a:lnSpc>
           <a:spcPct val="100000"/>
         </a:lnSpc>
@@ -11170,20 +11185,20 @@
         <a:buClr>
           <a:srgbClr val="000000"/>
         </a:buClr>
-        <a:buFont typeface="Arial"/>
-        <a:defRPr b="0" i="0" sz="1400" u="none" cap="none" strike="noStrike">
+        <a:buFont typeface="Arial" panose="020B0604020202020204"/>
+        <a:defRPr sz="1400" b="0" i="0" u="none" strike="noStrike" cap="none">
           <a:solidFill>
             <a:srgbClr val="000000"/>
           </a:solidFill>
-          <a:latin typeface="Arial"/>
-          <a:ea typeface="Arial"/>
-          <a:cs typeface="Arial"/>
-          <a:sym typeface="Arial"/>
+          <a:latin typeface="Arial" panose="020B0604020202020204"/>
+          <a:ea typeface="Arial" panose="020B0604020202020204"/>
+          <a:cs typeface="Arial" panose="020B0604020202020204"/>
+          <a:sym typeface="Arial" panose="020B0604020202020204"/>
         </a:defRPr>
       </a:lvl9pPr>
     </p:titleStyle>
     <p:bodyStyle>
-      <a:defPPr lvl="0" marR="0" rtl="0" algn="l">
+      <a:defPPr marR="0" lvl="0" algn="l" rtl="0">
         <a:lnSpc>
           <a:spcPct val="100000"/>
         </a:lnSpc>
@@ -11194,7 +11209,7 @@
           <a:spcPts val="0"/>
         </a:spcAft>
       </a:defPPr>
-      <a:lvl1pPr lvl="0" marR="0" rtl="0" algn="l">
+      <a:lvl1pPr marR="0" lvl="0" algn="l" rtl="0">
         <a:lnSpc>
           <a:spcPct val="100000"/>
         </a:lnSpc>
@@ -11207,18 +11222,18 @@
         <a:buClr>
           <a:srgbClr val="000000"/>
         </a:buClr>
-        <a:buFont typeface="Arial"/>
-        <a:defRPr b="0" i="0" sz="1400" u="none" cap="none" strike="noStrike">
+        <a:buFont typeface="Arial" panose="020B0604020202020204"/>
+        <a:defRPr sz="1400" b="0" i="0" u="none" strike="noStrike" cap="none">
           <a:solidFill>
             <a:srgbClr val="000000"/>
           </a:solidFill>
-          <a:latin typeface="Arial"/>
-          <a:ea typeface="Arial"/>
-          <a:cs typeface="Arial"/>
-          <a:sym typeface="Arial"/>
+          <a:latin typeface="Arial" panose="020B0604020202020204"/>
+          <a:ea typeface="Arial" panose="020B0604020202020204"/>
+          <a:cs typeface="Arial" panose="020B0604020202020204"/>
+          <a:sym typeface="Arial" panose="020B0604020202020204"/>
         </a:defRPr>
       </a:lvl1pPr>
-      <a:lvl2pPr lvl="1" marR="0" rtl="0" algn="l">
+      <a:lvl2pPr marR="0" lvl="1" algn="l" rtl="0">
         <a:lnSpc>
           <a:spcPct val="100000"/>
         </a:lnSpc>
@@ -11231,18 +11246,18 @@
         <a:buClr>
           <a:srgbClr val="000000"/>
         </a:buClr>
-        <a:buFont typeface="Arial"/>
-        <a:defRPr b="0" i="0" sz="1400" u="none" cap="none" strike="noStrike">
+        <a:buFont typeface="Arial" panose="020B0604020202020204"/>
+        <a:defRPr sz="1400" b="0" i="0" u="none" strike="noStrike" cap="none">
           <a:solidFill>
             <a:srgbClr val="000000"/>
           </a:solidFill>
-          <a:latin typeface="Arial"/>
-          <a:ea typeface="Arial"/>
-          <a:cs typeface="Arial"/>
-          <a:sym typeface="Arial"/>
+          <a:latin typeface="Arial" panose="020B0604020202020204"/>
+          <a:ea typeface="Arial" panose="020B0604020202020204"/>
+          <a:cs typeface="Arial" panose="020B0604020202020204"/>
+          <a:sym typeface="Arial" panose="020B0604020202020204"/>
         </a:defRPr>
       </a:lvl2pPr>
-      <a:lvl3pPr lvl="2" marR="0" rtl="0" algn="l">
+      <a:lvl3pPr marR="0" lvl="2" algn="l" rtl="0">
         <a:lnSpc>
           <a:spcPct val="100000"/>
         </a:lnSpc>
@@ -11255,18 +11270,18 @@
         <a:buClr>
           <a:srgbClr val="000000"/>
         </a:buClr>
-        <a:buFont typeface="Arial"/>
-        <a:defRPr b="0" i="0" sz="1400" u="none" cap="none" strike="noStrike">
+        <a:buFont typeface="Arial" panose="020B0604020202020204"/>
+        <a:defRPr sz="1400" b="0" i="0" u="none" strike="noStrike" cap="none">
           <a:solidFill>
             <a:srgbClr val="000000"/>
           </a:solidFill>
-          <a:latin typeface="Arial"/>
-          <a:ea typeface="Arial"/>
-          <a:cs typeface="Arial"/>
-          <a:sym typeface="Arial"/>
+          <a:latin typeface="Arial" panose="020B0604020202020204"/>
+          <a:ea typeface="Arial" panose="020B0604020202020204"/>
+          <a:cs typeface="Arial" panose="020B0604020202020204"/>
+          <a:sym typeface="Arial" panose="020B0604020202020204"/>
         </a:defRPr>
       </a:lvl3pPr>
-      <a:lvl4pPr lvl="3" marR="0" rtl="0" algn="l">
+      <a:lvl4pPr marR="0" lvl="3" algn="l" rtl="0">
         <a:lnSpc>
           <a:spcPct val="100000"/>
         </a:lnSpc>
@@ -11279,18 +11294,18 @@
         <a:buClr>
           <a:srgbClr val="000000"/>
         </a:buClr>
-        <a:buFont typeface="Arial"/>
-        <a:defRPr b="0" i="0" sz="1400" u="none" cap="none" strike="noStrike">
+        <a:buFont typeface="Arial" panose="020B0604020202020204"/>
+        <a:defRPr sz="1400" b="0" i="0" u="none" strike="noStrike" cap="none">
           <a:solidFill>
             <a:srgbClr val="000000"/>
           </a:solidFill>
-          <a:latin typeface="Arial"/>
-          <a:ea typeface="Arial"/>
-          <a:cs typeface="Arial"/>
-          <a:sym typeface="Arial"/>
+          <a:latin typeface="Arial" panose="020B0604020202020204"/>
+          <a:ea typeface="Arial" panose="020B0604020202020204"/>
+          <a:cs typeface="Arial" panose="020B0604020202020204"/>
+          <a:sym typeface="Arial" panose="020B0604020202020204"/>
         </a:defRPr>
       </a:lvl4pPr>
-      <a:lvl5pPr lvl="4" marR="0" rtl="0" algn="l">
+      <a:lvl5pPr marR="0" lvl="4" algn="l" rtl="0">
         <a:lnSpc>
           <a:spcPct val="100000"/>
         </a:lnSpc>
@@ -11303,18 +11318,18 @@
         <a:buClr>
           <a:srgbClr val="000000"/>
         </a:buClr>
-        <a:buFont typeface="Arial"/>
-        <a:defRPr b="0" i="0" sz="1400" u="none" cap="none" strike="noStrike">
+        <a:buFont typeface="Arial" panose="020B0604020202020204"/>
+        <a:defRPr sz="1400" b="0" i="0" u="none" strike="noStrike" cap="none">
           <a:solidFill>
             <a:srgbClr val="000000"/>
           </a:solidFill>
-          <a:latin typeface="Arial"/>
-          <a:ea typeface="Arial"/>
-          <a:cs typeface="Arial"/>
-          <a:sym typeface="Arial"/>
+          <a:latin typeface="Arial" panose="020B0604020202020204"/>
+          <a:ea typeface="Arial" panose="020B0604020202020204"/>
+          <a:cs typeface="Arial" panose="020B0604020202020204"/>
+          <a:sym typeface="Arial" panose="020B0604020202020204"/>
         </a:defRPr>
       </a:lvl5pPr>
-      <a:lvl6pPr lvl="5" marR="0" rtl="0" algn="l">
+      <a:lvl6pPr marR="0" lvl="5" algn="l" rtl="0">
         <a:lnSpc>
           <a:spcPct val="100000"/>
         </a:lnSpc>
@@ -11327,18 +11342,18 @@
         <a:buClr>
           <a:srgbClr val="000000"/>
         </a:buClr>
-        <a:buFont typeface="Arial"/>
-        <a:defRPr b="0" i="0" sz="1400" u="none" cap="none" strike="noStrike">
+        <a:buFont typeface="Arial" panose="020B0604020202020204"/>
+        <a:defRPr sz="1400" b="0" i="0" u="none" strike="noStrike" cap="none">
           <a:solidFill>
             <a:srgbClr val="000000"/>
           </a:solidFill>
-          <a:latin typeface="Arial"/>
-          <a:ea typeface="Arial"/>
-          <a:cs typeface="Arial"/>
-          <a:sym typeface="Arial"/>
+          <a:latin typeface="Arial" panose="020B0604020202020204"/>
+          <a:ea typeface="Arial" panose="020B0604020202020204"/>
+          <a:cs typeface="Arial" panose="020B0604020202020204"/>
+          <a:sym typeface="Arial" panose="020B0604020202020204"/>
         </a:defRPr>
       </a:lvl6pPr>
-      <a:lvl7pPr lvl="6" marR="0" rtl="0" algn="l">
+      <a:lvl7pPr marR="0" lvl="6" algn="l" rtl="0">
         <a:lnSpc>
           <a:spcPct val="100000"/>
         </a:lnSpc>
@@ -11351,18 +11366,18 @@
         <a:buClr>
           <a:srgbClr val="000000"/>
         </a:buClr>
-        <a:buFont typeface="Arial"/>
-        <a:defRPr b="0" i="0" sz="1400" u="none" cap="none" strike="noStrike">
+        <a:buFont typeface="Arial" panose="020B0604020202020204"/>
+        <a:defRPr sz="1400" b="0" i="0" u="none" strike="noStrike" cap="none">
           <a:solidFill>
             <a:srgbClr val="000000"/>
           </a:solidFill>
-          <a:latin typeface="Arial"/>
-          <a:ea typeface="Arial"/>
-          <a:cs typeface="Arial"/>
-          <a:sym typeface="Arial"/>
+          <a:latin typeface="Arial" panose="020B0604020202020204"/>
+          <a:ea typeface="Arial" panose="020B0604020202020204"/>
+          <a:cs typeface="Arial" panose="020B0604020202020204"/>
+          <a:sym typeface="Arial" panose="020B0604020202020204"/>
         </a:defRPr>
       </a:lvl7pPr>
-      <a:lvl8pPr lvl="7" marR="0" rtl="0" algn="l">
+      <a:lvl8pPr marR="0" lvl="7" algn="l" rtl="0">
         <a:lnSpc>
           <a:spcPct val="100000"/>
         </a:lnSpc>
@@ -11375,18 +11390,18 @@
         <a:buClr>
           <a:srgbClr val="000000"/>
         </a:buClr>
-        <a:buFont typeface="Arial"/>
-        <a:defRPr b="0" i="0" sz="1400" u="none" cap="none" strike="noStrike">
+        <a:buFont typeface="Arial" panose="020B0604020202020204"/>
+        <a:defRPr sz="1400" b="0" i="0" u="none" strike="noStrike" cap="none">
           <a:solidFill>
             <a:srgbClr val="000000"/>
           </a:solidFill>
-          <a:latin typeface="Arial"/>
-          <a:ea typeface="Arial"/>
-          <a:cs typeface="Arial"/>
-          <a:sym typeface="Arial"/>
+          <a:latin typeface="Arial" panose="020B0604020202020204"/>
+          <a:ea typeface="Arial" panose="020B0604020202020204"/>
+          <a:cs typeface="Arial" panose="020B0604020202020204"/>
+          <a:sym typeface="Arial" panose="020B0604020202020204"/>
         </a:defRPr>
       </a:lvl8pPr>
-      <a:lvl9pPr lvl="8" marR="0" rtl="0" algn="l">
+      <a:lvl9pPr marR="0" lvl="8" algn="l" rtl="0">
         <a:lnSpc>
           <a:spcPct val="100000"/>
         </a:lnSpc>
@@ -11399,20 +11414,20 @@
         <a:buClr>
           <a:srgbClr val="000000"/>
         </a:buClr>
-        <a:buFont typeface="Arial"/>
-        <a:defRPr b="0" i="0" sz="1400" u="none" cap="none" strike="noStrike">
+        <a:buFont typeface="Arial" panose="020B0604020202020204"/>
+        <a:defRPr sz="1400" b="0" i="0" u="none" strike="noStrike" cap="none">
           <a:solidFill>
             <a:srgbClr val="000000"/>
           </a:solidFill>
-          <a:latin typeface="Arial"/>
-          <a:ea typeface="Arial"/>
-          <a:cs typeface="Arial"/>
-          <a:sym typeface="Arial"/>
+          <a:latin typeface="Arial" panose="020B0604020202020204"/>
+          <a:ea typeface="Arial" panose="020B0604020202020204"/>
+          <a:cs typeface="Arial" panose="020B0604020202020204"/>
+          <a:sym typeface="Arial" panose="020B0604020202020204"/>
         </a:defRPr>
       </a:lvl9pPr>
     </p:bodyStyle>
     <p:otherStyle>
-      <a:defPPr lvl="0" marR="0" rtl="0" algn="l">
+      <a:defPPr marR="0" lvl="0" algn="l" rtl="0">
         <a:lnSpc>
           <a:spcPct val="100000"/>
         </a:lnSpc>
@@ -11423,7 +11438,7 @@
           <a:spcPts val="0"/>
         </a:spcAft>
       </a:defPPr>
-      <a:lvl1pPr lvl="0" marR="0" rtl="0" algn="l">
+      <a:lvl1pPr marR="0" lvl="0" algn="l" rtl="0">
         <a:lnSpc>
           <a:spcPct val="100000"/>
         </a:lnSpc>
@@ -11436,18 +11451,18 @@
         <a:buClr>
           <a:srgbClr val="000000"/>
         </a:buClr>
-        <a:buFont typeface="Arial"/>
-        <a:defRPr b="0" i="0" sz="1400" u="none" cap="none" strike="noStrike">
+        <a:buFont typeface="Arial" panose="020B0604020202020204"/>
+        <a:defRPr sz="1400" b="0" i="0" u="none" strike="noStrike" cap="none">
           <a:solidFill>
             <a:srgbClr val="000000"/>
           </a:solidFill>
-          <a:latin typeface="Arial"/>
-          <a:ea typeface="Arial"/>
-          <a:cs typeface="Arial"/>
-          <a:sym typeface="Arial"/>
+          <a:latin typeface="Arial" panose="020B0604020202020204"/>
+          <a:ea typeface="Arial" panose="020B0604020202020204"/>
+          <a:cs typeface="Arial" panose="020B0604020202020204"/>
+          <a:sym typeface="Arial" panose="020B0604020202020204"/>
         </a:defRPr>
       </a:lvl1pPr>
-      <a:lvl2pPr lvl="1" marR="0" rtl="0" algn="l">
+      <a:lvl2pPr marR="0" lvl="1" algn="l" rtl="0">
         <a:lnSpc>
           <a:spcPct val="100000"/>
         </a:lnSpc>
@@ -11460,18 +11475,18 @@
         <a:buClr>
           <a:srgbClr val="000000"/>
         </a:buClr>
-        <a:buFont typeface="Arial"/>
-        <a:defRPr b="0" i="0" sz="1400" u="none" cap="none" strike="noStrike">
+        <a:buFont typeface="Arial" panose="020B0604020202020204"/>
+        <a:defRPr sz="1400" b="0" i="0" u="none" strike="noStrike" cap="none">
           <a:solidFill>
             <a:srgbClr val="000000"/>
           </a:solidFill>
-          <a:latin typeface="Arial"/>
-          <a:ea typeface="Arial"/>
-          <a:cs typeface="Arial"/>
-          <a:sym typeface="Arial"/>
+          <a:latin typeface="Arial" panose="020B0604020202020204"/>
+          <a:ea typeface="Arial" panose="020B0604020202020204"/>
+          <a:cs typeface="Arial" panose="020B0604020202020204"/>
+          <a:sym typeface="Arial" panose="020B0604020202020204"/>
         </a:defRPr>
       </a:lvl2pPr>
-      <a:lvl3pPr lvl="2" marR="0" rtl="0" algn="l">
+      <a:lvl3pPr marR="0" lvl="2" algn="l" rtl="0">
         <a:lnSpc>
           <a:spcPct val="100000"/>
         </a:lnSpc>
@@ -11484,18 +11499,18 @@
         <a:buClr>
           <a:srgbClr val="000000"/>
         </a:buClr>
-        <a:buFont typeface="Arial"/>
-        <a:defRPr b="0" i="0" sz="1400" u="none" cap="none" strike="noStrike">
+        <a:buFont typeface="Arial" panose="020B0604020202020204"/>
+        <a:defRPr sz="1400" b="0" i="0" u="none" strike="noStrike" cap="none">
           <a:solidFill>
             <a:srgbClr val="000000"/>
           </a:solidFill>
-          <a:latin typeface="Arial"/>
-          <a:ea typeface="Arial"/>
-          <a:cs typeface="Arial"/>
-          <a:sym typeface="Arial"/>
+          <a:latin typeface="Arial" panose="020B0604020202020204"/>
+          <a:ea typeface="Arial" panose="020B0604020202020204"/>
+          <a:cs typeface="Arial" panose="020B0604020202020204"/>
+          <a:sym typeface="Arial" panose="020B0604020202020204"/>
         </a:defRPr>
       </a:lvl3pPr>
-      <a:lvl4pPr lvl="3" marR="0" rtl="0" algn="l">
+      <a:lvl4pPr marR="0" lvl="3" algn="l" rtl="0">
         <a:lnSpc>
           <a:spcPct val="100000"/>
         </a:lnSpc>
@@ -11508,18 +11523,18 @@
         <a:buClr>
           <a:srgbClr val="000000"/>
         </a:buClr>
-        <a:buFont typeface="Arial"/>
-        <a:defRPr b="0" i="0" sz="1400" u="none" cap="none" strike="noStrike">
+        <a:buFont typeface="Arial" panose="020B0604020202020204"/>
+        <a:defRPr sz="1400" b="0" i="0" u="none" strike="noStrike" cap="none">
           <a:solidFill>
             <a:srgbClr val="000000"/>
           </a:solidFill>
-          <a:latin typeface="Arial"/>
-          <a:ea typeface="Arial"/>
-          <a:cs typeface="Arial"/>
-          <a:sym typeface="Arial"/>
+          <a:latin typeface="Arial" panose="020B0604020202020204"/>
+          <a:ea typeface="Arial" panose="020B0604020202020204"/>
+          <a:cs typeface="Arial" panose="020B0604020202020204"/>
+          <a:sym typeface="Arial" panose="020B0604020202020204"/>
         </a:defRPr>
       </a:lvl4pPr>
-      <a:lvl5pPr lvl="4" marR="0" rtl="0" algn="l">
+      <a:lvl5pPr marR="0" lvl="4" algn="l" rtl="0">
         <a:lnSpc>
           <a:spcPct val="100000"/>
         </a:lnSpc>
@@ -11532,18 +11547,18 @@
         <a:buClr>
           <a:srgbClr val="000000"/>
         </a:buClr>
-        <a:buFont typeface="Arial"/>
-        <a:defRPr b="0" i="0" sz="1400" u="none" cap="none" strike="noStrike">
+        <a:buFont typeface="Arial" panose="020B0604020202020204"/>
+        <a:defRPr sz="1400" b="0" i="0" u="none" strike="noStrike" cap="none">
           <a:solidFill>
             <a:srgbClr val="000000"/>
           </a:solidFill>
-          <a:latin typeface="Arial"/>
-          <a:ea typeface="Arial"/>
-          <a:cs typeface="Arial"/>
-          <a:sym typeface="Arial"/>
+          <a:latin typeface="Arial" panose="020B0604020202020204"/>
+          <a:ea typeface="Arial" panose="020B0604020202020204"/>
+          <a:cs typeface="Arial" panose="020B0604020202020204"/>
+          <a:sym typeface="Arial" panose="020B0604020202020204"/>
         </a:defRPr>
       </a:lvl5pPr>
-      <a:lvl6pPr lvl="5" marR="0" rtl="0" algn="l">
+      <a:lvl6pPr marR="0" lvl="5" algn="l" rtl="0">
         <a:lnSpc>
           <a:spcPct val="100000"/>
         </a:lnSpc>
@@ -11556,18 +11571,18 @@
         <a:buClr>
           <a:srgbClr val="000000"/>
         </a:buClr>
-        <a:buFont typeface="Arial"/>
-        <a:defRPr b="0" i="0" sz="1400" u="none" cap="none" strike="noStrike">
+        <a:buFont typeface="Arial" panose="020B0604020202020204"/>
+        <a:defRPr sz="1400" b="0" i="0" u="none" strike="noStrike" cap="none">
           <a:solidFill>
             <a:srgbClr val="000000"/>
           </a:solidFill>
-          <a:latin typeface="Arial"/>
-          <a:ea typeface="Arial"/>
-          <a:cs typeface="Arial"/>
-          <a:sym typeface="Arial"/>
+          <a:latin typeface="Arial" panose="020B0604020202020204"/>
+          <a:ea typeface="Arial" panose="020B0604020202020204"/>
+          <a:cs typeface="Arial" panose="020B0604020202020204"/>
+          <a:sym typeface="Arial" panose="020B0604020202020204"/>
         </a:defRPr>
       </a:lvl6pPr>
-      <a:lvl7pPr lvl="6" marR="0" rtl="0" algn="l">
+      <a:lvl7pPr marR="0" lvl="6" algn="l" rtl="0">
         <a:lnSpc>
           <a:spcPct val="100000"/>
         </a:lnSpc>
@@ -11580,18 +11595,18 @@
         <a:buClr>
           <a:srgbClr val="000000"/>
         </a:buClr>
-        <a:buFont typeface="Arial"/>
-        <a:defRPr b="0" i="0" sz="1400" u="none" cap="none" strike="noStrike">
+        <a:buFont typeface="Arial" panose="020B0604020202020204"/>
+        <a:defRPr sz="1400" b="0" i="0" u="none" strike="noStrike" cap="none">
           <a:solidFill>
             <a:srgbClr val="000000"/>
           </a:solidFill>
-          <a:latin typeface="Arial"/>
-          <a:ea typeface="Arial"/>
-          <a:cs typeface="Arial"/>
-          <a:sym typeface="Arial"/>
+          <a:latin typeface="Arial" panose="020B0604020202020204"/>
+          <a:ea typeface="Arial" panose="020B0604020202020204"/>
+          <a:cs typeface="Arial" panose="020B0604020202020204"/>
+          <a:sym typeface="Arial" panose="020B0604020202020204"/>
         </a:defRPr>
       </a:lvl7pPr>
-      <a:lvl8pPr lvl="7" marR="0" rtl="0" algn="l">
+      <a:lvl8pPr marR="0" lvl="7" algn="l" rtl="0">
         <a:lnSpc>
           <a:spcPct val="100000"/>
         </a:lnSpc>
@@ -11604,18 +11619,18 @@
         <a:buClr>
           <a:srgbClr val="000000"/>
         </a:buClr>
-        <a:buFont typeface="Arial"/>
-        <a:defRPr b="0" i="0" sz="1400" u="none" cap="none" strike="noStrike">
+        <a:buFont typeface="Arial" panose="020B0604020202020204"/>
+        <a:defRPr sz="1400" b="0" i="0" u="none" strike="noStrike" cap="none">
           <a:solidFill>
             <a:srgbClr val="000000"/>
           </a:solidFill>
-          <a:latin typeface="Arial"/>
-          <a:ea typeface="Arial"/>
-          <a:cs typeface="Arial"/>
-          <a:sym typeface="Arial"/>
+          <a:latin typeface="Arial" panose="020B0604020202020204"/>
+          <a:ea typeface="Arial" panose="020B0604020202020204"/>
+          <a:cs typeface="Arial" panose="020B0604020202020204"/>
+          <a:sym typeface="Arial" panose="020B0604020202020204"/>
         </a:defRPr>
       </a:lvl8pPr>
-      <a:lvl9pPr lvl="8" marR="0" rtl="0" algn="l">
+      <a:lvl9pPr marR="0" lvl="8" algn="l" rtl="0">
         <a:lnSpc>
           <a:spcPct val="100000"/>
         </a:lnSpc>
@@ -11628,15 +11643,15 @@
         <a:buClr>
           <a:srgbClr val="000000"/>
         </a:buClr>
-        <a:buFont typeface="Arial"/>
-        <a:defRPr b="0" i="0" sz="1400" u="none" cap="none" strike="noStrike">
+        <a:buFont typeface="Arial" panose="020B0604020202020204"/>
+        <a:defRPr sz="1400" b="0" i="0" u="none" strike="noStrike" cap="none">
           <a:solidFill>
             <a:srgbClr val="000000"/>
           </a:solidFill>
-          <a:latin typeface="Arial"/>
-          <a:ea typeface="Arial"/>
-          <a:cs typeface="Arial"/>
-          <a:sym typeface="Arial"/>
+          <a:latin typeface="Arial" panose="020B0604020202020204"/>
+          <a:ea typeface="Arial" panose="020B0604020202020204"/>
+          <a:cs typeface="Arial" panose="020B0604020202020204"/>
+          <a:sym typeface="Arial" panose="020B0604020202020204"/>
         </a:defRPr>
       </a:lvl9pPr>
     </p:otherStyle>
@@ -11645,11 +11660,11 @@
 </file>
 
 <file path=ppt/slides/slide1.xml><?xml version="1.0" encoding="utf-8"?>
-<p:sld xmlns:p="http://schemas.openxmlformats.org/presentationml/2006/main" xmlns:a="http://schemas.openxmlformats.org/drawingml/2006/main" xmlns:r="http://schemas.openxmlformats.org/officeDocument/2006/relationships">
+<p:sld xmlns:a="http://schemas.openxmlformats.org/drawingml/2006/main" xmlns:r="http://schemas.openxmlformats.org/officeDocument/2006/relationships" xmlns:p="http://schemas.openxmlformats.org/presentationml/2006/main">
   <p:cSld>
     <p:bg>
       <p:bgPr>
-        <a:gradFill rotWithShape="true">
+        <a:gradFill rotWithShape="1">
           <a:gsLst>
             <a:gs pos="0">
               <a:srgbClr val="0F172A">
@@ -11664,6 +11679,7 @@
           </a:gsLst>
           <a:lin ang="2700000"/>
         </a:gradFill>
+        <a:effectLst/>
       </p:bgPr>
     </p:bg>
     <p:spTree>
@@ -11682,12 +11698,12 @@
       </p:grpSpPr>
       <p:sp>
         <p:nvSpPr>
-          <p:cNvPr name="AutoShape 2" id="2"/>
+          <p:cNvPr id="2" name="AutoShape 2"/>
           <p:cNvSpPr/>
           <p:nvPr/>
         </p:nvSpPr>
         <p:spPr>
-          <a:xfrm rot="0" flipH="false" flipV="false">
+          <a:xfrm>
             <a:off x="2070100" y="508000"/>
             <a:ext cx="8051800" cy="508000"/>
           </a:xfrm>
@@ -11695,31 +11711,31 @@
             <a:avLst/>
           </a:prstGeom>
           <a:noFill/>
-          <a:ln w="12700" cmpd="sng" cap="flat">
+          <a:ln w="12700" cap="flat" cmpd="sng">
             <a:noFill/>
             <a:prstDash val="solid"/>
             <a:round/>
           </a:ln>
         </p:spPr>
         <p:txBody>
-          <a:bodyPr anchor="ctr" rtlCol="false" anchorCtr="false" vert="horz" wrap="none" lIns="0" rIns="0" tIns="0" bIns="0"/>
+          <a:bodyPr vert="horz" wrap="none" lIns="0" tIns="0" rIns="0" bIns="0" rtlCol="0" anchor="ctr" anchorCtr="0"/>
           <a:lstStyle/>
           <a:p>
-            <a:pPr algn="ctr" indent="0">
+            <a:pPr indent="0" algn="ctr">
               <a:lnSpc>
                 <a:spcPct val="125000"/>
               </a:lnSpc>
               <a:defRPr/>
             </a:pPr>
             <a:r>
-              <a:rPr lang="en-US" b="true" i="false" strike="noStrike" u="none" sz="3600">
+              <a:rPr lang="en-US" sz="3600" b="1" i="0" u="none" strike="noStrike">
                 <a:solidFill>
                   <a:srgbClr val="FFFFFF"/>
                 </a:solidFill>
-                <a:latin typeface="Noto Sans SC"/>
-                <a:ea typeface="Noto Sans SC"/>
-                <a:cs typeface="Noto Sans SC"/>
-                <a:sym typeface="Noto Sans SC"/>
+                <a:latin typeface="Noto Sans SC" panose="020B0200000000000000" charset="-122"/>
+                <a:ea typeface="Noto Sans SC" panose="020B0200000000000000" charset="-122"/>
+                <a:cs typeface="Noto Sans SC" panose="020B0200000000000000" charset="-122"/>
+                <a:sym typeface="Noto Sans SC" panose="020B0200000000000000" charset="-122"/>
               </a:rPr>
               <a:t>核心技术方案：融合检索与精排优化</a:t>
             </a:r>
@@ -11729,12 +11745,12 @@
       </p:sp>
       <p:sp>
         <p:nvSpPr>
-          <p:cNvPr name="AutoShape 3" id="3"/>
+          <p:cNvPr id="3" name="AutoShape 3"/>
           <p:cNvSpPr/>
           <p:nvPr/>
         </p:nvSpPr>
         <p:spPr>
-          <a:xfrm rot="0" flipH="false" flipV="false">
+          <a:xfrm>
             <a:off x="5461000" y="1143000"/>
             <a:ext cx="1270000" cy="38100"/>
           </a:xfrm>
@@ -11748,31 +11764,30 @@
               <a:alpha val="100000"/>
             </a:srgbClr>
           </a:solidFill>
-          <a:ln w="25400" cmpd="sng" cap="flat">
+          <a:ln w="25400" cap="flat" cmpd="sng">
             <a:noFill/>
             <a:prstDash val="solid"/>
             <a:round/>
           </a:ln>
         </p:spPr>
         <p:txBody>
-          <a:bodyPr anchor="ctr" rtlCol="false" vert="horz" wrap="square" lIns="63500" rIns="63500" tIns="63500" bIns="63500"/>
+          <a:bodyPr vert="horz" wrap="square" lIns="63500" tIns="63500" rIns="63500" bIns="63500" rtlCol="0" anchor="ctr"/>
           <a:lstStyle/>
           <a:p>
             <a:pPr algn="ctr">
               <a:defRPr/>
             </a:pPr>
-            <a:endParaRPr/>
           </a:p>
         </p:txBody>
       </p:sp>
       <p:sp>
         <p:nvSpPr>
-          <p:cNvPr name="AutoShape 4" id="4"/>
+          <p:cNvPr id="4" name="AutoShape 4"/>
           <p:cNvSpPr/>
           <p:nvPr/>
         </p:nvSpPr>
         <p:spPr>
-          <a:xfrm rot="0" flipH="false" flipV="false">
+          <a:xfrm>
             <a:off x="508000" y="1524000"/>
             <a:ext cx="3556000" cy="4318000"/>
           </a:xfrm>
@@ -11786,7 +11801,7 @@
               <a:alpha val="5000"/>
             </a:srgbClr>
           </a:solidFill>
-          <a:ln w="12700" cmpd="sng" cap="flat">
+          <a:ln w="12700" cap="flat" cmpd="sng">
             <a:solidFill>
               <a:srgbClr val="00BFFF">
                 <a:alpha val="30000"/>
@@ -11797,32 +11812,31 @@
           </a:ln>
         </p:spPr>
         <p:txBody>
-          <a:bodyPr anchor="ctr" rtlCol="false" vert="horz" wrap="square" lIns="63500" rIns="63500" tIns="63500" bIns="63500"/>
+          <a:bodyPr vert="horz" wrap="square" lIns="63500" tIns="63500" rIns="63500" bIns="63500" rtlCol="0" anchor="ctr"/>
           <a:lstStyle/>
           <a:p>
             <a:pPr algn="ctr">
               <a:defRPr/>
             </a:pPr>
-            <a:endParaRPr/>
           </a:p>
         </p:txBody>
       </p:sp>
       <p:pic>
         <p:nvPicPr>
-          <p:cNvPr name="Picture 5" id="5"/>
+          <p:cNvPr id="5" name="Picture 5"/>
           <p:cNvPicPr>
-            <a:picLocks noChangeAspect="true"/>
+            <a:picLocks noChangeAspect="1"/>
           </p:cNvPicPr>
           <p:nvPr/>
         </p:nvPicPr>
         <p:blipFill>
-          <a:blip r:embed="rId2">
+          <a:blip r:embed="rId1">
             <a:extLst>
               <a:ext uri="{28A0092B-C50C-407E-A947-70E740481C1C}">
                 <a14:useLocalDpi xmlns:a14="http://schemas.microsoft.com/office/drawing/2010/main" val="0"/>
               </a:ext>
               <a:ext uri="{96DAC541-7B7A-43D3-8B79-37D633B846F1}">
-                <asvg:svgBlip xmlns:asvg="http://schemas.microsoft.com/office/drawing/2016/SVG/main" r:embed="rId3"/>
+                <asvg:svgBlip xmlns:asvg="http://schemas.microsoft.com/office/drawing/2016/SVG/main" r:embed="rId2"/>
               </a:ext>
             </a:extLst>
           </a:blip>
@@ -11831,7 +11845,7 @@
           </a:stretch>
         </p:blipFill>
         <p:spPr>
-          <a:xfrm rot="0" flipH="false" flipV="false">
+          <a:xfrm>
             <a:off x="1968500" y="1714500"/>
             <a:ext cx="635000" cy="635000"/>
           </a:xfrm>
@@ -11842,12 +11856,12 @@
       </p:pic>
       <p:sp>
         <p:nvSpPr>
-          <p:cNvPr name="AutoShape 6" id="6"/>
+          <p:cNvPr id="6" name="AutoShape 6"/>
           <p:cNvSpPr/>
           <p:nvPr/>
         </p:nvSpPr>
         <p:spPr>
-          <a:xfrm rot="0" flipH="false" flipV="false">
+          <a:xfrm>
             <a:off x="635000" y="2413000"/>
             <a:ext cx="3302000" cy="381000"/>
           </a:xfrm>
@@ -11855,79 +11869,78 @@
             <a:avLst/>
           </a:prstGeom>
           <a:noFill/>
-          <a:ln w="12700" cmpd="sng" cap="flat">
+          <a:ln w="12700" cap="flat" cmpd="sng">
             <a:noFill/>
             <a:prstDash val="solid"/>
             <a:round/>
           </a:ln>
         </p:spPr>
         <p:txBody>
-          <a:bodyPr anchor="ctr" rtlCol="false" anchorCtr="false" vert="horz" wrap="none" lIns="0" rIns="0" tIns="0" bIns="0"/>
+          <a:bodyPr vert="horz" wrap="none" lIns="0" tIns="0" rIns="0" bIns="0" rtlCol="0" anchor="ctr" anchorCtr="0"/>
           <a:lstStyle/>
           <a:p>
-            <a:pPr algn="ctr" indent="0">
+            <a:pPr indent="0" algn="ctr">
               <a:lnSpc>
                 <a:spcPct val="125000"/>
               </a:lnSpc>
               <a:defRPr/>
             </a:pPr>
             <a:r>
-              <a:rPr lang="en-US" b="true" i="false" strike="noStrike" u="none" sz="2000">
+              <a:rPr lang="en-US" sz="2000" b="1" i="0" u="none" strike="noStrike">
                 <a:solidFill>
                   <a:srgbClr val="00BFFF"/>
                 </a:solidFill>
-                <a:latin typeface="Noto Sans SC"/>
-                <a:ea typeface="Noto Sans SC"/>
-                <a:cs typeface="Noto Sans SC"/>
-                <a:sym typeface="Noto Sans SC"/>
+                <a:latin typeface="Noto Sans SC" panose="020B0200000000000000" charset="-122"/>
+                <a:ea typeface="Noto Sans SC" panose="020B0200000000000000" charset="-122"/>
+                <a:cs typeface="Noto Sans SC" panose="020B0200000000000000" charset="-122"/>
+                <a:sym typeface="Noto Sans SC" panose="020B0200000000000000" charset="-122"/>
               </a:rPr>
               <a:t>融合相似度检索</a:t>
-            </a:r>
-            <a:r>
-              <a:rPr lang="en-US" b="false" i="false" strike="noStrike" u="none" sz="1600">
-                <a:solidFill>
-                  <a:srgbClr val="1F2329"/>
-                </a:solidFill>
-                <a:latin typeface="Noto Sans SC"/>
-                <a:ea typeface="Noto Sans SC"/>
-                <a:cs typeface="Noto Sans SC"/>
-                <a:sym typeface="Noto Sans SC"/>
-              </a:rPr>
-              <a:t/>
             </a:r>
             <a:endParaRPr lang="en-US" sz="1100"/>
           </a:p>
           <a:p>
-            <a:pPr algn="ctr" indent="0">
+            <a:pPr indent="0" algn="ctr">
               <a:lnSpc>
                 <a:spcPct val="125000"/>
               </a:lnSpc>
             </a:pPr>
             <a:r>
-              <a:rPr lang="en-US" b="false" i="false" strike="noStrike" u="none" sz="1400">
+              <a:rPr lang="en-US" sz="1400" b="0" i="0" u="none" strike="noStrike">
                 <a:solidFill>
                   <a:srgbClr val="FFFFFF">
                     <a:alpha val="70196"/>
                   </a:srgbClr>
                 </a:solidFill>
-                <a:latin typeface="Noto Sans SC"/>
-                <a:ea typeface="Noto Sans SC"/>
-                <a:cs typeface="Noto Sans SC"/>
-                <a:sym typeface="Noto Sans SC"/>
+                <a:latin typeface="Noto Sans SC" panose="020B0200000000000000" charset="-122"/>
+                <a:ea typeface="Noto Sans SC" panose="020B0200000000000000" charset="-122"/>
+                <a:cs typeface="Noto Sans SC" panose="020B0200000000000000" charset="-122"/>
+                <a:sym typeface="Noto Sans SC" panose="020B0200000000000000" charset="-122"/>
               </a:rPr>
               <a:t>轻量粗召回</a:t>
             </a:r>
+            <a:endParaRPr lang="en-US" sz="1400" b="0" i="0" u="none" strike="noStrike">
+              <a:solidFill>
+                <a:srgbClr val="FFFFFF">
+                  <a:alpha val="70196"/>
+                </a:srgbClr>
+              </a:solidFill>
+              <a:latin typeface="Noto Sans SC" panose="020B0200000000000000" charset="-122"/>
+              <a:ea typeface="Noto Sans SC" panose="020B0200000000000000" charset="-122"/>
+              <a:cs typeface="Noto Sans SC" panose="020B0200000000000000" charset="-122"/>
+              <a:sym typeface="Noto Sans SC" panose="020B0200000000000000" charset="-122"/>
+            </a:endParaRPr>
           </a:p>
         </p:txBody>
       </p:sp>
       <p:sp>
         <p:nvSpPr>
-          <p:cNvPr name="AutoShape 7" id="7"/>
+          <p:cNvPr id="7" name="AutoShape 7"/>
           <p:cNvSpPr/>
           <p:nvPr/>
         </p:nvSpPr>
         <p:spPr>
-          <a:xfrm rot="0" flipH="false" flipV="false">
+          <a:xfrm>
             <a:off x="635000" y="3048000"/>
             <a:ext cx="3302000" cy="889000"/>
           </a:xfrm>
@@ -11941,31 +11954,30 @@
               <a:alpha val="20000"/>
             </a:srgbClr>
           </a:solidFill>
-          <a:ln w="25400" cmpd="sng" cap="flat">
+          <a:ln w="25400" cap="flat" cmpd="sng">
             <a:noFill/>
             <a:prstDash val="solid"/>
             <a:round/>
           </a:ln>
         </p:spPr>
         <p:txBody>
-          <a:bodyPr anchor="ctr" rtlCol="false" vert="horz" wrap="square" lIns="63500" rIns="63500" tIns="63500" bIns="63500"/>
+          <a:bodyPr vert="horz" wrap="square" lIns="63500" tIns="63500" rIns="63500" bIns="63500" rtlCol="0" anchor="ctr"/>
           <a:lstStyle/>
           <a:p>
             <a:pPr algn="ctr">
               <a:defRPr/>
             </a:pPr>
-            <a:endParaRPr/>
           </a:p>
         </p:txBody>
       </p:sp>
       <p:sp>
         <p:nvSpPr>
-          <p:cNvPr name="AutoShape 8" id="8"/>
+          <p:cNvPr id="8" name="AutoShape 8"/>
           <p:cNvSpPr/>
           <p:nvPr/>
         </p:nvSpPr>
         <p:spPr>
-          <a:xfrm rot="0" flipH="false" flipV="false">
+          <a:xfrm>
             <a:off x="698500" y="3111500"/>
             <a:ext cx="3175000" cy="762000"/>
           </a:xfrm>
@@ -11973,43 +11985,43 @@
             <a:avLst/>
           </a:prstGeom>
           <a:noFill/>
-          <a:ln w="12700" cmpd="sng" cap="flat">
+          <a:ln w="12700" cap="flat" cmpd="sng">
             <a:noFill/>
             <a:prstDash val="solid"/>
             <a:round/>
           </a:ln>
         </p:spPr>
         <p:txBody>
-          <a:bodyPr anchor="t" rtlCol="false" anchorCtr="false" vert="horz" wrap="square" lIns="0" rIns="0" tIns="0" bIns="0"/>
+          <a:bodyPr vert="horz" wrap="square" lIns="0" tIns="0" rIns="0" bIns="0" rtlCol="0" anchor="t" anchorCtr="0"/>
           <a:lstStyle/>
           <a:p>
-            <a:pPr algn="l" indent="0">
+            <a:pPr indent="0" algn="l">
               <a:lnSpc>
                 <a:spcPct val="125000"/>
               </a:lnSpc>
               <a:defRPr/>
             </a:pPr>
             <a:r>
-              <a:rPr lang="en-US" b="true" i="false" strike="noStrike" u="none" sz="1400">
+              <a:rPr lang="en-US" sz="1400" b="1" i="0" u="none" strike="noStrike">
                 <a:solidFill>
                   <a:srgbClr val="FFD700"/>
                 </a:solidFill>
-                <a:latin typeface="Noto Sans SC"/>
-                <a:ea typeface="Noto Sans SC"/>
-                <a:cs typeface="Noto Sans SC"/>
-                <a:sym typeface="Noto Sans SC"/>
+                <a:latin typeface="Noto Sans SC" panose="020B0200000000000000" charset="-122"/>
+                <a:ea typeface="Noto Sans SC" panose="020B0200000000000000" charset="-122"/>
+                <a:cs typeface="Noto Sans SC" panose="020B0200000000000000" charset="-122"/>
+                <a:sym typeface="Noto Sans SC" panose="020B0200000000000000" charset="-122"/>
               </a:rPr>
               <a:t>当前问题：</a:t>
             </a:r>
             <a:r>
-              <a:rPr lang="en-US" b="false" i="false" strike="noStrike" u="none" sz="1200">
+              <a:rPr lang="en-US" sz="1200" b="0" i="0" u="none" strike="noStrike">
                 <a:solidFill>
                   <a:srgbClr val="E5E7EB"/>
                 </a:solidFill>
-                <a:latin typeface="Noto Sans SC"/>
-                <a:ea typeface="Noto Sans SC"/>
-                <a:cs typeface="Noto Sans SC"/>
-                <a:sym typeface="Noto Sans SC"/>
+                <a:latin typeface="Noto Sans SC" panose="020B0200000000000000" charset="-122"/>
+                <a:ea typeface="Noto Sans SC" panose="020B0200000000000000" charset="-122"/>
+                <a:cs typeface="Noto Sans SC" panose="020B0200000000000000" charset="-122"/>
+                <a:sym typeface="Noto Sans SC" panose="020B0200000000000000" charset="-122"/>
               </a:rPr>
               <a:t>传统关键词匹配语义理解弱，召回相关度差，且计算消耗大，难以支撑大规模实时检索。</a:t>
             </a:r>
@@ -12019,12 +12031,12 @@
       </p:sp>
       <p:sp>
         <p:nvSpPr>
-          <p:cNvPr name="AutoShape 9" id="9"/>
+          <p:cNvPr id="9" name="AutoShape 9"/>
           <p:cNvSpPr/>
           <p:nvPr/>
         </p:nvSpPr>
         <p:spPr>
-          <a:xfrm rot="0" flipH="false" flipV="false">
+          <a:xfrm>
             <a:off x="635000" y="4000500"/>
             <a:ext cx="3302000" cy="889000"/>
           </a:xfrm>
@@ -12038,31 +12050,30 @@
               <a:alpha val="20000"/>
             </a:srgbClr>
           </a:solidFill>
-          <a:ln w="25400" cmpd="sng" cap="flat">
+          <a:ln w="25400" cap="flat" cmpd="sng">
             <a:noFill/>
             <a:prstDash val="solid"/>
             <a:round/>
           </a:ln>
         </p:spPr>
         <p:txBody>
-          <a:bodyPr anchor="ctr" rtlCol="false" vert="horz" wrap="square" lIns="63500" rIns="63500" tIns="63500" bIns="63500"/>
+          <a:bodyPr vert="horz" wrap="square" lIns="63500" tIns="63500" rIns="63500" bIns="63500" rtlCol="0" anchor="ctr"/>
           <a:lstStyle/>
           <a:p>
             <a:pPr algn="ctr">
               <a:defRPr/>
             </a:pPr>
-            <a:endParaRPr/>
           </a:p>
         </p:txBody>
       </p:sp>
       <p:sp>
         <p:nvSpPr>
-          <p:cNvPr name="AutoShape 10" id="10"/>
+          <p:cNvPr id="10" name="AutoShape 10"/>
           <p:cNvSpPr/>
           <p:nvPr/>
         </p:nvSpPr>
         <p:spPr>
-          <a:xfrm rot="0" flipH="false" flipV="false">
+          <a:xfrm>
             <a:off x="698500" y="4064000"/>
             <a:ext cx="3175000" cy="762000"/>
           </a:xfrm>
@@ -12070,43 +12081,43 @@
             <a:avLst/>
           </a:prstGeom>
           <a:noFill/>
-          <a:ln w="12700" cmpd="sng" cap="flat">
+          <a:ln w="12700" cap="flat" cmpd="sng">
             <a:noFill/>
             <a:prstDash val="solid"/>
             <a:round/>
           </a:ln>
         </p:spPr>
         <p:txBody>
-          <a:bodyPr anchor="t" rtlCol="false" anchorCtr="false" vert="horz" wrap="square" lIns="0" rIns="0" tIns="0" bIns="0"/>
+          <a:bodyPr vert="horz" wrap="square" lIns="0" tIns="0" rIns="0" bIns="0" rtlCol="0" anchor="t" anchorCtr="0"/>
           <a:lstStyle/>
           <a:p>
-            <a:pPr algn="l" indent="0">
+            <a:pPr indent="0" algn="l">
               <a:lnSpc>
                 <a:spcPct val="125000"/>
               </a:lnSpc>
               <a:defRPr/>
             </a:pPr>
             <a:r>
-              <a:rPr lang="en-US" b="true" i="false" strike="noStrike" u="none" sz="1400">
+              <a:rPr lang="en-US" sz="1400" b="1" i="0" u="none" strike="noStrike">
                 <a:solidFill>
                   <a:srgbClr val="FFD700"/>
                 </a:solidFill>
-                <a:latin typeface="Noto Sans SC"/>
-                <a:ea typeface="Noto Sans SC"/>
-                <a:cs typeface="Noto Sans SC"/>
-                <a:sym typeface="Noto Sans SC"/>
+                <a:latin typeface="Noto Sans SC" panose="020B0200000000000000" charset="-122"/>
+                <a:ea typeface="Noto Sans SC" panose="020B0200000000000000" charset="-122"/>
+                <a:cs typeface="Noto Sans SC" panose="020B0200000000000000" charset="-122"/>
+                <a:sym typeface="Noto Sans SC" panose="020B0200000000000000" charset="-122"/>
               </a:rPr>
               <a:t>目标效果：</a:t>
             </a:r>
             <a:r>
-              <a:rPr lang="en-US" b="false" i="false" strike="noStrike" u="none" sz="1200">
+              <a:rPr lang="en-US" sz="1200" b="0" i="0" u="none" strike="noStrike">
                 <a:solidFill>
                   <a:srgbClr val="E5E7EB"/>
                 </a:solidFill>
-                <a:latin typeface="Noto Sans SC"/>
-                <a:ea typeface="Noto Sans SC"/>
-                <a:cs typeface="Noto Sans SC"/>
-                <a:sym typeface="Noto Sans SC"/>
+                <a:latin typeface="Noto Sans SC" panose="020B0200000000000000" charset="-122"/>
+                <a:ea typeface="Noto Sans SC" panose="020B0200000000000000" charset="-122"/>
+                <a:cs typeface="Noto Sans SC" panose="020B0200000000000000" charset="-122"/>
+                <a:sym typeface="Noto Sans SC" panose="020B0200000000000000" charset="-122"/>
               </a:rPr>
               <a:t>提升召回结果语义相关性，实现快速准确的粗召回，为精排提供高质量候选集。</a:t>
             </a:r>
@@ -12116,12 +12127,12 @@
       </p:sp>
       <p:sp>
         <p:nvSpPr>
-          <p:cNvPr name="AutoShape 11" id="11"/>
+          <p:cNvPr id="11" name="AutoShape 11"/>
           <p:cNvSpPr/>
           <p:nvPr/>
         </p:nvSpPr>
         <p:spPr>
-          <a:xfrm rot="0" flipH="false" flipV="false">
+          <a:xfrm>
             <a:off x="635000" y="4953000"/>
             <a:ext cx="3302000" cy="762000"/>
           </a:xfrm>
@@ -12135,31 +12146,30 @@
               <a:alpha val="20000"/>
             </a:srgbClr>
           </a:solidFill>
-          <a:ln w="25400" cmpd="sng" cap="flat">
+          <a:ln w="25400" cap="flat" cmpd="sng">
             <a:noFill/>
             <a:prstDash val="solid"/>
             <a:round/>
           </a:ln>
         </p:spPr>
         <p:txBody>
-          <a:bodyPr anchor="ctr" rtlCol="false" vert="horz" wrap="square" lIns="63500" rIns="63500" tIns="63500" bIns="63500"/>
+          <a:bodyPr vert="horz" wrap="square" lIns="63500" tIns="63500" rIns="63500" bIns="63500" rtlCol="0" anchor="ctr"/>
           <a:lstStyle/>
           <a:p>
             <a:pPr algn="ctr">
               <a:defRPr/>
             </a:pPr>
-            <a:endParaRPr/>
           </a:p>
         </p:txBody>
       </p:sp>
       <p:sp>
         <p:nvSpPr>
-          <p:cNvPr name="AutoShape 12" id="12"/>
+          <p:cNvPr id="12" name="AutoShape 12"/>
           <p:cNvSpPr/>
           <p:nvPr/>
         </p:nvSpPr>
         <p:spPr>
-          <a:xfrm rot="0" flipH="false" flipV="false">
+          <a:xfrm>
             <a:off x="698500" y="5016500"/>
             <a:ext cx="3175000" cy="635000"/>
           </a:xfrm>
@@ -12167,43 +12177,43 @@
             <a:avLst/>
           </a:prstGeom>
           <a:noFill/>
-          <a:ln w="12700" cmpd="sng" cap="flat">
+          <a:ln w="12700" cap="flat" cmpd="sng">
             <a:noFill/>
             <a:prstDash val="solid"/>
             <a:round/>
           </a:ln>
         </p:spPr>
         <p:txBody>
-          <a:bodyPr anchor="t" rtlCol="false" anchorCtr="false" vert="horz" wrap="square" lIns="0" rIns="0" tIns="0" bIns="0"/>
+          <a:bodyPr vert="horz" wrap="square" lIns="0" tIns="0" rIns="0" bIns="0" rtlCol="0" anchor="t" anchorCtr="0"/>
           <a:lstStyle/>
           <a:p>
-            <a:pPr algn="l" indent="0">
+            <a:pPr indent="0" algn="l">
               <a:lnSpc>
                 <a:spcPct val="125000"/>
               </a:lnSpc>
               <a:defRPr/>
             </a:pPr>
             <a:r>
-              <a:rPr lang="en-US" b="true" i="false" strike="noStrike" u="none" sz="1400">
+              <a:rPr lang="en-US" sz="1400" b="1" i="0" u="none" strike="noStrike">
                 <a:solidFill>
                   <a:srgbClr val="FFD700"/>
                 </a:solidFill>
-                <a:latin typeface="Noto Sans SC"/>
-                <a:ea typeface="Noto Sans SC"/>
-                <a:cs typeface="Noto Sans SC"/>
-                <a:sym typeface="Noto Sans SC"/>
+                <a:latin typeface="Noto Sans SC" panose="020B0200000000000000" charset="-122"/>
+                <a:ea typeface="Noto Sans SC" panose="020B0200000000000000" charset="-122"/>
+                <a:cs typeface="Noto Sans SC" panose="020B0200000000000000" charset="-122"/>
+                <a:sym typeface="Noto Sans SC" panose="020B0200000000000000" charset="-122"/>
               </a:rPr>
               <a:t>技术方案：</a:t>
             </a:r>
             <a:r>
-              <a:rPr lang="en-US" b="false" i="false" strike="noStrike" u="none" sz="1200">
+              <a:rPr lang="en-US" sz="1200" b="0" i="0" u="none" strike="noStrike">
                 <a:solidFill>
                   <a:srgbClr val="E5E7EB"/>
                 </a:solidFill>
-                <a:latin typeface="Noto Sans SC"/>
-                <a:ea typeface="Noto Sans SC"/>
-                <a:cs typeface="Noto Sans SC"/>
-                <a:sym typeface="Noto Sans SC"/>
+                <a:latin typeface="Noto Sans SC" panose="020B0200000000000000" charset="-122"/>
+                <a:ea typeface="Noto Sans SC" panose="020B0200000000000000" charset="-122"/>
+                <a:cs typeface="Noto Sans SC" panose="020B0200000000000000" charset="-122"/>
+                <a:sym typeface="Noto Sans SC" panose="020B0200000000000000" charset="-122"/>
               </a:rPr>
               <a:t>采用双塔模型量化版本，结合倒排索引与量化技术优化检索效率。</a:t>
             </a:r>
@@ -12213,12 +12223,12 @@
       </p:sp>
       <p:sp>
         <p:nvSpPr>
-          <p:cNvPr name="AutoShape 13" id="13"/>
+          <p:cNvPr id="13" name="AutoShape 13"/>
           <p:cNvSpPr/>
           <p:nvPr/>
         </p:nvSpPr>
         <p:spPr>
-          <a:xfrm rot="0" flipH="false" flipV="false">
+          <a:xfrm>
             <a:off x="4318000" y="1524000"/>
             <a:ext cx="3556000" cy="4318000"/>
           </a:xfrm>
@@ -12232,7 +12242,7 @@
               <a:alpha val="5000"/>
             </a:srgbClr>
           </a:solidFill>
-          <a:ln w="12700" cmpd="sng" cap="flat">
+          <a:ln w="12700" cap="flat" cmpd="sng">
             <a:solidFill>
               <a:srgbClr val="00BFFF">
                 <a:alpha val="30000"/>
@@ -12243,32 +12253,31 @@
           </a:ln>
         </p:spPr>
         <p:txBody>
-          <a:bodyPr anchor="ctr" rtlCol="false" vert="horz" wrap="square" lIns="63500" rIns="63500" tIns="63500" bIns="63500"/>
+          <a:bodyPr vert="horz" wrap="square" lIns="63500" tIns="63500" rIns="63500" bIns="63500" rtlCol="0" anchor="ctr"/>
           <a:lstStyle/>
           <a:p>
             <a:pPr algn="ctr">
               <a:defRPr/>
             </a:pPr>
-            <a:endParaRPr/>
           </a:p>
         </p:txBody>
       </p:sp>
       <p:pic>
         <p:nvPicPr>
-          <p:cNvPr name="Picture 14" id="14"/>
+          <p:cNvPr id="14" name="Picture 14"/>
           <p:cNvPicPr>
-            <a:picLocks noChangeAspect="true"/>
+            <a:picLocks noChangeAspect="1"/>
           </p:cNvPicPr>
           <p:nvPr/>
         </p:nvPicPr>
         <p:blipFill>
-          <a:blip r:embed="rId4">
+          <a:blip r:embed="rId3">
             <a:extLst>
               <a:ext uri="{28A0092B-C50C-407E-A947-70E740481C1C}">
                 <a14:useLocalDpi xmlns:a14="http://schemas.microsoft.com/office/drawing/2010/main" val="0"/>
               </a:ext>
               <a:ext uri="{96DAC541-7B7A-43D3-8B79-37D633B846F1}">
-                <asvg:svgBlip xmlns:asvg="http://schemas.microsoft.com/office/drawing/2016/SVG/main" r:embed="rId5"/>
+                <asvg:svgBlip xmlns:asvg="http://schemas.microsoft.com/office/drawing/2016/SVG/main" r:embed="rId4"/>
               </a:ext>
             </a:extLst>
           </a:blip>
@@ -12277,7 +12286,7 @@
           </a:stretch>
         </p:blipFill>
         <p:spPr>
-          <a:xfrm rot="0" flipH="false" flipV="false">
+          <a:xfrm>
             <a:off x="5778500" y="1714500"/>
             <a:ext cx="635000" cy="635000"/>
           </a:xfrm>
@@ -12288,12 +12297,12 @@
       </p:pic>
       <p:sp>
         <p:nvSpPr>
-          <p:cNvPr name="AutoShape 15" id="15"/>
+          <p:cNvPr id="15" name="AutoShape 15"/>
           <p:cNvSpPr/>
           <p:nvPr/>
         </p:nvSpPr>
         <p:spPr>
-          <a:xfrm rot="0" flipH="false" flipV="false">
+          <a:xfrm>
             <a:off x="4445000" y="2413000"/>
             <a:ext cx="3302000" cy="381000"/>
           </a:xfrm>
@@ -12301,79 +12310,78 @@
             <a:avLst/>
           </a:prstGeom>
           <a:noFill/>
-          <a:ln w="12700" cmpd="sng" cap="flat">
+          <a:ln w="12700" cap="flat" cmpd="sng">
             <a:noFill/>
             <a:prstDash val="solid"/>
             <a:round/>
           </a:ln>
         </p:spPr>
         <p:txBody>
-          <a:bodyPr anchor="ctr" rtlCol="false" anchorCtr="false" vert="horz" wrap="none" lIns="0" rIns="0" tIns="0" bIns="0"/>
+          <a:bodyPr vert="horz" wrap="none" lIns="0" tIns="0" rIns="0" bIns="0" rtlCol="0" anchor="ctr" anchorCtr="0"/>
           <a:lstStyle/>
           <a:p>
-            <a:pPr algn="ctr" indent="0">
+            <a:pPr indent="0" algn="ctr">
               <a:lnSpc>
                 <a:spcPct val="125000"/>
               </a:lnSpc>
               <a:defRPr/>
             </a:pPr>
             <a:r>
-              <a:rPr lang="en-US" b="true" i="false" strike="noStrike" u="none" sz="2000">
+              <a:rPr lang="en-US" sz="2000" b="1" i="0" u="none" strike="noStrike">
                 <a:solidFill>
                   <a:srgbClr val="00BFFF"/>
                 </a:solidFill>
-                <a:latin typeface="Noto Sans SC"/>
-                <a:ea typeface="Noto Sans SC"/>
-                <a:cs typeface="Noto Sans SC"/>
-                <a:sym typeface="Noto Sans SC"/>
+                <a:latin typeface="Noto Sans SC" panose="020B0200000000000000" charset="-122"/>
+                <a:ea typeface="Noto Sans SC" panose="020B0200000000000000" charset="-122"/>
+                <a:cs typeface="Noto Sans SC" panose="020B0200000000000000" charset="-122"/>
+                <a:sym typeface="Noto Sans SC" panose="020B0200000000000000" charset="-122"/>
               </a:rPr>
               <a:t>语义聚类</a:t>
-            </a:r>
-            <a:r>
-              <a:rPr lang="en-US" b="false" i="false" strike="noStrike" u="none" sz="1600">
-                <a:solidFill>
-                  <a:srgbClr val="1F2329"/>
-                </a:solidFill>
-                <a:latin typeface="Noto Sans SC"/>
-                <a:ea typeface="Noto Sans SC"/>
-                <a:cs typeface="Noto Sans SC"/>
-                <a:sym typeface="Noto Sans SC"/>
-              </a:rPr>
-              <a:t/>
             </a:r>
             <a:endParaRPr lang="en-US" sz="1100"/>
           </a:p>
           <a:p>
-            <a:pPr algn="ctr" indent="0">
+            <a:pPr indent="0" algn="ctr">
               <a:lnSpc>
                 <a:spcPct val="125000"/>
               </a:lnSpc>
             </a:pPr>
             <a:r>
-              <a:rPr lang="en-US" b="false" i="false" strike="noStrike" u="none" sz="1400">
+              <a:rPr lang="en-US" sz="1400" b="0" i="0" u="none" strike="noStrike">
                 <a:solidFill>
                   <a:srgbClr val="FFFFFF">
                     <a:alpha val="70196"/>
                   </a:srgbClr>
                 </a:solidFill>
-                <a:latin typeface="Noto Sans SC"/>
-                <a:ea typeface="Noto Sans SC"/>
-                <a:cs typeface="Noto Sans SC"/>
-                <a:sym typeface="Noto Sans SC"/>
+                <a:latin typeface="Noto Sans SC" panose="020B0200000000000000" charset="-122"/>
+                <a:ea typeface="Noto Sans SC" panose="020B0200000000000000" charset="-122"/>
+                <a:cs typeface="Noto Sans SC" panose="020B0200000000000000" charset="-122"/>
+                <a:sym typeface="Noto Sans SC" panose="020B0200000000000000" charset="-122"/>
               </a:rPr>
               <a:t>轻量精召回</a:t>
             </a:r>
+            <a:endParaRPr lang="en-US" sz="1400" b="0" i="0" u="none" strike="noStrike">
+              <a:solidFill>
+                <a:srgbClr val="FFFFFF">
+                  <a:alpha val="70196"/>
+                </a:srgbClr>
+              </a:solidFill>
+              <a:latin typeface="Noto Sans SC" panose="020B0200000000000000" charset="-122"/>
+              <a:ea typeface="Noto Sans SC" panose="020B0200000000000000" charset="-122"/>
+              <a:cs typeface="Noto Sans SC" panose="020B0200000000000000" charset="-122"/>
+              <a:sym typeface="Noto Sans SC" panose="020B0200000000000000" charset="-122"/>
+            </a:endParaRPr>
           </a:p>
         </p:txBody>
       </p:sp>
       <p:sp>
         <p:nvSpPr>
-          <p:cNvPr name="AutoShape 16" id="16"/>
+          <p:cNvPr id="16" name="AutoShape 16"/>
           <p:cNvSpPr/>
           <p:nvPr/>
         </p:nvSpPr>
         <p:spPr>
-          <a:xfrm rot="0" flipH="false" flipV="false">
+          <a:xfrm>
             <a:off x="4445000" y="3048000"/>
             <a:ext cx="3302000" cy="889000"/>
           </a:xfrm>
@@ -12387,31 +12395,30 @@
               <a:alpha val="20000"/>
             </a:srgbClr>
           </a:solidFill>
-          <a:ln w="25400" cmpd="sng" cap="flat">
+          <a:ln w="25400" cap="flat" cmpd="sng">
             <a:noFill/>
             <a:prstDash val="solid"/>
             <a:round/>
           </a:ln>
         </p:spPr>
         <p:txBody>
-          <a:bodyPr anchor="ctr" rtlCol="false" vert="horz" wrap="square" lIns="63500" rIns="63500" tIns="63500" bIns="63500"/>
+          <a:bodyPr vert="horz" wrap="square" lIns="63500" tIns="63500" rIns="63500" bIns="63500" rtlCol="0" anchor="ctr"/>
           <a:lstStyle/>
           <a:p>
             <a:pPr algn="ctr">
               <a:defRPr/>
             </a:pPr>
-            <a:endParaRPr/>
           </a:p>
         </p:txBody>
       </p:sp>
       <p:sp>
         <p:nvSpPr>
-          <p:cNvPr name="AutoShape 17" id="17"/>
+          <p:cNvPr id="17" name="AutoShape 17"/>
           <p:cNvSpPr/>
           <p:nvPr/>
         </p:nvSpPr>
         <p:spPr>
-          <a:xfrm rot="0" flipH="false" flipV="false">
+          <a:xfrm>
             <a:off x="4508500" y="3111500"/>
             <a:ext cx="3175000" cy="762000"/>
           </a:xfrm>
@@ -12419,43 +12426,43 @@
             <a:avLst/>
           </a:prstGeom>
           <a:noFill/>
-          <a:ln w="12700" cmpd="sng" cap="flat">
+          <a:ln w="12700" cap="flat" cmpd="sng">
             <a:noFill/>
             <a:prstDash val="solid"/>
             <a:round/>
           </a:ln>
         </p:spPr>
         <p:txBody>
-          <a:bodyPr anchor="t" rtlCol="false" anchorCtr="false" vert="horz" wrap="square" lIns="0" rIns="0" tIns="0" bIns="0"/>
+          <a:bodyPr vert="horz" wrap="square" lIns="0" tIns="0" rIns="0" bIns="0" rtlCol="0" anchor="t" anchorCtr="0"/>
           <a:lstStyle/>
           <a:p>
-            <a:pPr algn="l" indent="0">
+            <a:pPr indent="0" algn="l">
               <a:lnSpc>
                 <a:spcPct val="125000"/>
               </a:lnSpc>
               <a:defRPr/>
             </a:pPr>
             <a:r>
-              <a:rPr lang="en-US" b="true" i="false" strike="noStrike" u="none" sz="1400">
+              <a:rPr lang="en-US" sz="1400" b="1" i="0" u="none" strike="noStrike">
                 <a:solidFill>
                   <a:srgbClr val="FFD700"/>
                 </a:solidFill>
-                <a:latin typeface="Noto Sans SC"/>
-                <a:ea typeface="Noto Sans SC"/>
-                <a:cs typeface="Noto Sans SC"/>
-                <a:sym typeface="Noto Sans SC"/>
+                <a:latin typeface="Noto Sans SC" panose="020B0200000000000000" charset="-122"/>
+                <a:ea typeface="Noto Sans SC" panose="020B0200000000000000" charset="-122"/>
+                <a:cs typeface="Noto Sans SC" panose="020B0200000000000000" charset="-122"/>
+                <a:sym typeface="Noto Sans SC" panose="020B0200000000000000" charset="-122"/>
               </a:rPr>
               <a:t>当前问题：</a:t>
             </a:r>
             <a:r>
-              <a:rPr lang="en-US" b="false" i="false" strike="noStrike" u="none" sz="1200">
+              <a:rPr lang="en-US" sz="1200" b="0" i="0" u="none" strike="noStrike">
                 <a:solidFill>
                   <a:srgbClr val="E5E7EB"/>
                 </a:solidFill>
-                <a:latin typeface="Noto Sans SC"/>
-                <a:ea typeface="Noto Sans SC"/>
-                <a:cs typeface="Noto Sans SC"/>
-                <a:sym typeface="Noto Sans SC"/>
+                <a:latin typeface="Noto Sans SC" panose="020B0200000000000000" charset="-122"/>
+                <a:ea typeface="Noto Sans SC" panose="020B0200000000000000" charset="-122"/>
+                <a:cs typeface="Noto Sans SC" panose="020B0200000000000000" charset="-122"/>
+                <a:sym typeface="Noto Sans SC" panose="020B0200000000000000" charset="-122"/>
               </a:rPr>
               <a:t>粗召回结果存在冗余与噪声，直接精排成本高且影响最终效果。</a:t>
             </a:r>
@@ -12465,12 +12472,12 @@
       </p:sp>
       <p:sp>
         <p:nvSpPr>
-          <p:cNvPr name="AutoShape 18" id="18"/>
+          <p:cNvPr id="18" name="AutoShape 18"/>
           <p:cNvSpPr/>
           <p:nvPr/>
         </p:nvSpPr>
         <p:spPr>
-          <a:xfrm rot="0" flipH="false" flipV="false">
+          <a:xfrm>
             <a:off x="4445000" y="4000500"/>
             <a:ext cx="3302000" cy="889000"/>
           </a:xfrm>
@@ -12484,31 +12491,30 @@
               <a:alpha val="20000"/>
             </a:srgbClr>
           </a:solidFill>
-          <a:ln w="25400" cmpd="sng" cap="flat">
+          <a:ln w="25400" cap="flat" cmpd="sng">
             <a:noFill/>
             <a:prstDash val="solid"/>
             <a:round/>
           </a:ln>
         </p:spPr>
         <p:txBody>
-          <a:bodyPr anchor="ctr" rtlCol="false" vert="horz" wrap="square" lIns="63500" rIns="63500" tIns="63500" bIns="63500"/>
+          <a:bodyPr vert="horz" wrap="square" lIns="63500" tIns="63500" rIns="63500" bIns="63500" rtlCol="0" anchor="ctr"/>
           <a:lstStyle/>
           <a:p>
             <a:pPr algn="ctr">
               <a:defRPr/>
             </a:pPr>
-            <a:endParaRPr/>
           </a:p>
         </p:txBody>
       </p:sp>
       <p:sp>
         <p:nvSpPr>
-          <p:cNvPr name="AutoShape 19" id="19"/>
+          <p:cNvPr id="19" name="AutoShape 19"/>
           <p:cNvSpPr/>
           <p:nvPr/>
         </p:nvSpPr>
         <p:spPr>
-          <a:xfrm rot="0" flipH="false" flipV="false">
+          <a:xfrm>
             <a:off x="4508500" y="4064000"/>
             <a:ext cx="3175000" cy="762000"/>
           </a:xfrm>
@@ -12516,43 +12522,43 @@
             <a:avLst/>
           </a:prstGeom>
           <a:noFill/>
-          <a:ln w="12700" cmpd="sng" cap="flat">
+          <a:ln w="12700" cap="flat" cmpd="sng">
             <a:noFill/>
             <a:prstDash val="solid"/>
             <a:round/>
           </a:ln>
         </p:spPr>
         <p:txBody>
-          <a:bodyPr anchor="t" rtlCol="false" anchorCtr="false" vert="horz" wrap="square" lIns="0" rIns="0" tIns="0" bIns="0"/>
+          <a:bodyPr vert="horz" wrap="square" lIns="0" tIns="0" rIns="0" bIns="0" rtlCol="0" anchor="t" anchorCtr="0"/>
           <a:lstStyle/>
           <a:p>
-            <a:pPr algn="l" indent="0">
+            <a:pPr indent="0" algn="l">
               <a:lnSpc>
                 <a:spcPct val="125000"/>
               </a:lnSpc>
               <a:defRPr/>
             </a:pPr>
             <a:r>
-              <a:rPr lang="en-US" b="true" i="false" strike="noStrike" u="none" sz="1400">
+              <a:rPr lang="en-US" sz="1400" b="1" i="0" u="none" strike="noStrike">
                 <a:solidFill>
                   <a:srgbClr val="FFD700"/>
                 </a:solidFill>
-                <a:latin typeface="Noto Sans SC"/>
-                <a:ea typeface="Noto Sans SC"/>
-                <a:cs typeface="Noto Sans SC"/>
-                <a:sym typeface="Noto Sans SC"/>
+                <a:latin typeface="Noto Sans SC" panose="020B0200000000000000" charset="-122"/>
+                <a:ea typeface="Noto Sans SC" panose="020B0200000000000000" charset="-122"/>
+                <a:cs typeface="Noto Sans SC" panose="020B0200000000000000" charset="-122"/>
+                <a:sym typeface="Noto Sans SC" panose="020B0200000000000000" charset="-122"/>
               </a:rPr>
               <a:t>目标效果：</a:t>
             </a:r>
             <a:r>
-              <a:rPr lang="en-US" b="false" i="false" strike="noStrike" u="none" sz="1200">
+              <a:rPr lang="en-US" sz="1200" b="0" i="0" u="none" strike="noStrike">
                 <a:solidFill>
                   <a:srgbClr val="E5E7EB"/>
                 </a:solidFill>
-                <a:latin typeface="Noto Sans SC"/>
-                <a:ea typeface="Noto Sans SC"/>
-                <a:cs typeface="Noto Sans SC"/>
-                <a:sym typeface="Noto Sans SC"/>
+                <a:latin typeface="Noto Sans SC" panose="020B0200000000000000" charset="-122"/>
+                <a:ea typeface="Noto Sans SC" panose="020B0200000000000000" charset="-122"/>
+                <a:cs typeface="Noto Sans SC" panose="020B0200000000000000" charset="-122"/>
+                <a:sym typeface="Noto Sans SC" panose="020B0200000000000000" charset="-122"/>
               </a:rPr>
               <a:t>去除冗余信息，筛选代表性样本，减少候选规模，提升精排效率。</a:t>
             </a:r>
@@ -12562,12 +12568,12 @@
       </p:sp>
       <p:sp>
         <p:nvSpPr>
-          <p:cNvPr name="AutoShape 20" id="20"/>
+          <p:cNvPr id="20" name="AutoShape 20"/>
           <p:cNvSpPr/>
           <p:nvPr/>
         </p:nvSpPr>
         <p:spPr>
-          <a:xfrm rot="0" flipH="false" flipV="false">
+          <a:xfrm>
             <a:off x="4445000" y="4953000"/>
             <a:ext cx="3302000" cy="762000"/>
           </a:xfrm>
@@ -12581,31 +12587,30 @@
               <a:alpha val="20000"/>
             </a:srgbClr>
           </a:solidFill>
-          <a:ln w="25400" cmpd="sng" cap="flat">
+          <a:ln w="25400" cap="flat" cmpd="sng">
             <a:noFill/>
             <a:prstDash val="solid"/>
             <a:round/>
           </a:ln>
         </p:spPr>
         <p:txBody>
-          <a:bodyPr anchor="ctr" rtlCol="false" vert="horz" wrap="square" lIns="63500" rIns="63500" tIns="63500" bIns="63500"/>
+          <a:bodyPr vert="horz" wrap="square" lIns="63500" tIns="63500" rIns="63500" bIns="63500" rtlCol="0" anchor="ctr"/>
           <a:lstStyle/>
           <a:p>
             <a:pPr algn="ctr">
               <a:defRPr/>
             </a:pPr>
-            <a:endParaRPr/>
           </a:p>
         </p:txBody>
       </p:sp>
       <p:sp>
         <p:nvSpPr>
-          <p:cNvPr name="AutoShape 21" id="21"/>
+          <p:cNvPr id="21" name="AutoShape 21"/>
           <p:cNvSpPr/>
           <p:nvPr/>
         </p:nvSpPr>
         <p:spPr>
-          <a:xfrm rot="0" flipH="false" flipV="false">
+          <a:xfrm>
             <a:off x="4508500" y="5016500"/>
             <a:ext cx="3175000" cy="635000"/>
           </a:xfrm>
@@ -12613,43 +12618,43 @@
             <a:avLst/>
           </a:prstGeom>
           <a:noFill/>
-          <a:ln w="12700" cmpd="sng" cap="flat">
+          <a:ln w="12700" cap="flat" cmpd="sng">
             <a:noFill/>
             <a:prstDash val="solid"/>
             <a:round/>
           </a:ln>
         </p:spPr>
         <p:txBody>
-          <a:bodyPr anchor="t" rtlCol="false" anchorCtr="false" vert="horz" wrap="square" lIns="0" rIns="0" tIns="0" bIns="0"/>
+          <a:bodyPr vert="horz" wrap="square" lIns="0" tIns="0" rIns="0" bIns="0" rtlCol="0" anchor="t" anchorCtr="0"/>
           <a:lstStyle/>
           <a:p>
-            <a:pPr algn="l" indent="0">
+            <a:pPr indent="0" algn="l">
               <a:lnSpc>
                 <a:spcPct val="125000"/>
               </a:lnSpc>
               <a:defRPr/>
             </a:pPr>
             <a:r>
-              <a:rPr lang="en-US" b="true" i="false" strike="noStrike" u="none" sz="1400">
+              <a:rPr lang="en-US" sz="1400" b="1" i="0" u="none" strike="noStrike">
                 <a:solidFill>
                   <a:srgbClr val="FFD700"/>
                 </a:solidFill>
-                <a:latin typeface="Noto Sans SC"/>
-                <a:ea typeface="Noto Sans SC"/>
-                <a:cs typeface="Noto Sans SC"/>
-                <a:sym typeface="Noto Sans SC"/>
+                <a:latin typeface="Noto Sans SC" panose="020B0200000000000000" charset="-122"/>
+                <a:ea typeface="Noto Sans SC" panose="020B0200000000000000" charset="-122"/>
+                <a:cs typeface="Noto Sans SC" panose="020B0200000000000000" charset="-122"/>
+                <a:sym typeface="Noto Sans SC" panose="020B0200000000000000" charset="-122"/>
               </a:rPr>
               <a:t>技术方案：</a:t>
             </a:r>
             <a:r>
-              <a:rPr lang="en-US" b="false" i="false" strike="noStrike" u="none" sz="1200">
+              <a:rPr lang="en-US" sz="1200" b="0" i="0" u="none" strike="noStrike">
                 <a:solidFill>
                   <a:srgbClr val="E5E7EB"/>
                 </a:solidFill>
-                <a:latin typeface="Noto Sans SC"/>
-                <a:ea typeface="Noto Sans SC"/>
-                <a:cs typeface="Noto Sans SC"/>
-                <a:sym typeface="Noto Sans SC"/>
+                <a:latin typeface="Noto Sans SC" panose="020B0200000000000000" charset="-122"/>
+                <a:ea typeface="Noto Sans SC" panose="020B0200000000000000" charset="-122"/>
+                <a:cs typeface="Noto Sans SC" panose="020B0200000000000000" charset="-122"/>
+                <a:sym typeface="Noto Sans SC" panose="020B0200000000000000" charset="-122"/>
               </a:rPr>
               <a:t>基于语义向量的轻量级聚类算法，选取聚类中心代表性样本。</a:t>
             </a:r>
@@ -12659,12 +12664,12 @@
       </p:sp>
       <p:sp>
         <p:nvSpPr>
-          <p:cNvPr name="AutoShape 22" id="22"/>
+          <p:cNvPr id="22" name="AutoShape 22"/>
           <p:cNvSpPr/>
           <p:nvPr/>
         </p:nvSpPr>
         <p:spPr>
-          <a:xfrm rot="0" flipH="false" flipV="false">
+          <a:xfrm>
             <a:off x="8128000" y="1524000"/>
             <a:ext cx="3556000" cy="4318000"/>
           </a:xfrm>
@@ -12678,7 +12683,7 @@
               <a:alpha val="5000"/>
             </a:srgbClr>
           </a:solidFill>
-          <a:ln w="12700" cmpd="sng" cap="flat">
+          <a:ln w="12700" cap="flat" cmpd="sng">
             <a:solidFill>
               <a:srgbClr val="00BFFF">
                 <a:alpha val="30000"/>
@@ -12689,32 +12694,31 @@
           </a:ln>
         </p:spPr>
         <p:txBody>
-          <a:bodyPr anchor="ctr" rtlCol="false" vert="horz" wrap="square" lIns="63500" rIns="63500" tIns="63500" bIns="63500"/>
+          <a:bodyPr vert="horz" wrap="square" lIns="63500" tIns="63500" rIns="63500" bIns="63500" rtlCol="0" anchor="ctr"/>
           <a:lstStyle/>
           <a:p>
             <a:pPr algn="ctr">
               <a:defRPr/>
             </a:pPr>
-            <a:endParaRPr/>
           </a:p>
         </p:txBody>
       </p:sp>
       <p:pic>
         <p:nvPicPr>
-          <p:cNvPr name="Picture 23" id="23"/>
+          <p:cNvPr id="23" name="Picture 23"/>
           <p:cNvPicPr>
-            <a:picLocks noChangeAspect="true"/>
+            <a:picLocks noChangeAspect="1"/>
           </p:cNvPicPr>
           <p:nvPr/>
         </p:nvPicPr>
         <p:blipFill>
-          <a:blip r:embed="rId6">
+          <a:blip r:embed="rId5">
             <a:extLst>
               <a:ext uri="{28A0092B-C50C-407E-A947-70E740481C1C}">
                 <a14:useLocalDpi xmlns:a14="http://schemas.microsoft.com/office/drawing/2010/main" val="0"/>
               </a:ext>
               <a:ext uri="{96DAC541-7B7A-43D3-8B79-37D633B846F1}">
-                <asvg:svgBlip xmlns:asvg="http://schemas.microsoft.com/office/drawing/2016/SVG/main" r:embed="rId7"/>
+                <asvg:svgBlip xmlns:asvg="http://schemas.microsoft.com/office/drawing/2016/SVG/main" r:embed="rId6"/>
               </a:ext>
             </a:extLst>
           </a:blip>
@@ -12723,7 +12727,7 @@
           </a:stretch>
         </p:blipFill>
         <p:spPr>
-          <a:xfrm rot="0" flipH="false" flipV="false">
+          <a:xfrm>
             <a:off x="9588500" y="1714500"/>
             <a:ext cx="635000" cy="635000"/>
           </a:xfrm>
@@ -12734,12 +12738,12 @@
       </p:pic>
       <p:sp>
         <p:nvSpPr>
-          <p:cNvPr name="AutoShape 24" id="24"/>
+          <p:cNvPr id="24" name="AutoShape 24"/>
           <p:cNvSpPr/>
           <p:nvPr/>
         </p:nvSpPr>
         <p:spPr>
-          <a:xfrm rot="0" flipH="false" flipV="false">
+          <a:xfrm>
             <a:off x="8255000" y="2413000"/>
             <a:ext cx="3302000" cy="381000"/>
           </a:xfrm>
@@ -12747,79 +12751,78 @@
             <a:avLst/>
           </a:prstGeom>
           <a:noFill/>
-          <a:ln w="12700" cmpd="sng" cap="flat">
+          <a:ln w="12700" cap="flat" cmpd="sng">
             <a:noFill/>
             <a:prstDash val="solid"/>
             <a:round/>
           </a:ln>
         </p:spPr>
         <p:txBody>
-          <a:bodyPr anchor="ctr" rtlCol="false" anchorCtr="false" vert="horz" wrap="none" lIns="0" rIns="0" tIns="0" bIns="0"/>
+          <a:bodyPr vert="horz" wrap="none" lIns="0" tIns="0" rIns="0" bIns="0" rtlCol="0" anchor="ctr" anchorCtr="0"/>
           <a:lstStyle/>
           <a:p>
-            <a:pPr algn="ctr" indent="0">
+            <a:pPr indent="0" algn="ctr">
               <a:lnSpc>
                 <a:spcPct val="125000"/>
               </a:lnSpc>
               <a:defRPr/>
             </a:pPr>
             <a:r>
-              <a:rPr lang="en-US" b="true" i="false" strike="noStrike" u="none" sz="2000">
+              <a:rPr lang="en-US" sz="2000" b="1" i="0" u="none" strike="noStrike">
                 <a:solidFill>
                   <a:srgbClr val="00BFFF"/>
                 </a:solidFill>
-                <a:latin typeface="Noto Sans SC"/>
-                <a:ea typeface="Noto Sans SC"/>
-                <a:cs typeface="Noto Sans SC"/>
-                <a:sym typeface="Noto Sans SC"/>
+                <a:latin typeface="Noto Sans SC" panose="020B0200000000000000" charset="-122"/>
+                <a:ea typeface="Noto Sans SC" panose="020B0200000000000000" charset="-122"/>
+                <a:cs typeface="Noto Sans SC" panose="020B0200000000000000" charset="-122"/>
+                <a:sym typeface="Noto Sans SC" panose="020B0200000000000000" charset="-122"/>
               </a:rPr>
               <a:t>VLM精调</a:t>
-            </a:r>
-            <a:r>
-              <a:rPr lang="en-US" b="false" i="false" strike="noStrike" u="none" sz="1600">
-                <a:solidFill>
-                  <a:srgbClr val="1F2329"/>
-                </a:solidFill>
-                <a:latin typeface="Noto Sans SC"/>
-                <a:ea typeface="Noto Sans SC"/>
-                <a:cs typeface="Noto Sans SC"/>
-                <a:sym typeface="Noto Sans SC"/>
-              </a:rPr>
-              <a:t/>
             </a:r>
             <a:endParaRPr lang="en-US" sz="1100"/>
           </a:p>
           <a:p>
-            <a:pPr algn="ctr" indent="0">
+            <a:pPr indent="0" algn="ctr">
               <a:lnSpc>
                 <a:spcPct val="125000"/>
               </a:lnSpc>
             </a:pPr>
             <a:r>
-              <a:rPr lang="en-US" b="false" i="false" strike="noStrike" u="none" sz="1400">
+              <a:rPr lang="en-US" sz="1400" b="0" i="0" u="none" strike="noStrike">
                 <a:solidFill>
                   <a:srgbClr val="FFFFFF">
                     <a:alpha val="70196"/>
                   </a:srgbClr>
                 </a:solidFill>
-                <a:latin typeface="Noto Sans SC"/>
-                <a:ea typeface="Noto Sans SC"/>
-                <a:cs typeface="Noto Sans SC"/>
-                <a:sym typeface="Noto Sans SC"/>
+                <a:latin typeface="Noto Sans SC" panose="020B0200000000000000" charset="-122"/>
+                <a:ea typeface="Noto Sans SC" panose="020B0200000000000000" charset="-122"/>
+                <a:cs typeface="Noto Sans SC" panose="020B0200000000000000" charset="-122"/>
+                <a:sym typeface="Noto Sans SC" panose="020B0200000000000000" charset="-122"/>
               </a:rPr>
               <a:t>精排优化</a:t>
             </a:r>
+            <a:endParaRPr lang="en-US" sz="1400" b="0" i="0" u="none" strike="noStrike">
+              <a:solidFill>
+                <a:srgbClr val="FFFFFF">
+                  <a:alpha val="70196"/>
+                </a:srgbClr>
+              </a:solidFill>
+              <a:latin typeface="Noto Sans SC" panose="020B0200000000000000" charset="-122"/>
+              <a:ea typeface="Noto Sans SC" panose="020B0200000000000000" charset="-122"/>
+              <a:cs typeface="Noto Sans SC" panose="020B0200000000000000" charset="-122"/>
+              <a:sym typeface="Noto Sans SC" panose="020B0200000000000000" charset="-122"/>
+            </a:endParaRPr>
           </a:p>
         </p:txBody>
       </p:sp>
       <p:sp>
         <p:nvSpPr>
-          <p:cNvPr name="AutoShape 25" id="25"/>
+          <p:cNvPr id="25" name="AutoShape 25"/>
           <p:cNvSpPr/>
           <p:nvPr/>
         </p:nvSpPr>
         <p:spPr>
-          <a:xfrm rot="0" flipH="false" flipV="false">
+          <a:xfrm>
             <a:off x="8255000" y="3048000"/>
             <a:ext cx="3302000" cy="889000"/>
           </a:xfrm>
@@ -12833,31 +12836,30 @@
               <a:alpha val="20000"/>
             </a:srgbClr>
           </a:solidFill>
-          <a:ln w="25400" cmpd="sng" cap="flat">
+          <a:ln w="25400" cap="flat" cmpd="sng">
             <a:noFill/>
             <a:prstDash val="solid"/>
             <a:round/>
           </a:ln>
         </p:spPr>
         <p:txBody>
-          <a:bodyPr anchor="ctr" rtlCol="false" vert="horz" wrap="square" lIns="63500" rIns="63500" tIns="63500" bIns="63500"/>
+          <a:bodyPr vert="horz" wrap="square" lIns="63500" tIns="63500" rIns="63500" bIns="63500" rtlCol="0" anchor="ctr"/>
           <a:lstStyle/>
           <a:p>
             <a:pPr algn="ctr">
               <a:defRPr/>
             </a:pPr>
-            <a:endParaRPr/>
           </a:p>
         </p:txBody>
       </p:sp>
       <p:sp>
         <p:nvSpPr>
-          <p:cNvPr name="AutoShape 26" id="26"/>
+          <p:cNvPr id="26" name="AutoShape 26"/>
           <p:cNvSpPr/>
           <p:nvPr/>
         </p:nvSpPr>
         <p:spPr>
-          <a:xfrm rot="0" flipH="false" flipV="false">
+          <a:xfrm>
             <a:off x="8318500" y="3111500"/>
             <a:ext cx="3175000" cy="762000"/>
           </a:xfrm>
@@ -12865,43 +12867,43 @@
             <a:avLst/>
           </a:prstGeom>
           <a:noFill/>
-          <a:ln w="12700" cmpd="sng" cap="flat">
+          <a:ln w="12700" cap="flat" cmpd="sng">
             <a:noFill/>
             <a:prstDash val="solid"/>
             <a:round/>
           </a:ln>
         </p:spPr>
         <p:txBody>
-          <a:bodyPr anchor="t" rtlCol="false" anchorCtr="false" vert="horz" wrap="square" lIns="0" rIns="0" tIns="0" bIns="0"/>
+          <a:bodyPr vert="horz" wrap="square" lIns="0" tIns="0" rIns="0" bIns="0" rtlCol="0" anchor="t" anchorCtr="0"/>
           <a:lstStyle/>
           <a:p>
-            <a:pPr algn="l" indent="0">
+            <a:pPr indent="0" algn="l">
               <a:lnSpc>
                 <a:spcPct val="125000"/>
               </a:lnSpc>
               <a:defRPr/>
             </a:pPr>
             <a:r>
-              <a:rPr lang="en-US" b="true" i="false" strike="noStrike" u="none" sz="1400">
+              <a:rPr lang="en-US" sz="1400" b="1" i="0" u="none" strike="noStrike">
                 <a:solidFill>
                   <a:srgbClr val="FFD700"/>
                 </a:solidFill>
-                <a:latin typeface="Noto Sans SC"/>
-                <a:ea typeface="Noto Sans SC"/>
-                <a:cs typeface="Noto Sans SC"/>
-                <a:sym typeface="Noto Sans SC"/>
+                <a:latin typeface="Noto Sans SC" panose="020B0200000000000000" charset="-122"/>
+                <a:ea typeface="Noto Sans SC" panose="020B0200000000000000" charset="-122"/>
+                <a:cs typeface="Noto Sans SC" panose="020B0200000000000000" charset="-122"/>
+                <a:sym typeface="Noto Sans SC" panose="020B0200000000000000" charset="-122"/>
               </a:rPr>
               <a:t>当前问题：</a:t>
             </a:r>
             <a:r>
-              <a:rPr lang="en-US" b="false" i="false" strike="noStrike" u="none" sz="1200">
+              <a:rPr lang="en-US" sz="1200" b="0" i="0" u="none" strike="noStrike">
                 <a:solidFill>
                   <a:srgbClr val="E5E7EB"/>
                 </a:solidFill>
-                <a:latin typeface="Noto Sans SC"/>
-                <a:ea typeface="Noto Sans SC"/>
-                <a:cs typeface="Noto Sans SC"/>
-                <a:sym typeface="Noto Sans SC"/>
+                <a:latin typeface="Noto Sans SC" panose="020B0200000000000000" charset="-122"/>
+                <a:ea typeface="Noto Sans SC" panose="020B0200000000000000" charset="-122"/>
+                <a:cs typeface="Noto Sans SC" panose="020B0200000000000000" charset="-122"/>
+                <a:sym typeface="Noto Sans SC" panose="020B0200000000000000" charset="-122"/>
               </a:rPr>
               <a:t>通用VLM模型特定任务效果不佳，参数量大，推理速度慢。</a:t>
             </a:r>
@@ -12911,12 +12913,12 @@
       </p:sp>
       <p:sp>
         <p:nvSpPr>
-          <p:cNvPr name="AutoShape 27" id="27"/>
+          <p:cNvPr id="27" name="AutoShape 27"/>
           <p:cNvSpPr/>
           <p:nvPr/>
         </p:nvSpPr>
         <p:spPr>
-          <a:xfrm rot="0" flipH="false" flipV="false">
+          <a:xfrm>
             <a:off x="8255000" y="4000500"/>
             <a:ext cx="3302000" cy="889000"/>
           </a:xfrm>
@@ -12930,31 +12932,30 @@
               <a:alpha val="20000"/>
             </a:srgbClr>
           </a:solidFill>
-          <a:ln w="25400" cmpd="sng" cap="flat">
+          <a:ln w="25400" cap="flat" cmpd="sng">
             <a:noFill/>
             <a:prstDash val="solid"/>
             <a:round/>
           </a:ln>
         </p:spPr>
         <p:txBody>
-          <a:bodyPr anchor="ctr" rtlCol="false" vert="horz" wrap="square" lIns="63500" rIns="63500" tIns="63500" bIns="63500"/>
+          <a:bodyPr vert="horz" wrap="square" lIns="63500" tIns="63500" rIns="63500" bIns="63500" rtlCol="0" anchor="ctr"/>
           <a:lstStyle/>
           <a:p>
             <a:pPr algn="ctr">
               <a:defRPr/>
             </a:pPr>
-            <a:endParaRPr/>
           </a:p>
         </p:txBody>
       </p:sp>
       <p:sp>
         <p:nvSpPr>
-          <p:cNvPr name="AutoShape 28" id="28"/>
+          <p:cNvPr id="28" name="AutoShape 28"/>
           <p:cNvSpPr/>
           <p:nvPr/>
         </p:nvSpPr>
         <p:spPr>
-          <a:xfrm rot="0" flipH="false" flipV="false">
+          <a:xfrm>
             <a:off x="8318500" y="4064000"/>
             <a:ext cx="3175000" cy="762000"/>
           </a:xfrm>
@@ -12962,43 +12963,43 @@
             <a:avLst/>
           </a:prstGeom>
           <a:noFill/>
-          <a:ln w="12700" cmpd="sng" cap="flat">
+          <a:ln w="12700" cap="flat" cmpd="sng">
             <a:noFill/>
             <a:prstDash val="solid"/>
             <a:round/>
           </a:ln>
         </p:spPr>
         <p:txBody>
-          <a:bodyPr anchor="t" rtlCol="false" anchorCtr="false" vert="horz" wrap="square" lIns="0" rIns="0" tIns="0" bIns="0"/>
+          <a:bodyPr vert="horz" wrap="square" lIns="0" tIns="0" rIns="0" bIns="0" rtlCol="0" anchor="t" anchorCtr="0"/>
           <a:lstStyle/>
           <a:p>
-            <a:pPr algn="l" indent="0">
+            <a:pPr indent="0" algn="l">
               <a:lnSpc>
                 <a:spcPct val="125000"/>
               </a:lnSpc>
               <a:defRPr/>
             </a:pPr>
             <a:r>
-              <a:rPr lang="en-US" b="true" i="false" strike="noStrike" u="none" sz="1400">
+              <a:rPr lang="en-US" sz="1400" b="1" i="0" u="none" strike="noStrike">
                 <a:solidFill>
                   <a:srgbClr val="FFD700"/>
                 </a:solidFill>
-                <a:latin typeface="Noto Sans SC"/>
-                <a:ea typeface="Noto Sans SC"/>
-                <a:cs typeface="Noto Sans SC"/>
-                <a:sym typeface="Noto Sans SC"/>
+                <a:latin typeface="Noto Sans SC" panose="020B0200000000000000" charset="-122"/>
+                <a:ea typeface="Noto Sans SC" panose="020B0200000000000000" charset="-122"/>
+                <a:cs typeface="Noto Sans SC" panose="020B0200000000000000" charset="-122"/>
+                <a:sym typeface="Noto Sans SC" panose="020B0200000000000000" charset="-122"/>
               </a:rPr>
               <a:t>目标效果：</a:t>
             </a:r>
             <a:r>
-              <a:rPr lang="en-US" b="false" i="false" strike="noStrike" u="none" sz="1200">
+              <a:rPr lang="en-US" sz="1200" b="0" i="0" u="none" strike="noStrike">
                 <a:solidFill>
                   <a:srgbClr val="E5E7EB"/>
                 </a:solidFill>
-                <a:latin typeface="Noto Sans SC"/>
-                <a:ea typeface="Noto Sans SC"/>
-                <a:cs typeface="Noto Sans SC"/>
-                <a:sym typeface="Noto Sans SC"/>
+                <a:latin typeface="Noto Sans SC" panose="020B0200000000000000" charset="-122"/>
+                <a:ea typeface="Noto Sans SC" panose="020B0200000000000000" charset="-122"/>
+                <a:cs typeface="Noto Sans SC" panose="020B0200000000000000" charset="-122"/>
+                <a:sym typeface="Noto Sans SC" panose="020B0200000000000000" charset="-122"/>
               </a:rPr>
               <a:t>提升排序准确性与相关性，通过模型压缩优化保证推理速度。</a:t>
             </a:r>
@@ -13008,12 +13009,12 @@
       </p:sp>
       <p:sp>
         <p:nvSpPr>
-          <p:cNvPr name="AutoShape 29" id="29"/>
+          <p:cNvPr id="29" name="AutoShape 29"/>
           <p:cNvSpPr/>
           <p:nvPr/>
         </p:nvSpPr>
         <p:spPr>
-          <a:xfrm rot="0" flipH="false" flipV="false">
+          <a:xfrm>
             <a:off x="8255000" y="4953000"/>
             <a:ext cx="3302000" cy="762000"/>
           </a:xfrm>
@@ -13027,31 +13028,30 @@
               <a:alpha val="20000"/>
             </a:srgbClr>
           </a:solidFill>
-          <a:ln w="25400" cmpd="sng" cap="flat">
+          <a:ln w="25400" cap="flat" cmpd="sng">
             <a:noFill/>
             <a:prstDash val="solid"/>
             <a:round/>
           </a:ln>
         </p:spPr>
         <p:txBody>
-          <a:bodyPr anchor="ctr" rtlCol="false" vert="horz" wrap="square" lIns="63500" rIns="63500" tIns="63500" bIns="63500"/>
+          <a:bodyPr vert="horz" wrap="square" lIns="63500" tIns="63500" rIns="63500" bIns="63500" rtlCol="0" anchor="ctr"/>
           <a:lstStyle/>
           <a:p>
             <a:pPr algn="ctr">
               <a:defRPr/>
             </a:pPr>
-            <a:endParaRPr/>
           </a:p>
         </p:txBody>
       </p:sp>
       <p:sp>
         <p:nvSpPr>
-          <p:cNvPr name="AutoShape 30" id="30"/>
+          <p:cNvPr id="30" name="AutoShape 30"/>
           <p:cNvSpPr/>
           <p:nvPr/>
         </p:nvSpPr>
         <p:spPr>
-          <a:xfrm rot="0" flipH="false" flipV="false">
+          <a:xfrm>
             <a:off x="8318500" y="5016500"/>
             <a:ext cx="3175000" cy="635000"/>
           </a:xfrm>
@@ -13059,43 +13059,43 @@
             <a:avLst/>
           </a:prstGeom>
           <a:noFill/>
-          <a:ln w="12700" cmpd="sng" cap="flat">
+          <a:ln w="12700" cap="flat" cmpd="sng">
             <a:noFill/>
             <a:prstDash val="solid"/>
             <a:round/>
           </a:ln>
         </p:spPr>
         <p:txBody>
-          <a:bodyPr anchor="t" rtlCol="false" anchorCtr="false" vert="horz" wrap="square" lIns="0" rIns="0" tIns="0" bIns="0"/>
+          <a:bodyPr vert="horz" wrap="square" lIns="0" tIns="0" rIns="0" bIns="0" rtlCol="0" anchor="t" anchorCtr="0"/>
           <a:lstStyle/>
           <a:p>
-            <a:pPr algn="l" indent="0">
+            <a:pPr indent="0" algn="l">
               <a:lnSpc>
                 <a:spcPct val="125000"/>
               </a:lnSpc>
               <a:defRPr/>
             </a:pPr>
             <a:r>
-              <a:rPr lang="en-US" b="true" i="false" strike="noStrike" u="none" sz="1400">
+              <a:rPr lang="en-US" sz="1400" b="1" i="0" u="none" strike="noStrike">
                 <a:solidFill>
                   <a:srgbClr val="FFD700"/>
                 </a:solidFill>
-                <a:latin typeface="Noto Sans SC"/>
-                <a:ea typeface="Noto Sans SC"/>
-                <a:cs typeface="Noto Sans SC"/>
-                <a:sym typeface="Noto Sans SC"/>
+                <a:latin typeface="Noto Sans SC" panose="020B0200000000000000" charset="-122"/>
+                <a:ea typeface="Noto Sans SC" panose="020B0200000000000000" charset="-122"/>
+                <a:cs typeface="Noto Sans SC" panose="020B0200000000000000" charset="-122"/>
+                <a:sym typeface="Noto Sans SC" panose="020B0200000000000000" charset="-122"/>
               </a:rPr>
               <a:t>技术方案：</a:t>
             </a:r>
             <a:r>
-              <a:rPr lang="en-US" b="false" i="false" strike="noStrike" u="none" sz="1200">
+              <a:rPr lang="en-US" sz="1200" b="0" i="0" u="none" strike="noStrike">
                 <a:solidFill>
                   <a:srgbClr val="E5E7EB"/>
                 </a:solidFill>
-                <a:latin typeface="Noto Sans SC"/>
-                <a:ea typeface="Noto Sans SC"/>
-                <a:cs typeface="Noto Sans SC"/>
-                <a:sym typeface="Noto Sans SC"/>
+                <a:latin typeface="Noto Sans SC" panose="020B0200000000000000" charset="-122"/>
+                <a:ea typeface="Noto Sans SC" panose="020B0200000000000000" charset="-122"/>
+                <a:cs typeface="Noto Sans SC" panose="020B0200000000000000" charset="-122"/>
+                <a:sym typeface="Noto Sans SC" panose="020B0200000000000000" charset="-122"/>
               </a:rPr>
               <a:t>模型蒸馏技术迁移知识，结合任务标注精调与剪枝量化。</a:t>
             </a:r>
@@ -13105,14 +13105,14 @@
       </p:sp>
       <p:pic>
         <p:nvPicPr>
-          <p:cNvPr name="Picture 31" id="31"/>
+          <p:cNvPr id="31" name="Picture 31"/>
           <p:cNvPicPr>
-            <a:picLocks noChangeAspect="true"/>
+            <a:picLocks noChangeAspect="1"/>
           </p:cNvPicPr>
           <p:nvPr/>
         </p:nvPicPr>
         <p:blipFill>
-          <a:blip r:embed="rId9"/>
+          <a:blip r:embed="rId7"/>
           <a:stretch>
             <a:fillRect/>
           </a:stretch>
@@ -13135,8 +13135,50 @@
 </p:sld>
 </file>
 
+<file path=ppt/slides/slide2.xml><?xml version="1.0" encoding="utf-8"?>
+<p:sld xmlns:a="http://schemas.openxmlformats.org/drawingml/2006/main" xmlns:r="http://schemas.openxmlformats.org/officeDocument/2006/relationships" xmlns:p="http://schemas.openxmlformats.org/presentationml/2006/main">
+  <p:cSld>
+    <p:spTree>
+      <p:nvGrpSpPr>
+        <p:cNvPr id="1" name=""/>
+        <p:cNvGrpSpPr/>
+        <p:nvPr/>
+      </p:nvGrpSpPr>
+      <p:grpSpPr/>
+      <p:pic>
+        <p:nvPicPr>
+          <p:cNvPr id="2" name="图片 1"/>
+          <p:cNvPicPr>
+            <a:picLocks noChangeAspect="1"/>
+          </p:cNvPicPr>
+          <p:nvPr/>
+        </p:nvPicPr>
+        <p:blipFill>
+          <a:blip r:embed="rId1"/>
+          <a:stretch>
+            <a:fillRect/>
+          </a:stretch>
+        </p:blipFill>
+        <p:spPr>
+          <a:xfrm>
+            <a:off x="1169670" y="2747645"/>
+            <a:ext cx="3176905" cy="2775585"/>
+          </a:xfrm>
+          <a:prstGeom prst="rect">
+            <a:avLst/>
+          </a:prstGeom>
+        </p:spPr>
+      </p:pic>
+    </p:spTree>
+  </p:cSld>
+  <p:clrMapOvr>
+    <a:masterClrMapping/>
+  </p:clrMapOvr>
+</p:sld>
+</file>
+
 <file path=ppt/theme/theme1.xml><?xml version="1.0" encoding="utf-8"?>
-<a:theme xmlns:a="http://schemas.openxmlformats.org/drawingml/2006/main" xmlns:r="http://schemas.openxmlformats.org/officeDocument/2006/relationships" name="Office 主题​​">
+<a:theme xmlns:a="http://schemas.openxmlformats.org/drawingml/2006/main" name="Office 主题​​">
   <a:themeElements>
     <a:clrScheme name="Office">
       <a:dk1>
@@ -13411,11 +13453,16 @@
       </a:bgFillStyleLst>
     </a:fmtScheme>
   </a:themeElements>
+  <a:extLst>
+    <a:ext uri="{05A4C25C-085E-4340-85A3-A5531E510DB2}">
+      <thm15:themeFamily xmlns:thm15="http://schemas.microsoft.com/office/thememl/2012/main" name="Office Theme" id="{62F939B6-93AF-4DB8-9C6B-D6C7DFDC589F}" vid="{4A3C46E8-61CC-4603-A589-7422A47A8E4A}"/>
+    </a:ext>
+  </a:extLst>
 </a:theme>
 </file>
 
 <file path=ppt/theme/theme2.xml><?xml version="1.0" encoding="utf-8"?>
-<a:theme xmlns:a="http://schemas.openxmlformats.org/drawingml/2006/main" xmlns:r="http://schemas.openxmlformats.org/officeDocument/2006/relationships" name="Office 主题​​">
+<a:theme xmlns:a="http://schemas.openxmlformats.org/drawingml/2006/main" name="默认主题">
   <a:themeElements>
     <a:clrScheme name="Office">
       <a:dk1>
@@ -13690,11 +13737,16 @@
       </a:bgFillStyleLst>
     </a:fmtScheme>
   </a:themeElements>
+  <a:extLst>
+    <a:ext uri="{05A4C25C-085E-4340-85A3-A5531E510DB2}">
+      <thm15:themeFamily xmlns:thm15="http://schemas.microsoft.com/office/thememl/2012/main" name="Office Theme" id="{62F939B6-93AF-4DB8-9C6B-D6C7DFDC589F}" vid="{4A3C46E8-61CC-4603-A589-7422A47A8E4A}"/>
+    </a:ext>
+  </a:extLst>
 </a:theme>
 </file>
 
 <file path=ppt/theme/theme3.xml><?xml version="1.0" encoding="utf-8"?>
-<a:theme xmlns:a="http://schemas.openxmlformats.org/drawingml/2006/main" xmlns:r="http://schemas.openxmlformats.org/officeDocument/2006/relationships" name="默认主题">
+<a:theme xmlns:a="http://schemas.openxmlformats.org/drawingml/2006/main" name="Office 主题​​">
   <a:themeElements>
     <a:clrScheme name="Office">
       <a:dk1>
@@ -13969,5 +14021,10 @@
       </a:bgFillStyleLst>
     </a:fmtScheme>
   </a:themeElements>
+  <a:extLst>
+    <a:ext uri="{05A4C25C-085E-4340-85A3-A5531E510DB2}">
+      <thm15:themeFamily xmlns:thm15="http://schemas.microsoft.com/office/thememl/2012/main" name="Office Theme" id="{62F939B6-93AF-4DB8-9C6B-D6C7DFDC589F}" vid="{4A3C46E8-61CC-4603-A589-7422A47A8E4A}"/>
+    </a:ext>
+  </a:extLst>
 </a:theme>
 </file>